--- a/NOVO_CR_Apresentacao_v3.pptx
+++ b/NOVO_CR_Apresentacao_v3.pptx
@@ -29,6 +29,7 @@
     <p:sldId id="277" r:id="rId28"/>
     <p:sldId id="278" r:id="rId29"/>
     <p:sldId id="279" r:id="rId30"/>
+    <p:sldId id="280" r:id="rId31"/>
   </p:sldIdLst>
   <p:sldSz cx="12191695" cy="6858000" type="screen4x3"/>
   <p:notesSz cx="6858000" cy="9144000"/>
@@ -7267,7 +7268,7 @@
               </a:defRPr>
             </a:pPr>
             <a:r>
-              <a:t>Entretanto, emergem dificuldades coletivas em temas que exigem maior interpretação de enunciados e aplicação de conceitos em contextos mais complexos ou menos rotineiros. A recorrência de recomendações sobre aprofundamento na leitura de problemas e atenção a detalhes sugere que, embora a base conceitual esteja bem estabelecida, há uma lacuna quando se trata de transpor o conhecimento para situaçõe</a:t>
+              <a:t>A Prova Álgebra-V revelou uma turma em **transição entre domínio operacional e formalização**. Os dados disponíveis mostram um contraste marcante: enquanto um aluno (Ana) demonstra excelência consolidada em todas as dimensões algébricas, o outro (Bruno) revela um padrão recorrente de competência conceitual mascarada por deficiências em documentação e completude de procedimentos.</a:t>
             </a:r>
           </a:p>
         </p:txBody>
@@ -7306,7 +7307,7 @@
               </a:defRPr>
             </a:pPr>
             <a:r>
-              <a:t>Implicações pedagógicas geradas pela IA:</a:t>
+              <a:t>Diagnóstico gerado pela IA:</a:t>
             </a:r>
           </a:p>
           <a:p>
@@ -7335,7 +7336,7 @@
               </a:defRPr>
             </a:pPr>
             <a:r>
-              <a:t>  1.  Reservar tempo para leitura e análise detalhada de enunciados</a:t>
+              <a:t>  Turma em transição entre domínio operacional e formalização.</a:t>
             </a:r>
           </a:p>
           <a:p>
@@ -7351,7 +7352,7 @@
               </a:defRPr>
             </a:pPr>
             <a:r>
-              <a:t>  2.  Organizar oficinas de escrita formal de provas matemáticas</a:t>
+              <a:t>  Excelência consolidada em alguns alunos vs. deficiências estruturais em outros.</a:t>
             </a:r>
           </a:p>
           <a:p>
@@ -7367,7 +7368,7 @@
               </a:defRPr>
             </a:pPr>
             <a:r>
-              <a:t>  3.  Promover correções comentadas e devolutivas rápidas</a:t>
+              <a:t>  Competência conceitual mascarada por deficiências em documentação.</a:t>
             </a:r>
           </a:p>
         </p:txBody>
@@ -7402,7 +7403,7 @@
                 <a:latin typeface="Segoe UI"/>
                 <a:hlinkClick r:id="rId2"/>
               </a:rPr>
-              <a:t>→ Ver relatório completo: 04_desempenho_tarefa.pdf</a:t>
+              <a:t>→ Ver relatório completo: Desempenho Tarefa (Matemática-V)</a:t>
             </a:r>
           </a:p>
         </p:txBody>
@@ -7507,7 +7508,7 @@
               </a:defRPr>
             </a:pPr>
             <a:r>
-              <a:t>Tudo Isso É Real</a:t>
+              <a:t>Desempenho por Matéria — Análise Cross-Turma</a:t>
             </a:r>
           </a:p>
         </p:txBody>
@@ -7563,8 +7564,51 @@
         </p:nvSpPr>
         <p:spPr>
           <a:xfrm>
-            <a:off x="731520" y="1280160"/>
-            <a:ext cx="2011680" cy="594360"/>
+            <a:off x="548640" y="1188720"/>
+            <a:ext cx="10972800" cy="2194560"/>
+          </a:xfrm>
+          <a:prstGeom prst="rect">
+            <a:avLst/>
+          </a:prstGeom>
+          <a:solidFill>
+            <a:srgbClr val="F0F2F5"/>
+          </a:solidFill>
+          <a:ln>
+            <a:noFill/>
+          </a:ln>
+        </p:spPr>
+        <p:style>
+          <a:lnRef idx="1">
+            <a:schemeClr val="accent1"/>
+          </a:lnRef>
+          <a:fillRef idx="3">
+            <a:schemeClr val="accent1"/>
+          </a:fillRef>
+          <a:effectRef idx="2">
+            <a:schemeClr val="accent1"/>
+          </a:effectRef>
+          <a:fontRef idx="minor">
+            <a:schemeClr val="lt1"/>
+          </a:fontRef>
+        </p:style>
+        <p:txBody>
+          <a:bodyPr rtlCol="0" anchor="ctr"/>
+          <a:lstStyle/>
+          <a:p>
+            <a:pPr algn="ctr"/>
+          </a:p>
+        </p:txBody>
+      </p:sp>
+      <p:sp>
+        <p:nvSpPr>
+          <p:cNvPr id="6" name="Rectangle 5"/>
+          <p:cNvSpPr/>
+          <p:nvPr/>
+        </p:nvSpPr>
+        <p:spPr>
+          <a:xfrm>
+            <a:off x="548640" y="1188720"/>
+            <a:ext cx="54864" cy="2194560"/>
           </a:xfrm>
           <a:prstGeom prst="rect">
             <a:avLst/>
@@ -7600,14 +7644,14 @@
       </p:sp>
       <p:sp>
         <p:nvSpPr>
-          <p:cNvPr id="6" name="TextBox 5"/>
+          <p:cNvPr id="7" name="TextBox 6"/>
           <p:cNvSpPr txBox="1"/>
           <p:nvPr/>
         </p:nvSpPr>
         <p:spPr>
           <a:xfrm>
-            <a:off x="731520" y="1389888"/>
-            <a:ext cx="2011680" cy="411480"/>
+            <a:off x="822960" y="1371600"/>
+            <a:ext cx="10332720" cy="1828800"/>
           </a:xfrm>
           <a:prstGeom prst="rect">
             <a:avLst/>
@@ -7620,30 +7664,94 @@
           </a:bodyPr>
           <a:lstStyle/>
           <a:p>
-            <a:pPr algn="ctr">
+            <a:pPr>
+              <a:spcAft>
+                <a:spcPts val="840"/>
+              </a:spcAft>
               <a:defRPr sz="1400" b="1">
                 <a:solidFill>
-                  <a:srgbClr val="FFFFFF"/>
-                </a:solidFill>
-                <a:latin typeface="Segoe UI"/>
-              </a:defRPr>
-            </a:pPr>
-            <a:r>
-              <a:t>Questão</a:t>
-            </a:r>
-          </a:p>
-        </p:txBody>
-      </p:sp>
-      <p:sp>
-        <p:nvSpPr>
-          <p:cNvPr id="7" name="TextBox 6"/>
+                  <a:srgbClr val="0056A0"/>
+                </a:solidFill>
+                <a:latin typeface="Segoe UI"/>
+              </a:defRPr>
+            </a:pPr>
+            <a:r>
+              <a:t>Trecho real — Síntese Cross-Turma (Matemática-V):</a:t>
+            </a:r>
+          </a:p>
+          <a:p>
+            <a:pPr>
+              <a:spcAft>
+                <a:spcPts val="840"/>
+              </a:spcAft>
+              <a:defRPr sz="1400" b="0">
+                <a:solidFill>
+                  <a:srgbClr val="333333"/>
+                </a:solidFill>
+                <a:latin typeface="Segoe UI"/>
+              </a:defRPr>
+            </a:pPr>
+          </a:p>
+          <a:p>
+            <a:pPr>
+              <a:spcAft>
+                <a:spcPts val="840"/>
+              </a:spcAft>
+              <a:defRPr sz="1400" b="0">
+                <a:solidFill>
+                  <a:srgbClr val="333333"/>
+                </a:solidFill>
+                <a:latin typeface="Segoe UI"/>
+              </a:defRPr>
+            </a:pPr>
+            <a:r>
+              <a:t>Matemática-V apresenta um quadro misto e polarizado. O aprendizado não é</a:t>
+            </a:r>
+          </a:p>
+          <a:p>
+            <a:pPr>
+              <a:spcAft>
+                <a:spcPts val="840"/>
+              </a:spcAft>
+              <a:defRPr sz="1400" b="0">
+                <a:solidFill>
+                  <a:srgbClr val="333333"/>
+                </a:solidFill>
+                <a:latin typeface="Segoe UI"/>
+              </a:defRPr>
+            </a:pPr>
+            <a:r>
+              <a:t>uniforme: há alunos com domínio excepcional, mas também alunos com deficiências</a:t>
+            </a:r>
+          </a:p>
+          <a:p>
+            <a:pPr>
+              <a:spcAft>
+                <a:spcPts val="840"/>
+              </a:spcAft>
+              <a:defRPr sz="1400" b="0">
+                <a:solidFill>
+                  <a:srgbClr val="333333"/>
+                </a:solidFill>
+                <a:latin typeface="Segoe UI"/>
+              </a:defRPr>
+            </a:pPr>
+            <a:r>
+              <a:t>estruturais significativas.</a:t>
+            </a:r>
+          </a:p>
+        </p:txBody>
+      </p:sp>
+      <p:sp>
+        <p:nvSpPr>
+          <p:cNvPr id="8" name="TextBox 7"/>
           <p:cNvSpPr txBox="1"/>
           <p:nvPr/>
         </p:nvSpPr>
         <p:spPr>
           <a:xfrm>
-            <a:off x="2926080" y="1325880"/>
-            <a:ext cx="3200400" cy="548640"/>
+            <a:off x="731520" y="3657600"/>
+            <a:ext cx="10515600" cy="2011680"/>
           </a:xfrm>
           <a:prstGeom prst="rect">
             <a:avLst/>
@@ -7656,8 +7764,85 @@
           </a:bodyPr>
           <a:lstStyle/>
           <a:p>
-            <a:pPr algn="l">
-              <a:defRPr sz="1600" b="1">
+            <a:pPr>
+              <a:spcAft>
+                <a:spcPts val="840"/>
+              </a:spcAft>
+              <a:defRPr sz="1400" b="1">
+                <a:solidFill>
+                  <a:srgbClr val="0056A0"/>
+                </a:solidFill>
+                <a:latin typeface="Segoe UI"/>
+              </a:defRPr>
+            </a:pPr>
+            <a:r>
+              <a:t>Comparação entre turmas (gerada automaticamente):</a:t>
+            </a:r>
+          </a:p>
+          <a:p>
+            <a:pPr>
+              <a:spcAft>
+                <a:spcPts val="840"/>
+              </a:spcAft>
+              <a:defRPr sz="1400" b="0">
+                <a:solidFill>
+                  <a:srgbClr val="333333"/>
+                </a:solidFill>
+                <a:latin typeface="Segoe UI"/>
+              </a:defRPr>
+            </a:pPr>
+          </a:p>
+          <a:p>
+            <a:pPr>
+              <a:spcAft>
+                <a:spcPts val="840"/>
+              </a:spcAft>
+              <a:defRPr sz="1400" b="0">
+                <a:solidFill>
+                  <a:srgbClr val="333333"/>
+                </a:solidFill>
+                <a:latin typeface="Segoe UI"/>
+              </a:defRPr>
+            </a:pPr>
+            <a:r>
+              <a:t>Alpha-V:  Média Álgebra 6.63  |  Média Geometria 6.88  |  Polarizado</a:t>
+            </a:r>
+          </a:p>
+          <a:p>
+            <a:pPr>
+              <a:spcAft>
+                <a:spcPts val="840"/>
+              </a:spcAft>
+              <a:defRPr sz="1400" b="0">
+                <a:solidFill>
+                  <a:srgbClr val="333333"/>
+                </a:solidFill>
+                <a:latin typeface="Segoe UI"/>
+              </a:defRPr>
+            </a:pPr>
+            <a:r>
+              <a:t>Beta-V:   Média Álgebra ~5.6   |  Média Geometria ~5.95  |  Intermediário</a:t>
+            </a:r>
+          </a:p>
+          <a:p>
+            <a:pPr>
+              <a:spcAft>
+                <a:spcPts val="840"/>
+              </a:spcAft>
+              <a:defRPr sz="1400" b="0">
+                <a:solidFill>
+                  <a:srgbClr val="333333"/>
+                </a:solidFill>
+                <a:latin typeface="Segoe UI"/>
+              </a:defRPr>
+            </a:pPr>
+          </a:p>
+          <a:p>
+            <a:pPr>
+              <a:spcAft>
+                <a:spcPts val="840"/>
+              </a:spcAft>
+              <a:defRPr sz="1400" b="1">
                 <a:solidFill>
                   <a:srgbClr val="002B5C"/>
                 </a:solidFill>
@@ -7665,21 +7850,37 @@
               </a:defRPr>
             </a:pPr>
             <a:r>
-              <a:t>Correção</a:t>
-            </a:r>
-          </a:p>
-        </p:txBody>
-      </p:sp>
-      <p:sp>
-        <p:nvSpPr>
-          <p:cNvPr id="8" name="TextBox 7"/>
+              <a:t>Diagnóstico: não é um problema de capacidade cognitiva geral, mas de lacunas</a:t>
+            </a:r>
+          </a:p>
+          <a:p>
+            <a:pPr>
+              <a:spcAft>
+                <a:spcPts val="840"/>
+              </a:spcAft>
+              <a:defRPr sz="1400" b="1">
+                <a:solidFill>
+                  <a:srgbClr val="002B5C"/>
+                </a:solidFill>
+                <a:latin typeface="Segoe UI"/>
+              </a:defRPr>
+            </a:pPr>
+            <a:r>
+              <a:t>específicas, falta de metodologia, e deficiências em comunicação matemática.</a:t>
+            </a:r>
+          </a:p>
+        </p:txBody>
+      </p:sp>
+      <p:sp>
+        <p:nvSpPr>
+          <p:cNvPr id="9" name="TextBox 8"/>
           <p:cNvSpPr txBox="1"/>
           <p:nvPr/>
         </p:nvSpPr>
         <p:spPr>
           <a:xfrm>
-            <a:off x="6217920" y="1325880"/>
-            <a:ext cx="3657600" cy="548640"/>
+            <a:off x="731520" y="5943600"/>
+            <a:ext cx="7315200" cy="365760"/>
           </a:xfrm>
           <a:prstGeom prst="rect">
             <a:avLst/>
@@ -7692,1017 +7893,15 @@
           </a:bodyPr>
           <a:lstStyle/>
           <a:p>
-            <a:pPr algn="l">
-              <a:defRPr sz="1400" b="0">
-                <a:solidFill>
-                  <a:srgbClr val="666666"/>
-                </a:solidFill>
-                <a:latin typeface="Segoe UI"/>
-              </a:defRPr>
-            </a:pPr>
-            <a:r>
-              <a:t>Raciocínio, tipo de erro, potencial</a:t>
-            </a:r>
-          </a:p>
-        </p:txBody>
-      </p:sp>
-      <p:sp>
-        <p:nvSpPr>
-          <p:cNvPr id="9" name="TextBox 8"/>
-          <p:cNvSpPr txBox="1"/>
-          <p:nvPr/>
-        </p:nvSpPr>
-        <p:spPr>
-          <a:xfrm>
-            <a:off x="10058400" y="1325880"/>
-            <a:ext cx="1828800" cy="548640"/>
-          </a:xfrm>
-          <a:prstGeom prst="rect">
-            <a:avLst/>
-          </a:prstGeom>
-          <a:noFill/>
-        </p:spPr>
-        <p:txBody>
-          <a:bodyPr wrap="square">
-            <a:spAutoFit/>
-          </a:bodyPr>
-          <a:lstStyle/>
-          <a:p>
-            <a:r>
-              <a:rPr sz="1100" u="sng">
+            <a:r>
+              <a:rPr sz="1400" u="sng">
                 <a:solidFill>
                   <a:srgbClr val="4A90D9"/>
                 </a:solidFill>
                 <a:latin typeface="Segoe UI"/>
                 <a:hlinkClick r:id="rId2"/>
               </a:rPr>
-              <a:t>📎 Abrir PDF</a:t>
-            </a:r>
-          </a:p>
-        </p:txBody>
-      </p:sp>
-      <p:sp>
-        <p:nvSpPr>
-          <p:cNvPr id="10" name="Rectangle 9"/>
-          <p:cNvSpPr/>
-          <p:nvPr/>
-        </p:nvSpPr>
-        <p:spPr>
-          <a:xfrm>
-            <a:off x="731520" y="2057400"/>
-            <a:ext cx="2011680" cy="594360"/>
-          </a:xfrm>
-          <a:prstGeom prst="rect">
-            <a:avLst/>
-          </a:prstGeom>
-          <a:solidFill>
-            <a:srgbClr val="0056A0"/>
-          </a:solidFill>
-          <a:ln>
-            <a:noFill/>
-          </a:ln>
-        </p:spPr>
-        <p:style>
-          <a:lnRef idx="1">
-            <a:schemeClr val="accent1"/>
-          </a:lnRef>
-          <a:fillRef idx="3">
-            <a:schemeClr val="accent1"/>
-          </a:fillRef>
-          <a:effectRef idx="2">
-            <a:schemeClr val="accent1"/>
-          </a:effectRef>
-          <a:fontRef idx="minor">
-            <a:schemeClr val="lt1"/>
-          </a:fontRef>
-        </p:style>
-        <p:txBody>
-          <a:bodyPr rtlCol="0" anchor="ctr"/>
-          <a:lstStyle/>
-          <a:p>
-            <a:pPr algn="ctr"/>
-          </a:p>
-        </p:txBody>
-      </p:sp>
-      <p:sp>
-        <p:nvSpPr>
-          <p:cNvPr id="11" name="TextBox 10"/>
-          <p:cNvSpPr txBox="1"/>
-          <p:nvPr/>
-        </p:nvSpPr>
-        <p:spPr>
-          <a:xfrm>
-            <a:off x="731520" y="2167128"/>
-            <a:ext cx="2011680" cy="411480"/>
-          </a:xfrm>
-          <a:prstGeom prst="rect">
-            <a:avLst/>
-          </a:prstGeom>
-          <a:noFill/>
-        </p:spPr>
-        <p:txBody>
-          <a:bodyPr wrap="square">
-            <a:spAutoFit/>
-          </a:bodyPr>
-          <a:lstStyle/>
-          <a:p>
-            <a:pPr algn="ctr">
-              <a:defRPr sz="1400" b="1">
-                <a:solidFill>
-                  <a:srgbClr val="FFFFFF"/>
-                </a:solidFill>
-                <a:latin typeface="Segoe UI"/>
-              </a:defRPr>
-            </a:pPr>
-            <a:r>
-              <a:t>Aluno</a:t>
-            </a:r>
-          </a:p>
-        </p:txBody>
-      </p:sp>
-      <p:sp>
-        <p:nvSpPr>
-          <p:cNvPr id="12" name="TextBox 11"/>
-          <p:cNvSpPr txBox="1"/>
-          <p:nvPr/>
-        </p:nvSpPr>
-        <p:spPr>
-          <a:xfrm>
-            <a:off x="2926080" y="2103120"/>
-            <a:ext cx="3200400" cy="548640"/>
-          </a:xfrm>
-          <a:prstGeom prst="rect">
-            <a:avLst/>
-          </a:prstGeom>
-          <a:noFill/>
-        </p:spPr>
-        <p:txBody>
-          <a:bodyPr wrap="square">
-            <a:spAutoFit/>
-          </a:bodyPr>
-          <a:lstStyle/>
-          <a:p>
-            <a:pPr algn="l">
-              <a:defRPr sz="1600" b="1">
-                <a:solidFill>
-                  <a:srgbClr val="002B5C"/>
-                </a:solidFill>
-                <a:latin typeface="Segoe UI"/>
-              </a:defRPr>
-            </a:pPr>
-            <a:r>
-              <a:t>Análise de Habilidades</a:t>
-            </a:r>
-          </a:p>
-        </p:txBody>
-      </p:sp>
-      <p:sp>
-        <p:nvSpPr>
-          <p:cNvPr id="13" name="TextBox 12"/>
-          <p:cNvSpPr txBox="1"/>
-          <p:nvPr/>
-        </p:nvSpPr>
-        <p:spPr>
-          <a:xfrm>
-            <a:off x="6217920" y="2103120"/>
-            <a:ext cx="3657600" cy="548640"/>
-          </a:xfrm>
-          <a:prstGeom prst="rect">
-            <a:avLst/>
-          </a:prstGeom>
-          <a:noFill/>
-        </p:spPr>
-        <p:txBody>
-          <a:bodyPr wrap="square">
-            <a:spAutoFit/>
-          </a:bodyPr>
-          <a:lstStyle/>
-          <a:p>
-            <a:pPr algn="l">
-              <a:defRPr sz="1400" b="0">
-                <a:solidFill>
-                  <a:srgbClr val="666666"/>
-                </a:solidFill>
-                <a:latin typeface="Segoe UI"/>
-              </a:defRPr>
-            </a:pPr>
-            <a:r>
-              <a:t>Perfil cognitivo, padrões, recomendações</a:t>
-            </a:r>
-          </a:p>
-        </p:txBody>
-      </p:sp>
-      <p:sp>
-        <p:nvSpPr>
-          <p:cNvPr id="14" name="TextBox 13"/>
-          <p:cNvSpPr txBox="1"/>
-          <p:nvPr/>
-        </p:nvSpPr>
-        <p:spPr>
-          <a:xfrm>
-            <a:off x="10058400" y="2103120"/>
-            <a:ext cx="1828800" cy="548640"/>
-          </a:xfrm>
-          <a:prstGeom prst="rect">
-            <a:avLst/>
-          </a:prstGeom>
-          <a:noFill/>
-        </p:spPr>
-        <p:txBody>
-          <a:bodyPr wrap="square">
-            <a:spAutoFit/>
-          </a:bodyPr>
-          <a:lstStyle/>
-          <a:p>
-            <a:r>
-              <a:rPr sz="1100" u="sng">
-                <a:solidFill>
-                  <a:srgbClr val="4A90D9"/>
-                </a:solidFill>
-                <a:latin typeface="Segoe UI"/>
-                <a:hlinkClick r:id="rId3"/>
-              </a:rPr>
-              <a:t>📎 Abrir PDF</a:t>
-            </a:r>
-          </a:p>
-        </p:txBody>
-      </p:sp>
-      <p:sp>
-        <p:nvSpPr>
-          <p:cNvPr id="15" name="Rectangle 14"/>
-          <p:cNvSpPr/>
-          <p:nvPr/>
-        </p:nvSpPr>
-        <p:spPr>
-          <a:xfrm>
-            <a:off x="731520" y="2834640"/>
-            <a:ext cx="2011680" cy="594360"/>
-          </a:xfrm>
-          <a:prstGeom prst="rect">
-            <a:avLst/>
-          </a:prstGeom>
-          <a:solidFill>
-            <a:srgbClr val="0056A0"/>
-          </a:solidFill>
-          <a:ln>
-            <a:noFill/>
-          </a:ln>
-        </p:spPr>
-        <p:style>
-          <a:lnRef idx="1">
-            <a:schemeClr val="accent1"/>
-          </a:lnRef>
-          <a:fillRef idx="3">
-            <a:schemeClr val="accent1"/>
-          </a:fillRef>
-          <a:effectRef idx="2">
-            <a:schemeClr val="accent1"/>
-          </a:effectRef>
-          <a:fontRef idx="minor">
-            <a:schemeClr val="lt1"/>
-          </a:fontRef>
-        </p:style>
-        <p:txBody>
-          <a:bodyPr rtlCol="0" anchor="ctr"/>
-          <a:lstStyle/>
-          <a:p>
-            <a:pPr algn="ctr"/>
-          </a:p>
-        </p:txBody>
-      </p:sp>
-      <p:sp>
-        <p:nvSpPr>
-          <p:cNvPr id="16" name="TextBox 15"/>
-          <p:cNvSpPr txBox="1"/>
-          <p:nvPr/>
-        </p:nvSpPr>
-        <p:spPr>
-          <a:xfrm>
-            <a:off x="731520" y="2944368"/>
-            <a:ext cx="2011680" cy="411480"/>
-          </a:xfrm>
-          <a:prstGeom prst="rect">
-            <a:avLst/>
-          </a:prstGeom>
-          <a:noFill/>
-        </p:spPr>
-        <p:txBody>
-          <a:bodyPr wrap="square">
-            <a:spAutoFit/>
-          </a:bodyPr>
-          <a:lstStyle/>
-          <a:p>
-            <a:pPr algn="ctr">
-              <a:defRPr sz="1400" b="1">
-                <a:solidFill>
-                  <a:srgbClr val="FFFFFF"/>
-                </a:solidFill>
-                <a:latin typeface="Segoe UI"/>
-              </a:defRPr>
-            </a:pPr>
-            <a:r>
-              <a:t>Aluno</a:t>
-            </a:r>
-          </a:p>
-        </p:txBody>
-      </p:sp>
-      <p:sp>
-        <p:nvSpPr>
-          <p:cNvPr id="17" name="TextBox 16"/>
-          <p:cNvSpPr txBox="1"/>
-          <p:nvPr/>
-        </p:nvSpPr>
-        <p:spPr>
-          <a:xfrm>
-            <a:off x="2926080" y="2880360"/>
-            <a:ext cx="3200400" cy="548640"/>
-          </a:xfrm>
-          <a:prstGeom prst="rect">
-            <a:avLst/>
-          </a:prstGeom>
-          <a:noFill/>
-        </p:spPr>
-        <p:txBody>
-          <a:bodyPr wrap="square">
-            <a:spAutoFit/>
-          </a:bodyPr>
-          <a:lstStyle/>
-          <a:p>
-            <a:pPr algn="l">
-              <a:defRPr sz="1600" b="1">
-                <a:solidFill>
-                  <a:srgbClr val="002B5C"/>
-                </a:solidFill>
-                <a:latin typeface="Segoe UI"/>
-              </a:defRPr>
-            </a:pPr>
-            <a:r>
-              <a:t>Relatório Final</a:t>
-            </a:r>
-          </a:p>
-        </p:txBody>
-      </p:sp>
-      <p:sp>
-        <p:nvSpPr>
-          <p:cNvPr id="18" name="TextBox 17"/>
-          <p:cNvSpPr txBox="1"/>
-          <p:nvPr/>
-        </p:nvSpPr>
-        <p:spPr>
-          <a:xfrm>
-            <a:off x="6217920" y="2880360"/>
-            <a:ext cx="3657600" cy="548640"/>
-          </a:xfrm>
-          <a:prstGeom prst="rect">
-            <a:avLst/>
-          </a:prstGeom>
-          <a:noFill/>
-        </p:spPr>
-        <p:txBody>
-          <a:bodyPr wrap="square">
-            <a:spAutoFit/>
-          </a:bodyPr>
-          <a:lstStyle/>
-          <a:p>
-            <a:pPr algn="l">
-              <a:defRPr sz="1400" b="0">
-                <a:solidFill>
-                  <a:srgbClr val="666666"/>
-                </a:solidFill>
-                <a:latin typeface="Segoe UI"/>
-              </a:defRPr>
-            </a:pPr>
-            <a:r>
-              <a:t>Narrativa completa para aluno e pais</a:t>
-            </a:r>
-          </a:p>
-        </p:txBody>
-      </p:sp>
-      <p:sp>
-        <p:nvSpPr>
-          <p:cNvPr id="19" name="TextBox 18"/>
-          <p:cNvSpPr txBox="1"/>
-          <p:nvPr/>
-        </p:nvSpPr>
-        <p:spPr>
-          <a:xfrm>
-            <a:off x="10058400" y="2880360"/>
-            <a:ext cx="1828800" cy="548640"/>
-          </a:xfrm>
-          <a:prstGeom prst="rect">
-            <a:avLst/>
-          </a:prstGeom>
-          <a:noFill/>
-        </p:spPr>
-        <p:txBody>
-          <a:bodyPr wrap="square">
-            <a:spAutoFit/>
-          </a:bodyPr>
-          <a:lstStyle/>
-          <a:p>
-            <a:r>
-              <a:rPr sz="1100" u="sng">
-                <a:solidFill>
-                  <a:srgbClr val="4A90D9"/>
-                </a:solidFill>
-                <a:latin typeface="Segoe UI"/>
-                <a:hlinkClick r:id="rId4"/>
-              </a:rPr>
-              <a:t>📎 Abrir PDF</a:t>
-            </a:r>
-          </a:p>
-        </p:txBody>
-      </p:sp>
-      <p:sp>
-        <p:nvSpPr>
-          <p:cNvPr id="20" name="Rectangle 19"/>
-          <p:cNvSpPr/>
-          <p:nvPr/>
-        </p:nvSpPr>
-        <p:spPr>
-          <a:xfrm>
-            <a:off x="731520" y="3611880"/>
-            <a:ext cx="2011680" cy="594360"/>
-          </a:xfrm>
-          <a:prstGeom prst="rect">
-            <a:avLst/>
-          </a:prstGeom>
-          <a:solidFill>
-            <a:srgbClr val="002B5C"/>
-          </a:solidFill>
-          <a:ln>
-            <a:noFill/>
-          </a:ln>
-        </p:spPr>
-        <p:style>
-          <a:lnRef idx="1">
-            <a:schemeClr val="accent1"/>
-          </a:lnRef>
-          <a:fillRef idx="3">
-            <a:schemeClr val="accent1"/>
-          </a:fillRef>
-          <a:effectRef idx="2">
-            <a:schemeClr val="accent1"/>
-          </a:effectRef>
-          <a:fontRef idx="minor">
-            <a:schemeClr val="lt1"/>
-          </a:fontRef>
-        </p:style>
-        <p:txBody>
-          <a:bodyPr rtlCol="0" anchor="ctr"/>
-          <a:lstStyle/>
-          <a:p>
-            <a:pPr algn="ctr"/>
-          </a:p>
-        </p:txBody>
-      </p:sp>
-      <p:sp>
-        <p:nvSpPr>
-          <p:cNvPr id="21" name="TextBox 20"/>
-          <p:cNvSpPr txBox="1"/>
-          <p:nvPr/>
-        </p:nvSpPr>
-        <p:spPr>
-          <a:xfrm>
-            <a:off x="731520" y="3721608"/>
-            <a:ext cx="2011680" cy="411480"/>
-          </a:xfrm>
-          <a:prstGeom prst="rect">
-            <a:avLst/>
-          </a:prstGeom>
-          <a:noFill/>
-        </p:spPr>
-        <p:txBody>
-          <a:bodyPr wrap="square">
-            <a:spAutoFit/>
-          </a:bodyPr>
-          <a:lstStyle/>
-          <a:p>
-            <a:pPr algn="ctr">
-              <a:defRPr sz="1400" b="1">
-                <a:solidFill>
-                  <a:srgbClr val="FFFFFF"/>
-                </a:solidFill>
-                <a:latin typeface="Segoe UI"/>
-              </a:defRPr>
-            </a:pPr>
-            <a:r>
-              <a:t>Turma × Atividade</a:t>
-            </a:r>
-          </a:p>
-        </p:txBody>
-      </p:sp>
-      <p:sp>
-        <p:nvSpPr>
-          <p:cNvPr id="22" name="TextBox 21"/>
-          <p:cNvSpPr txBox="1"/>
-          <p:nvPr/>
-        </p:nvSpPr>
-        <p:spPr>
-          <a:xfrm>
-            <a:off x="2926080" y="3657600"/>
-            <a:ext cx="3200400" cy="548640"/>
-          </a:xfrm>
-          <a:prstGeom prst="rect">
-            <a:avLst/>
-          </a:prstGeom>
-          <a:noFill/>
-        </p:spPr>
-        <p:txBody>
-          <a:bodyPr wrap="square">
-            <a:spAutoFit/>
-          </a:bodyPr>
-          <a:lstStyle/>
-          <a:p>
-            <a:pPr algn="l">
-              <a:defRPr sz="1600" b="1">
-                <a:solidFill>
-                  <a:srgbClr val="002B5C"/>
-                </a:solidFill>
-                <a:latin typeface="Segoe UI"/>
-              </a:defRPr>
-            </a:pPr>
-            <a:r>
-              <a:t>Desempenho Tarefa</a:t>
-            </a:r>
-          </a:p>
-        </p:txBody>
-      </p:sp>
-      <p:sp>
-        <p:nvSpPr>
-          <p:cNvPr id="23" name="TextBox 22"/>
-          <p:cNvSpPr txBox="1"/>
-          <p:nvPr/>
-        </p:nvSpPr>
-        <p:spPr>
-          <a:xfrm>
-            <a:off x="6217920" y="3657600"/>
-            <a:ext cx="3657600" cy="548640"/>
-          </a:xfrm>
-          <a:prstGeom prst="rect">
-            <a:avLst/>
-          </a:prstGeom>
-          <a:noFill/>
-        </p:spPr>
-        <p:txBody>
-          <a:bodyPr wrap="square">
-            <a:spAutoFit/>
-          </a:bodyPr>
-          <a:lstStyle/>
-          <a:p>
-            <a:pPr algn="l">
-              <a:defRPr sz="1400" b="0">
-                <a:solidFill>
-                  <a:srgbClr val="666666"/>
-                </a:solidFill>
-                <a:latin typeface="Segoe UI"/>
-              </a:defRPr>
-            </a:pPr>
-            <a:r>
-              <a:t>Padrões coletivos, exemplos específicos</a:t>
-            </a:r>
-          </a:p>
-        </p:txBody>
-      </p:sp>
-      <p:sp>
-        <p:nvSpPr>
-          <p:cNvPr id="24" name="TextBox 23"/>
-          <p:cNvSpPr txBox="1"/>
-          <p:nvPr/>
-        </p:nvSpPr>
-        <p:spPr>
-          <a:xfrm>
-            <a:off x="10058400" y="3657600"/>
-            <a:ext cx="1828800" cy="548640"/>
-          </a:xfrm>
-          <a:prstGeom prst="rect">
-            <a:avLst/>
-          </a:prstGeom>
-          <a:noFill/>
-        </p:spPr>
-        <p:txBody>
-          <a:bodyPr wrap="square">
-            <a:spAutoFit/>
-          </a:bodyPr>
-          <a:lstStyle/>
-          <a:p>
-            <a:r>
-              <a:rPr sz="1100" u="sng">
-                <a:solidFill>
-                  <a:srgbClr val="4A90D9"/>
-                </a:solidFill>
-                <a:latin typeface="Segoe UI"/>
-                <a:hlinkClick r:id="rId5"/>
-              </a:rPr>
-              <a:t>📎 Abrir PDF</a:t>
-            </a:r>
-          </a:p>
-        </p:txBody>
-      </p:sp>
-      <p:sp>
-        <p:nvSpPr>
-          <p:cNvPr id="25" name="Rectangle 24"/>
-          <p:cNvSpPr/>
-          <p:nvPr/>
-        </p:nvSpPr>
-        <p:spPr>
-          <a:xfrm>
-            <a:off x="731520" y="4389120"/>
-            <a:ext cx="2011680" cy="594360"/>
-          </a:xfrm>
-          <a:prstGeom prst="rect">
-            <a:avLst/>
-          </a:prstGeom>
-          <a:solidFill>
-            <a:srgbClr val="002B5C"/>
-          </a:solidFill>
-          <a:ln>
-            <a:noFill/>
-          </a:ln>
-        </p:spPr>
-        <p:style>
-          <a:lnRef idx="1">
-            <a:schemeClr val="accent1"/>
-          </a:lnRef>
-          <a:fillRef idx="3">
-            <a:schemeClr val="accent1"/>
-          </a:fillRef>
-          <a:effectRef idx="2">
-            <a:schemeClr val="accent1"/>
-          </a:effectRef>
-          <a:fontRef idx="minor">
-            <a:schemeClr val="lt1"/>
-          </a:fontRef>
-        </p:style>
-        <p:txBody>
-          <a:bodyPr rtlCol="0" anchor="ctr"/>
-          <a:lstStyle/>
-          <a:p>
-            <a:pPr algn="ctr"/>
-          </a:p>
-        </p:txBody>
-      </p:sp>
-      <p:sp>
-        <p:nvSpPr>
-          <p:cNvPr id="26" name="TextBox 25"/>
-          <p:cNvSpPr txBox="1"/>
-          <p:nvPr/>
-        </p:nvSpPr>
-        <p:spPr>
-          <a:xfrm>
-            <a:off x="731520" y="4498848"/>
-            <a:ext cx="2011680" cy="411480"/>
-          </a:xfrm>
-          <a:prstGeom prst="rect">
-            <a:avLst/>
-          </a:prstGeom>
-          <a:noFill/>
-        </p:spPr>
-        <p:txBody>
-          <a:bodyPr wrap="square">
-            <a:spAutoFit/>
-          </a:bodyPr>
-          <a:lstStyle/>
-          <a:p>
-            <a:pPr algn="ctr">
-              <a:defRPr sz="1400" b="1">
-                <a:solidFill>
-                  <a:srgbClr val="FFFFFF"/>
-                </a:solidFill>
-                <a:latin typeface="Segoe UI"/>
-              </a:defRPr>
-            </a:pPr>
-            <a:r>
-              <a:t>Turma</a:t>
-            </a:r>
-          </a:p>
-        </p:txBody>
-      </p:sp>
-      <p:sp>
-        <p:nvSpPr>
-          <p:cNvPr id="27" name="TextBox 26"/>
-          <p:cNvSpPr txBox="1"/>
-          <p:nvPr/>
-        </p:nvSpPr>
-        <p:spPr>
-          <a:xfrm>
-            <a:off x="2926080" y="4434840"/>
-            <a:ext cx="3200400" cy="548640"/>
-          </a:xfrm>
-          <a:prstGeom prst="rect">
-            <a:avLst/>
-          </a:prstGeom>
-          <a:noFill/>
-        </p:spPr>
-        <p:txBody>
-          <a:bodyPr wrap="square">
-            <a:spAutoFit/>
-          </a:bodyPr>
-          <a:lstStyle/>
-          <a:p>
-            <a:pPr algn="l">
-              <a:defRPr sz="1600" b="1">
-                <a:solidFill>
-                  <a:srgbClr val="002B5C"/>
-                </a:solidFill>
-                <a:latin typeface="Segoe UI"/>
-              </a:defRPr>
-            </a:pPr>
-            <a:r>
-              <a:t>Desempenho Turma</a:t>
-            </a:r>
-          </a:p>
-        </p:txBody>
-      </p:sp>
-      <p:sp>
-        <p:nvSpPr>
-          <p:cNvPr id="28" name="TextBox 27"/>
-          <p:cNvSpPr txBox="1"/>
-          <p:nvPr/>
-        </p:nvSpPr>
-        <p:spPr>
-          <a:xfrm>
-            <a:off x="6217920" y="4434840"/>
-            <a:ext cx="3657600" cy="548640"/>
-          </a:xfrm>
-          <a:prstGeom prst="rect">
-            <a:avLst/>
-          </a:prstGeom>
-          <a:noFill/>
-        </p:spPr>
-        <p:txBody>
-          <a:bodyPr wrap="square">
-            <a:spAutoFit/>
-          </a:bodyPr>
-          <a:lstStyle/>
-          <a:p>
-            <a:pPr algn="l">
-              <a:defRPr sz="1400" b="0">
-                <a:solidFill>
-                  <a:srgbClr val="666666"/>
-                </a:solidFill>
-                <a:latin typeface="Segoe UI"/>
-              </a:defRPr>
-            </a:pPr>
-            <a:r>
-              <a:t>Evolução ao longo do tempo</a:t>
-            </a:r>
-          </a:p>
-        </p:txBody>
-      </p:sp>
-      <p:sp>
-        <p:nvSpPr>
-          <p:cNvPr id="29" name="TextBox 28"/>
-          <p:cNvSpPr txBox="1"/>
-          <p:nvPr/>
-        </p:nvSpPr>
-        <p:spPr>
-          <a:xfrm>
-            <a:off x="10058400" y="4434840"/>
-            <a:ext cx="1828800" cy="548640"/>
-          </a:xfrm>
-          <a:prstGeom prst="rect">
-            <a:avLst/>
-          </a:prstGeom>
-          <a:noFill/>
-        </p:spPr>
-        <p:txBody>
-          <a:bodyPr wrap="square">
-            <a:spAutoFit/>
-          </a:bodyPr>
-          <a:lstStyle/>
-          <a:p>
-            <a:r>
-              <a:rPr sz="1100" u="sng">
-                <a:solidFill>
-                  <a:srgbClr val="4A90D9"/>
-                </a:solidFill>
-                <a:latin typeface="Segoe UI"/>
-                <a:hlinkClick r:id="rId6"/>
-              </a:rPr>
-              <a:t>📎 Abrir PDF</a:t>
-            </a:r>
-          </a:p>
-        </p:txBody>
-      </p:sp>
-      <p:sp>
-        <p:nvSpPr>
-          <p:cNvPr id="30" name="Rectangle 29"/>
-          <p:cNvSpPr/>
-          <p:nvPr/>
-        </p:nvSpPr>
-        <p:spPr>
-          <a:xfrm>
-            <a:off x="731520" y="5166360"/>
-            <a:ext cx="2011680" cy="594360"/>
-          </a:xfrm>
-          <a:prstGeom prst="rect">
-            <a:avLst/>
-          </a:prstGeom>
-          <a:solidFill>
-            <a:srgbClr val="002B5C"/>
-          </a:solidFill>
-          <a:ln>
-            <a:noFill/>
-          </a:ln>
-        </p:spPr>
-        <p:style>
-          <a:lnRef idx="1">
-            <a:schemeClr val="accent1"/>
-          </a:lnRef>
-          <a:fillRef idx="3">
-            <a:schemeClr val="accent1"/>
-          </a:fillRef>
-          <a:effectRef idx="2">
-            <a:schemeClr val="accent1"/>
-          </a:effectRef>
-          <a:fontRef idx="minor">
-            <a:schemeClr val="lt1"/>
-          </a:fontRef>
-        </p:style>
-        <p:txBody>
-          <a:bodyPr rtlCol="0" anchor="ctr"/>
-          <a:lstStyle/>
-          <a:p>
-            <a:pPr algn="ctr"/>
-          </a:p>
-        </p:txBody>
-      </p:sp>
-      <p:sp>
-        <p:nvSpPr>
-          <p:cNvPr id="31" name="TextBox 30"/>
-          <p:cNvSpPr txBox="1"/>
-          <p:nvPr/>
-        </p:nvSpPr>
-        <p:spPr>
-          <a:xfrm>
-            <a:off x="731520" y="5276088"/>
-            <a:ext cx="2011680" cy="411480"/>
-          </a:xfrm>
-          <a:prstGeom prst="rect">
-            <a:avLst/>
-          </a:prstGeom>
-          <a:noFill/>
-        </p:spPr>
-        <p:txBody>
-          <a:bodyPr wrap="square">
-            <a:spAutoFit/>
-          </a:bodyPr>
-          <a:lstStyle/>
-          <a:p>
-            <a:pPr algn="ctr">
-              <a:defRPr sz="1400" b="1">
-                <a:solidFill>
-                  <a:srgbClr val="FFFFFF"/>
-                </a:solidFill>
-                <a:latin typeface="Segoe UI"/>
-              </a:defRPr>
-            </a:pPr>
-            <a:r>
-              <a:t>Matéria</a:t>
-            </a:r>
-          </a:p>
-        </p:txBody>
-      </p:sp>
-      <p:sp>
-        <p:nvSpPr>
-          <p:cNvPr id="32" name="TextBox 31"/>
-          <p:cNvSpPr txBox="1"/>
-          <p:nvPr/>
-        </p:nvSpPr>
-        <p:spPr>
-          <a:xfrm>
-            <a:off x="2926080" y="5212080"/>
-            <a:ext cx="3200400" cy="548640"/>
-          </a:xfrm>
-          <a:prstGeom prst="rect">
-            <a:avLst/>
-          </a:prstGeom>
-          <a:noFill/>
-        </p:spPr>
-        <p:txBody>
-          <a:bodyPr wrap="square">
-            <a:spAutoFit/>
-          </a:bodyPr>
-          <a:lstStyle/>
-          <a:p>
-            <a:pPr algn="l">
-              <a:defRPr sz="1600" b="1">
-                <a:solidFill>
-                  <a:srgbClr val="002B5C"/>
-                </a:solidFill>
-                <a:latin typeface="Segoe UI"/>
-              </a:defRPr>
-            </a:pPr>
-            <a:r>
-              <a:t>Desempenho Matéria</a:t>
-            </a:r>
-          </a:p>
-        </p:txBody>
-      </p:sp>
-      <p:sp>
-        <p:nvSpPr>
-          <p:cNvPr id="33" name="TextBox 32"/>
-          <p:cNvSpPr txBox="1"/>
-          <p:nvPr/>
-        </p:nvSpPr>
-        <p:spPr>
-          <a:xfrm>
-            <a:off x="6217920" y="5212080"/>
-            <a:ext cx="3657600" cy="548640"/>
-          </a:xfrm>
-          <a:prstGeom prst="rect">
-            <a:avLst/>
-          </a:prstGeom>
-          <a:noFill/>
-        </p:spPr>
-        <p:txBody>
-          <a:bodyPr wrap="square">
-            <a:spAutoFit/>
-          </a:bodyPr>
-          <a:lstStyle/>
-          <a:p>
-            <a:pPr algn="l">
-              <a:defRPr sz="1400" b="0">
-                <a:solidFill>
-                  <a:srgbClr val="666666"/>
-                </a:solidFill>
-                <a:latin typeface="Segoe UI"/>
-              </a:defRPr>
-            </a:pPr>
-            <a:r>
-              <a:t>Eficácia do currículo entre turmas</a:t>
-            </a:r>
-          </a:p>
-        </p:txBody>
-      </p:sp>
-      <p:sp>
-        <p:nvSpPr>
-          <p:cNvPr id="34" name="TextBox 33"/>
-          <p:cNvSpPr txBox="1"/>
-          <p:nvPr/>
-        </p:nvSpPr>
-        <p:spPr>
-          <a:xfrm>
-            <a:off x="10058400" y="5212080"/>
-            <a:ext cx="1828800" cy="548640"/>
-          </a:xfrm>
-          <a:prstGeom prst="rect">
-            <a:avLst/>
-          </a:prstGeom>
-          <a:noFill/>
-        </p:spPr>
-        <p:txBody>
-          <a:bodyPr wrap="square">
-            <a:spAutoFit/>
-          </a:bodyPr>
-          <a:lstStyle/>
-          <a:p>
-            <a:r>
-              <a:rPr sz="1100" u="sng">
-                <a:solidFill>
-                  <a:srgbClr val="4A90D9"/>
-                </a:solidFill>
-                <a:latin typeface="Segoe UI"/>
-                <a:hlinkClick r:id="rId7"/>
-              </a:rPr>
-              <a:t>📎 Abrir PDF</a:t>
-            </a:r>
-          </a:p>
-        </p:txBody>
-      </p:sp>
-      <p:sp>
-        <p:nvSpPr>
-          <p:cNvPr id="35" name="TextBox 34"/>
-          <p:cNvSpPr txBox="1"/>
-          <p:nvPr/>
-        </p:nvSpPr>
-        <p:spPr>
-          <a:xfrm>
-            <a:off x="731520" y="6035040"/>
-            <a:ext cx="10058400" cy="457200"/>
-          </a:xfrm>
-          <a:prstGeom prst="rect">
-            <a:avLst/>
-          </a:prstGeom>
-          <a:noFill/>
-        </p:spPr>
-        <p:txBody>
-          <a:bodyPr wrap="square">
-            <a:spAutoFit/>
-          </a:bodyPr>
-          <a:lstStyle/>
-          <a:p>
-            <a:pPr algn="ctr">
-              <a:defRPr sz="1600" b="1">
-                <a:solidFill>
-                  <a:srgbClr val="0056A0"/>
-                </a:solidFill>
-                <a:latin typeface="Segoe UI"/>
-              </a:defRPr>
-            </a:pPr>
-            <a:r>
-              <a:t>Tudo gerado automaticamente. O professor clica um botão e recebe narrativas pedagógicas reais.</a:t>
+              <a:t>→ Ver relatório completo: Desempenho Matéria (Matemática-V)</a:t>
             </a:r>
           </a:p>
         </p:txBody>
@@ -8716,6 +7915,1306 @@
 </file>
 
 <file path=ppt/slides/slide23.xml><?xml version="1.0" encoding="utf-8"?>
+<p:sld xmlns:a="http://schemas.openxmlformats.org/drawingml/2006/main" xmlns:p="http://schemas.openxmlformats.org/presentationml/2006/main" xmlns:r="http://schemas.openxmlformats.org/officeDocument/2006/relationships">
+  <p:cSld>
+    <p:bg>
+      <p:bgPr>
+        <a:solidFill>
+          <a:srgbClr val="FFFFFF"/>
+        </a:solidFill>
+        <a:effectLst/>
+      </p:bgPr>
+    </p:bg>
+    <p:spTree>
+      <p:nvGrpSpPr>
+        <p:cNvPr id="1" name=""/>
+        <p:cNvGrpSpPr/>
+        <p:nvPr/>
+      </p:nvGrpSpPr>
+      <p:grpSpPr/>
+      <p:sp>
+        <p:nvSpPr>
+          <p:cNvPr id="2" name="Rectangle 1"/>
+          <p:cNvSpPr/>
+          <p:nvPr/>
+        </p:nvSpPr>
+        <p:spPr>
+          <a:xfrm>
+            <a:off x="0" y="0"/>
+            <a:ext cx="12191695" cy="73152"/>
+          </a:xfrm>
+          <a:prstGeom prst="rect">
+            <a:avLst/>
+          </a:prstGeom>
+          <a:solidFill>
+            <a:srgbClr val="0056A0"/>
+          </a:solidFill>
+          <a:ln>
+            <a:noFill/>
+          </a:ln>
+        </p:spPr>
+        <p:style>
+          <a:lnRef idx="1">
+            <a:schemeClr val="accent1"/>
+          </a:lnRef>
+          <a:fillRef idx="3">
+            <a:schemeClr val="accent1"/>
+          </a:fillRef>
+          <a:effectRef idx="2">
+            <a:schemeClr val="accent1"/>
+          </a:effectRef>
+          <a:fontRef idx="minor">
+            <a:schemeClr val="lt1"/>
+          </a:fontRef>
+        </p:style>
+        <p:txBody>
+          <a:bodyPr rtlCol="0" anchor="ctr"/>
+          <a:lstStyle/>
+          <a:p>
+            <a:pPr algn="ctr"/>
+          </a:p>
+        </p:txBody>
+      </p:sp>
+      <p:sp>
+        <p:nvSpPr>
+          <p:cNvPr id="3" name="TextBox 2"/>
+          <p:cNvSpPr txBox="1"/>
+          <p:nvPr/>
+        </p:nvSpPr>
+        <p:spPr>
+          <a:xfrm>
+            <a:off x="731520" y="274320"/>
+            <a:ext cx="10058400" cy="731520"/>
+          </a:xfrm>
+          <a:prstGeom prst="rect">
+            <a:avLst/>
+          </a:prstGeom>
+          <a:noFill/>
+        </p:spPr>
+        <p:txBody>
+          <a:bodyPr wrap="square">
+            <a:spAutoFit/>
+          </a:bodyPr>
+          <a:lstStyle/>
+          <a:p>
+            <a:pPr algn="l">
+              <a:defRPr sz="3000" b="1">
+                <a:solidFill>
+                  <a:srgbClr val="002B5C"/>
+                </a:solidFill>
+                <a:latin typeface="Segoe UI"/>
+              </a:defRPr>
+            </a:pPr>
+            <a:r>
+              <a:t>Tudo Isso É Real</a:t>
+            </a:r>
+          </a:p>
+        </p:txBody>
+      </p:sp>
+      <p:sp>
+        <p:nvSpPr>
+          <p:cNvPr id="4" name="Rectangle 3"/>
+          <p:cNvSpPr/>
+          <p:nvPr/>
+        </p:nvSpPr>
+        <p:spPr>
+          <a:xfrm>
+            <a:off x="731520" y="960120"/>
+            <a:ext cx="2743200" cy="36576"/>
+          </a:xfrm>
+          <a:prstGeom prst="rect">
+            <a:avLst/>
+          </a:prstGeom>
+          <a:solidFill>
+            <a:srgbClr val="4A90D9"/>
+          </a:solidFill>
+          <a:ln>
+            <a:noFill/>
+          </a:ln>
+        </p:spPr>
+        <p:style>
+          <a:lnRef idx="1">
+            <a:schemeClr val="accent1"/>
+          </a:lnRef>
+          <a:fillRef idx="3">
+            <a:schemeClr val="accent1"/>
+          </a:fillRef>
+          <a:effectRef idx="2">
+            <a:schemeClr val="accent1"/>
+          </a:effectRef>
+          <a:fontRef idx="minor">
+            <a:schemeClr val="lt1"/>
+          </a:fontRef>
+        </p:style>
+        <p:txBody>
+          <a:bodyPr rtlCol="0" anchor="ctr"/>
+          <a:lstStyle/>
+          <a:p>
+            <a:pPr algn="ctr"/>
+          </a:p>
+        </p:txBody>
+      </p:sp>
+      <p:sp>
+        <p:nvSpPr>
+          <p:cNvPr id="5" name="Rectangle 4"/>
+          <p:cNvSpPr/>
+          <p:nvPr/>
+        </p:nvSpPr>
+        <p:spPr>
+          <a:xfrm>
+            <a:off x="731520" y="1280160"/>
+            <a:ext cx="2011680" cy="594360"/>
+          </a:xfrm>
+          <a:prstGeom prst="rect">
+            <a:avLst/>
+          </a:prstGeom>
+          <a:solidFill>
+            <a:srgbClr val="0056A0"/>
+          </a:solidFill>
+          <a:ln>
+            <a:noFill/>
+          </a:ln>
+        </p:spPr>
+        <p:style>
+          <a:lnRef idx="1">
+            <a:schemeClr val="accent1"/>
+          </a:lnRef>
+          <a:fillRef idx="3">
+            <a:schemeClr val="accent1"/>
+          </a:fillRef>
+          <a:effectRef idx="2">
+            <a:schemeClr val="accent1"/>
+          </a:effectRef>
+          <a:fontRef idx="minor">
+            <a:schemeClr val="lt1"/>
+          </a:fontRef>
+        </p:style>
+        <p:txBody>
+          <a:bodyPr rtlCol="0" anchor="ctr"/>
+          <a:lstStyle/>
+          <a:p>
+            <a:pPr algn="ctr"/>
+          </a:p>
+        </p:txBody>
+      </p:sp>
+      <p:sp>
+        <p:nvSpPr>
+          <p:cNvPr id="6" name="TextBox 5"/>
+          <p:cNvSpPr txBox="1"/>
+          <p:nvPr/>
+        </p:nvSpPr>
+        <p:spPr>
+          <a:xfrm>
+            <a:off x="731520" y="1389888"/>
+            <a:ext cx="2011680" cy="411480"/>
+          </a:xfrm>
+          <a:prstGeom prst="rect">
+            <a:avLst/>
+          </a:prstGeom>
+          <a:noFill/>
+        </p:spPr>
+        <p:txBody>
+          <a:bodyPr wrap="square">
+            <a:spAutoFit/>
+          </a:bodyPr>
+          <a:lstStyle/>
+          <a:p>
+            <a:pPr algn="ctr">
+              <a:defRPr sz="1400" b="1">
+                <a:solidFill>
+                  <a:srgbClr val="FFFFFF"/>
+                </a:solidFill>
+                <a:latin typeface="Segoe UI"/>
+              </a:defRPr>
+            </a:pPr>
+            <a:r>
+              <a:t>Questão</a:t>
+            </a:r>
+          </a:p>
+        </p:txBody>
+      </p:sp>
+      <p:sp>
+        <p:nvSpPr>
+          <p:cNvPr id="7" name="TextBox 6"/>
+          <p:cNvSpPr txBox="1"/>
+          <p:nvPr/>
+        </p:nvSpPr>
+        <p:spPr>
+          <a:xfrm>
+            <a:off x="2926080" y="1325880"/>
+            <a:ext cx="3200400" cy="548640"/>
+          </a:xfrm>
+          <a:prstGeom prst="rect">
+            <a:avLst/>
+          </a:prstGeom>
+          <a:noFill/>
+        </p:spPr>
+        <p:txBody>
+          <a:bodyPr wrap="square">
+            <a:spAutoFit/>
+          </a:bodyPr>
+          <a:lstStyle/>
+          <a:p>
+            <a:pPr algn="l">
+              <a:defRPr sz="1600" b="1">
+                <a:solidFill>
+                  <a:srgbClr val="002B5C"/>
+                </a:solidFill>
+                <a:latin typeface="Segoe UI"/>
+              </a:defRPr>
+            </a:pPr>
+            <a:r>
+              <a:t>Correção</a:t>
+            </a:r>
+          </a:p>
+        </p:txBody>
+      </p:sp>
+      <p:sp>
+        <p:nvSpPr>
+          <p:cNvPr id="8" name="TextBox 7"/>
+          <p:cNvSpPr txBox="1"/>
+          <p:nvPr/>
+        </p:nvSpPr>
+        <p:spPr>
+          <a:xfrm>
+            <a:off x="6217920" y="1325880"/>
+            <a:ext cx="3657600" cy="548640"/>
+          </a:xfrm>
+          <a:prstGeom prst="rect">
+            <a:avLst/>
+          </a:prstGeom>
+          <a:noFill/>
+        </p:spPr>
+        <p:txBody>
+          <a:bodyPr wrap="square">
+            <a:spAutoFit/>
+          </a:bodyPr>
+          <a:lstStyle/>
+          <a:p>
+            <a:pPr algn="l">
+              <a:defRPr sz="1400" b="0">
+                <a:solidFill>
+                  <a:srgbClr val="666666"/>
+                </a:solidFill>
+                <a:latin typeface="Segoe UI"/>
+              </a:defRPr>
+            </a:pPr>
+            <a:r>
+              <a:t>Raciocínio, tipo de erro, potencial</a:t>
+            </a:r>
+          </a:p>
+        </p:txBody>
+      </p:sp>
+      <p:sp>
+        <p:nvSpPr>
+          <p:cNvPr id="9" name="TextBox 8"/>
+          <p:cNvSpPr txBox="1"/>
+          <p:nvPr/>
+        </p:nvSpPr>
+        <p:spPr>
+          <a:xfrm>
+            <a:off x="10058400" y="1325880"/>
+            <a:ext cx="1828800" cy="548640"/>
+          </a:xfrm>
+          <a:prstGeom prst="rect">
+            <a:avLst/>
+          </a:prstGeom>
+          <a:noFill/>
+        </p:spPr>
+        <p:txBody>
+          <a:bodyPr wrap="square">
+            <a:spAutoFit/>
+          </a:bodyPr>
+          <a:lstStyle/>
+          <a:p>
+            <a:r>
+              <a:rPr sz="1100" u="sng">
+                <a:solidFill>
+                  <a:srgbClr val="4A90D9"/>
+                </a:solidFill>
+                <a:latin typeface="Segoe UI"/>
+                <a:hlinkClick r:id="rId2"/>
+              </a:rPr>
+              <a:t>📎 Abrir PDF</a:t>
+            </a:r>
+          </a:p>
+        </p:txBody>
+      </p:sp>
+      <p:sp>
+        <p:nvSpPr>
+          <p:cNvPr id="10" name="Rectangle 9"/>
+          <p:cNvSpPr/>
+          <p:nvPr/>
+        </p:nvSpPr>
+        <p:spPr>
+          <a:xfrm>
+            <a:off x="731520" y="2057400"/>
+            <a:ext cx="2011680" cy="594360"/>
+          </a:xfrm>
+          <a:prstGeom prst="rect">
+            <a:avLst/>
+          </a:prstGeom>
+          <a:solidFill>
+            <a:srgbClr val="0056A0"/>
+          </a:solidFill>
+          <a:ln>
+            <a:noFill/>
+          </a:ln>
+        </p:spPr>
+        <p:style>
+          <a:lnRef idx="1">
+            <a:schemeClr val="accent1"/>
+          </a:lnRef>
+          <a:fillRef idx="3">
+            <a:schemeClr val="accent1"/>
+          </a:fillRef>
+          <a:effectRef idx="2">
+            <a:schemeClr val="accent1"/>
+          </a:effectRef>
+          <a:fontRef idx="minor">
+            <a:schemeClr val="lt1"/>
+          </a:fontRef>
+        </p:style>
+        <p:txBody>
+          <a:bodyPr rtlCol="0" anchor="ctr"/>
+          <a:lstStyle/>
+          <a:p>
+            <a:pPr algn="ctr"/>
+          </a:p>
+        </p:txBody>
+      </p:sp>
+      <p:sp>
+        <p:nvSpPr>
+          <p:cNvPr id="11" name="TextBox 10"/>
+          <p:cNvSpPr txBox="1"/>
+          <p:nvPr/>
+        </p:nvSpPr>
+        <p:spPr>
+          <a:xfrm>
+            <a:off x="731520" y="2167128"/>
+            <a:ext cx="2011680" cy="411480"/>
+          </a:xfrm>
+          <a:prstGeom prst="rect">
+            <a:avLst/>
+          </a:prstGeom>
+          <a:noFill/>
+        </p:spPr>
+        <p:txBody>
+          <a:bodyPr wrap="square">
+            <a:spAutoFit/>
+          </a:bodyPr>
+          <a:lstStyle/>
+          <a:p>
+            <a:pPr algn="ctr">
+              <a:defRPr sz="1400" b="1">
+                <a:solidFill>
+                  <a:srgbClr val="FFFFFF"/>
+                </a:solidFill>
+                <a:latin typeface="Segoe UI"/>
+              </a:defRPr>
+            </a:pPr>
+            <a:r>
+              <a:t>Aluno</a:t>
+            </a:r>
+          </a:p>
+        </p:txBody>
+      </p:sp>
+      <p:sp>
+        <p:nvSpPr>
+          <p:cNvPr id="12" name="TextBox 11"/>
+          <p:cNvSpPr txBox="1"/>
+          <p:nvPr/>
+        </p:nvSpPr>
+        <p:spPr>
+          <a:xfrm>
+            <a:off x="2926080" y="2103120"/>
+            <a:ext cx="3200400" cy="548640"/>
+          </a:xfrm>
+          <a:prstGeom prst="rect">
+            <a:avLst/>
+          </a:prstGeom>
+          <a:noFill/>
+        </p:spPr>
+        <p:txBody>
+          <a:bodyPr wrap="square">
+            <a:spAutoFit/>
+          </a:bodyPr>
+          <a:lstStyle/>
+          <a:p>
+            <a:pPr algn="l">
+              <a:defRPr sz="1600" b="1">
+                <a:solidFill>
+                  <a:srgbClr val="002B5C"/>
+                </a:solidFill>
+                <a:latin typeface="Segoe UI"/>
+              </a:defRPr>
+            </a:pPr>
+            <a:r>
+              <a:t>Análise de Habilidades</a:t>
+            </a:r>
+          </a:p>
+        </p:txBody>
+      </p:sp>
+      <p:sp>
+        <p:nvSpPr>
+          <p:cNvPr id="13" name="TextBox 12"/>
+          <p:cNvSpPr txBox="1"/>
+          <p:nvPr/>
+        </p:nvSpPr>
+        <p:spPr>
+          <a:xfrm>
+            <a:off x="6217920" y="2103120"/>
+            <a:ext cx="3657600" cy="548640"/>
+          </a:xfrm>
+          <a:prstGeom prst="rect">
+            <a:avLst/>
+          </a:prstGeom>
+          <a:noFill/>
+        </p:spPr>
+        <p:txBody>
+          <a:bodyPr wrap="square">
+            <a:spAutoFit/>
+          </a:bodyPr>
+          <a:lstStyle/>
+          <a:p>
+            <a:pPr algn="l">
+              <a:defRPr sz="1400" b="0">
+                <a:solidFill>
+                  <a:srgbClr val="666666"/>
+                </a:solidFill>
+                <a:latin typeface="Segoe UI"/>
+              </a:defRPr>
+            </a:pPr>
+            <a:r>
+              <a:t>Perfil cognitivo, padrões, recomendações</a:t>
+            </a:r>
+          </a:p>
+        </p:txBody>
+      </p:sp>
+      <p:sp>
+        <p:nvSpPr>
+          <p:cNvPr id="14" name="TextBox 13"/>
+          <p:cNvSpPr txBox="1"/>
+          <p:nvPr/>
+        </p:nvSpPr>
+        <p:spPr>
+          <a:xfrm>
+            <a:off x="10058400" y="2103120"/>
+            <a:ext cx="1828800" cy="548640"/>
+          </a:xfrm>
+          <a:prstGeom prst="rect">
+            <a:avLst/>
+          </a:prstGeom>
+          <a:noFill/>
+        </p:spPr>
+        <p:txBody>
+          <a:bodyPr wrap="square">
+            <a:spAutoFit/>
+          </a:bodyPr>
+          <a:lstStyle/>
+          <a:p>
+            <a:r>
+              <a:rPr sz="1100" u="sng">
+                <a:solidFill>
+                  <a:srgbClr val="4A90D9"/>
+                </a:solidFill>
+                <a:latin typeface="Segoe UI"/>
+                <a:hlinkClick r:id="rId3"/>
+              </a:rPr>
+              <a:t>📎 Abrir PDF</a:t>
+            </a:r>
+          </a:p>
+        </p:txBody>
+      </p:sp>
+      <p:sp>
+        <p:nvSpPr>
+          <p:cNvPr id="15" name="Rectangle 14"/>
+          <p:cNvSpPr/>
+          <p:nvPr/>
+        </p:nvSpPr>
+        <p:spPr>
+          <a:xfrm>
+            <a:off x="731520" y="2834640"/>
+            <a:ext cx="2011680" cy="594360"/>
+          </a:xfrm>
+          <a:prstGeom prst="rect">
+            <a:avLst/>
+          </a:prstGeom>
+          <a:solidFill>
+            <a:srgbClr val="0056A0"/>
+          </a:solidFill>
+          <a:ln>
+            <a:noFill/>
+          </a:ln>
+        </p:spPr>
+        <p:style>
+          <a:lnRef idx="1">
+            <a:schemeClr val="accent1"/>
+          </a:lnRef>
+          <a:fillRef idx="3">
+            <a:schemeClr val="accent1"/>
+          </a:fillRef>
+          <a:effectRef idx="2">
+            <a:schemeClr val="accent1"/>
+          </a:effectRef>
+          <a:fontRef idx="minor">
+            <a:schemeClr val="lt1"/>
+          </a:fontRef>
+        </p:style>
+        <p:txBody>
+          <a:bodyPr rtlCol="0" anchor="ctr"/>
+          <a:lstStyle/>
+          <a:p>
+            <a:pPr algn="ctr"/>
+          </a:p>
+        </p:txBody>
+      </p:sp>
+      <p:sp>
+        <p:nvSpPr>
+          <p:cNvPr id="16" name="TextBox 15"/>
+          <p:cNvSpPr txBox="1"/>
+          <p:nvPr/>
+        </p:nvSpPr>
+        <p:spPr>
+          <a:xfrm>
+            <a:off x="731520" y="2944368"/>
+            <a:ext cx="2011680" cy="411480"/>
+          </a:xfrm>
+          <a:prstGeom prst="rect">
+            <a:avLst/>
+          </a:prstGeom>
+          <a:noFill/>
+        </p:spPr>
+        <p:txBody>
+          <a:bodyPr wrap="square">
+            <a:spAutoFit/>
+          </a:bodyPr>
+          <a:lstStyle/>
+          <a:p>
+            <a:pPr algn="ctr">
+              <a:defRPr sz="1400" b="1">
+                <a:solidFill>
+                  <a:srgbClr val="FFFFFF"/>
+                </a:solidFill>
+                <a:latin typeface="Segoe UI"/>
+              </a:defRPr>
+            </a:pPr>
+            <a:r>
+              <a:t>Aluno</a:t>
+            </a:r>
+          </a:p>
+        </p:txBody>
+      </p:sp>
+      <p:sp>
+        <p:nvSpPr>
+          <p:cNvPr id="17" name="TextBox 16"/>
+          <p:cNvSpPr txBox="1"/>
+          <p:nvPr/>
+        </p:nvSpPr>
+        <p:spPr>
+          <a:xfrm>
+            <a:off x="2926080" y="2880360"/>
+            <a:ext cx="3200400" cy="548640"/>
+          </a:xfrm>
+          <a:prstGeom prst="rect">
+            <a:avLst/>
+          </a:prstGeom>
+          <a:noFill/>
+        </p:spPr>
+        <p:txBody>
+          <a:bodyPr wrap="square">
+            <a:spAutoFit/>
+          </a:bodyPr>
+          <a:lstStyle/>
+          <a:p>
+            <a:pPr algn="l">
+              <a:defRPr sz="1600" b="1">
+                <a:solidFill>
+                  <a:srgbClr val="002B5C"/>
+                </a:solidFill>
+                <a:latin typeface="Segoe UI"/>
+              </a:defRPr>
+            </a:pPr>
+            <a:r>
+              <a:t>Relatório Final</a:t>
+            </a:r>
+          </a:p>
+        </p:txBody>
+      </p:sp>
+      <p:sp>
+        <p:nvSpPr>
+          <p:cNvPr id="18" name="TextBox 17"/>
+          <p:cNvSpPr txBox="1"/>
+          <p:nvPr/>
+        </p:nvSpPr>
+        <p:spPr>
+          <a:xfrm>
+            <a:off x="6217920" y="2880360"/>
+            <a:ext cx="3657600" cy="548640"/>
+          </a:xfrm>
+          <a:prstGeom prst="rect">
+            <a:avLst/>
+          </a:prstGeom>
+          <a:noFill/>
+        </p:spPr>
+        <p:txBody>
+          <a:bodyPr wrap="square">
+            <a:spAutoFit/>
+          </a:bodyPr>
+          <a:lstStyle/>
+          <a:p>
+            <a:pPr algn="l">
+              <a:defRPr sz="1400" b="0">
+                <a:solidFill>
+                  <a:srgbClr val="666666"/>
+                </a:solidFill>
+                <a:latin typeface="Segoe UI"/>
+              </a:defRPr>
+            </a:pPr>
+            <a:r>
+              <a:t>Narrativa completa para aluno e pais</a:t>
+            </a:r>
+          </a:p>
+        </p:txBody>
+      </p:sp>
+      <p:sp>
+        <p:nvSpPr>
+          <p:cNvPr id="19" name="TextBox 18"/>
+          <p:cNvSpPr txBox="1"/>
+          <p:nvPr/>
+        </p:nvSpPr>
+        <p:spPr>
+          <a:xfrm>
+            <a:off x="10058400" y="2880360"/>
+            <a:ext cx="1828800" cy="548640"/>
+          </a:xfrm>
+          <a:prstGeom prst="rect">
+            <a:avLst/>
+          </a:prstGeom>
+          <a:noFill/>
+        </p:spPr>
+        <p:txBody>
+          <a:bodyPr wrap="square">
+            <a:spAutoFit/>
+          </a:bodyPr>
+          <a:lstStyle/>
+          <a:p>
+            <a:r>
+              <a:rPr sz="1100" u="sng">
+                <a:solidFill>
+                  <a:srgbClr val="4A90D9"/>
+                </a:solidFill>
+                <a:latin typeface="Segoe UI"/>
+                <a:hlinkClick r:id="rId4"/>
+              </a:rPr>
+              <a:t>📎 Abrir PDF</a:t>
+            </a:r>
+          </a:p>
+        </p:txBody>
+      </p:sp>
+      <p:sp>
+        <p:nvSpPr>
+          <p:cNvPr id="20" name="Rectangle 19"/>
+          <p:cNvSpPr/>
+          <p:nvPr/>
+        </p:nvSpPr>
+        <p:spPr>
+          <a:xfrm>
+            <a:off x="731520" y="3611880"/>
+            <a:ext cx="2011680" cy="594360"/>
+          </a:xfrm>
+          <a:prstGeom prst="rect">
+            <a:avLst/>
+          </a:prstGeom>
+          <a:solidFill>
+            <a:srgbClr val="002B5C"/>
+          </a:solidFill>
+          <a:ln>
+            <a:noFill/>
+          </a:ln>
+        </p:spPr>
+        <p:style>
+          <a:lnRef idx="1">
+            <a:schemeClr val="accent1"/>
+          </a:lnRef>
+          <a:fillRef idx="3">
+            <a:schemeClr val="accent1"/>
+          </a:fillRef>
+          <a:effectRef idx="2">
+            <a:schemeClr val="accent1"/>
+          </a:effectRef>
+          <a:fontRef idx="minor">
+            <a:schemeClr val="lt1"/>
+          </a:fontRef>
+        </p:style>
+        <p:txBody>
+          <a:bodyPr rtlCol="0" anchor="ctr"/>
+          <a:lstStyle/>
+          <a:p>
+            <a:pPr algn="ctr"/>
+          </a:p>
+        </p:txBody>
+      </p:sp>
+      <p:sp>
+        <p:nvSpPr>
+          <p:cNvPr id="21" name="TextBox 20"/>
+          <p:cNvSpPr txBox="1"/>
+          <p:nvPr/>
+        </p:nvSpPr>
+        <p:spPr>
+          <a:xfrm>
+            <a:off x="731520" y="3721608"/>
+            <a:ext cx="2011680" cy="411480"/>
+          </a:xfrm>
+          <a:prstGeom prst="rect">
+            <a:avLst/>
+          </a:prstGeom>
+          <a:noFill/>
+        </p:spPr>
+        <p:txBody>
+          <a:bodyPr wrap="square">
+            <a:spAutoFit/>
+          </a:bodyPr>
+          <a:lstStyle/>
+          <a:p>
+            <a:pPr algn="ctr">
+              <a:defRPr sz="1400" b="1">
+                <a:solidFill>
+                  <a:srgbClr val="FFFFFF"/>
+                </a:solidFill>
+                <a:latin typeface="Segoe UI"/>
+              </a:defRPr>
+            </a:pPr>
+            <a:r>
+              <a:t>Turma × Atividade</a:t>
+            </a:r>
+          </a:p>
+        </p:txBody>
+      </p:sp>
+      <p:sp>
+        <p:nvSpPr>
+          <p:cNvPr id="22" name="TextBox 21"/>
+          <p:cNvSpPr txBox="1"/>
+          <p:nvPr/>
+        </p:nvSpPr>
+        <p:spPr>
+          <a:xfrm>
+            <a:off x="2926080" y="3657600"/>
+            <a:ext cx="3200400" cy="548640"/>
+          </a:xfrm>
+          <a:prstGeom prst="rect">
+            <a:avLst/>
+          </a:prstGeom>
+          <a:noFill/>
+        </p:spPr>
+        <p:txBody>
+          <a:bodyPr wrap="square">
+            <a:spAutoFit/>
+          </a:bodyPr>
+          <a:lstStyle/>
+          <a:p>
+            <a:pPr algn="l">
+              <a:defRPr sz="1600" b="1">
+                <a:solidFill>
+                  <a:srgbClr val="002B5C"/>
+                </a:solidFill>
+                <a:latin typeface="Segoe UI"/>
+              </a:defRPr>
+            </a:pPr>
+            <a:r>
+              <a:t>Desempenho Tarefa</a:t>
+            </a:r>
+          </a:p>
+        </p:txBody>
+      </p:sp>
+      <p:sp>
+        <p:nvSpPr>
+          <p:cNvPr id="23" name="TextBox 22"/>
+          <p:cNvSpPr txBox="1"/>
+          <p:nvPr/>
+        </p:nvSpPr>
+        <p:spPr>
+          <a:xfrm>
+            <a:off x="6217920" y="3657600"/>
+            <a:ext cx="3657600" cy="548640"/>
+          </a:xfrm>
+          <a:prstGeom prst="rect">
+            <a:avLst/>
+          </a:prstGeom>
+          <a:noFill/>
+        </p:spPr>
+        <p:txBody>
+          <a:bodyPr wrap="square">
+            <a:spAutoFit/>
+          </a:bodyPr>
+          <a:lstStyle/>
+          <a:p>
+            <a:pPr algn="l">
+              <a:defRPr sz="1400" b="0">
+                <a:solidFill>
+                  <a:srgbClr val="666666"/>
+                </a:solidFill>
+                <a:latin typeface="Segoe UI"/>
+              </a:defRPr>
+            </a:pPr>
+            <a:r>
+              <a:t>Padrões coletivos, exemplos específicos</a:t>
+            </a:r>
+          </a:p>
+        </p:txBody>
+      </p:sp>
+      <p:sp>
+        <p:nvSpPr>
+          <p:cNvPr id="24" name="TextBox 23"/>
+          <p:cNvSpPr txBox="1"/>
+          <p:nvPr/>
+        </p:nvSpPr>
+        <p:spPr>
+          <a:xfrm>
+            <a:off x="10058400" y="3657600"/>
+            <a:ext cx="1828800" cy="548640"/>
+          </a:xfrm>
+          <a:prstGeom prst="rect">
+            <a:avLst/>
+          </a:prstGeom>
+          <a:noFill/>
+        </p:spPr>
+        <p:txBody>
+          <a:bodyPr wrap="square">
+            <a:spAutoFit/>
+          </a:bodyPr>
+          <a:lstStyle/>
+          <a:p>
+            <a:r>
+              <a:rPr sz="1100" u="sng">
+                <a:solidFill>
+                  <a:srgbClr val="4A90D9"/>
+                </a:solidFill>
+                <a:latin typeface="Segoe UI"/>
+                <a:hlinkClick r:id="rId5"/>
+              </a:rPr>
+              <a:t>📎 Abrir PDF</a:t>
+            </a:r>
+          </a:p>
+        </p:txBody>
+      </p:sp>
+      <p:sp>
+        <p:nvSpPr>
+          <p:cNvPr id="25" name="Rectangle 24"/>
+          <p:cNvSpPr/>
+          <p:nvPr/>
+        </p:nvSpPr>
+        <p:spPr>
+          <a:xfrm>
+            <a:off x="731520" y="4389120"/>
+            <a:ext cx="2011680" cy="594360"/>
+          </a:xfrm>
+          <a:prstGeom prst="rect">
+            <a:avLst/>
+          </a:prstGeom>
+          <a:solidFill>
+            <a:srgbClr val="002B5C"/>
+          </a:solidFill>
+          <a:ln>
+            <a:noFill/>
+          </a:ln>
+        </p:spPr>
+        <p:style>
+          <a:lnRef idx="1">
+            <a:schemeClr val="accent1"/>
+          </a:lnRef>
+          <a:fillRef idx="3">
+            <a:schemeClr val="accent1"/>
+          </a:fillRef>
+          <a:effectRef idx="2">
+            <a:schemeClr val="accent1"/>
+          </a:effectRef>
+          <a:fontRef idx="minor">
+            <a:schemeClr val="lt1"/>
+          </a:fontRef>
+        </p:style>
+        <p:txBody>
+          <a:bodyPr rtlCol="0" anchor="ctr"/>
+          <a:lstStyle/>
+          <a:p>
+            <a:pPr algn="ctr"/>
+          </a:p>
+        </p:txBody>
+      </p:sp>
+      <p:sp>
+        <p:nvSpPr>
+          <p:cNvPr id="26" name="TextBox 25"/>
+          <p:cNvSpPr txBox="1"/>
+          <p:nvPr/>
+        </p:nvSpPr>
+        <p:spPr>
+          <a:xfrm>
+            <a:off x="731520" y="4498848"/>
+            <a:ext cx="2011680" cy="411480"/>
+          </a:xfrm>
+          <a:prstGeom prst="rect">
+            <a:avLst/>
+          </a:prstGeom>
+          <a:noFill/>
+        </p:spPr>
+        <p:txBody>
+          <a:bodyPr wrap="square">
+            <a:spAutoFit/>
+          </a:bodyPr>
+          <a:lstStyle/>
+          <a:p>
+            <a:pPr algn="ctr">
+              <a:defRPr sz="1400" b="1">
+                <a:solidFill>
+                  <a:srgbClr val="FFFFFF"/>
+                </a:solidFill>
+                <a:latin typeface="Segoe UI"/>
+              </a:defRPr>
+            </a:pPr>
+            <a:r>
+              <a:t>Turma</a:t>
+            </a:r>
+          </a:p>
+        </p:txBody>
+      </p:sp>
+      <p:sp>
+        <p:nvSpPr>
+          <p:cNvPr id="27" name="TextBox 26"/>
+          <p:cNvSpPr txBox="1"/>
+          <p:nvPr/>
+        </p:nvSpPr>
+        <p:spPr>
+          <a:xfrm>
+            <a:off x="2926080" y="4434840"/>
+            <a:ext cx="3200400" cy="548640"/>
+          </a:xfrm>
+          <a:prstGeom prst="rect">
+            <a:avLst/>
+          </a:prstGeom>
+          <a:noFill/>
+        </p:spPr>
+        <p:txBody>
+          <a:bodyPr wrap="square">
+            <a:spAutoFit/>
+          </a:bodyPr>
+          <a:lstStyle/>
+          <a:p>
+            <a:pPr algn="l">
+              <a:defRPr sz="1600" b="1">
+                <a:solidFill>
+                  <a:srgbClr val="002B5C"/>
+                </a:solidFill>
+                <a:latin typeface="Segoe UI"/>
+              </a:defRPr>
+            </a:pPr>
+            <a:r>
+              <a:t>Desempenho Turma</a:t>
+            </a:r>
+          </a:p>
+        </p:txBody>
+      </p:sp>
+      <p:sp>
+        <p:nvSpPr>
+          <p:cNvPr id="28" name="TextBox 27"/>
+          <p:cNvSpPr txBox="1"/>
+          <p:nvPr/>
+        </p:nvSpPr>
+        <p:spPr>
+          <a:xfrm>
+            <a:off x="6217920" y="4434840"/>
+            <a:ext cx="3657600" cy="548640"/>
+          </a:xfrm>
+          <a:prstGeom prst="rect">
+            <a:avLst/>
+          </a:prstGeom>
+          <a:noFill/>
+        </p:spPr>
+        <p:txBody>
+          <a:bodyPr wrap="square">
+            <a:spAutoFit/>
+          </a:bodyPr>
+          <a:lstStyle/>
+          <a:p>
+            <a:pPr algn="l">
+              <a:defRPr sz="1400" b="0">
+                <a:solidFill>
+                  <a:srgbClr val="666666"/>
+                </a:solidFill>
+                <a:latin typeface="Segoe UI"/>
+              </a:defRPr>
+            </a:pPr>
+            <a:r>
+              <a:t>Evolução ao longo do tempo</a:t>
+            </a:r>
+          </a:p>
+        </p:txBody>
+      </p:sp>
+      <p:sp>
+        <p:nvSpPr>
+          <p:cNvPr id="29" name="TextBox 28"/>
+          <p:cNvSpPr txBox="1"/>
+          <p:nvPr/>
+        </p:nvSpPr>
+        <p:spPr>
+          <a:xfrm>
+            <a:off x="10058400" y="4434840"/>
+            <a:ext cx="1828800" cy="548640"/>
+          </a:xfrm>
+          <a:prstGeom prst="rect">
+            <a:avLst/>
+          </a:prstGeom>
+          <a:noFill/>
+        </p:spPr>
+        <p:txBody>
+          <a:bodyPr wrap="square">
+            <a:spAutoFit/>
+          </a:bodyPr>
+          <a:lstStyle/>
+          <a:p>
+            <a:r>
+              <a:rPr sz="1100" u="sng">
+                <a:solidFill>
+                  <a:srgbClr val="4A90D9"/>
+                </a:solidFill>
+                <a:latin typeface="Segoe UI"/>
+                <a:hlinkClick r:id="rId6"/>
+              </a:rPr>
+              <a:t>📎 Abrir PDF</a:t>
+            </a:r>
+          </a:p>
+        </p:txBody>
+      </p:sp>
+      <p:sp>
+        <p:nvSpPr>
+          <p:cNvPr id="30" name="Rectangle 29"/>
+          <p:cNvSpPr/>
+          <p:nvPr/>
+        </p:nvSpPr>
+        <p:spPr>
+          <a:xfrm>
+            <a:off x="731520" y="5166360"/>
+            <a:ext cx="2011680" cy="594360"/>
+          </a:xfrm>
+          <a:prstGeom prst="rect">
+            <a:avLst/>
+          </a:prstGeom>
+          <a:solidFill>
+            <a:srgbClr val="002B5C"/>
+          </a:solidFill>
+          <a:ln>
+            <a:noFill/>
+          </a:ln>
+        </p:spPr>
+        <p:style>
+          <a:lnRef idx="1">
+            <a:schemeClr val="accent1"/>
+          </a:lnRef>
+          <a:fillRef idx="3">
+            <a:schemeClr val="accent1"/>
+          </a:fillRef>
+          <a:effectRef idx="2">
+            <a:schemeClr val="accent1"/>
+          </a:effectRef>
+          <a:fontRef idx="minor">
+            <a:schemeClr val="lt1"/>
+          </a:fontRef>
+        </p:style>
+        <p:txBody>
+          <a:bodyPr rtlCol="0" anchor="ctr"/>
+          <a:lstStyle/>
+          <a:p>
+            <a:pPr algn="ctr"/>
+          </a:p>
+        </p:txBody>
+      </p:sp>
+      <p:sp>
+        <p:nvSpPr>
+          <p:cNvPr id="31" name="TextBox 30"/>
+          <p:cNvSpPr txBox="1"/>
+          <p:nvPr/>
+        </p:nvSpPr>
+        <p:spPr>
+          <a:xfrm>
+            <a:off x="731520" y="5276088"/>
+            <a:ext cx="2011680" cy="411480"/>
+          </a:xfrm>
+          <a:prstGeom prst="rect">
+            <a:avLst/>
+          </a:prstGeom>
+          <a:noFill/>
+        </p:spPr>
+        <p:txBody>
+          <a:bodyPr wrap="square">
+            <a:spAutoFit/>
+          </a:bodyPr>
+          <a:lstStyle/>
+          <a:p>
+            <a:pPr algn="ctr">
+              <a:defRPr sz="1400" b="1">
+                <a:solidFill>
+                  <a:srgbClr val="FFFFFF"/>
+                </a:solidFill>
+                <a:latin typeface="Segoe UI"/>
+              </a:defRPr>
+            </a:pPr>
+            <a:r>
+              <a:t>Matéria</a:t>
+            </a:r>
+          </a:p>
+        </p:txBody>
+      </p:sp>
+      <p:sp>
+        <p:nvSpPr>
+          <p:cNvPr id="32" name="TextBox 31"/>
+          <p:cNvSpPr txBox="1"/>
+          <p:nvPr/>
+        </p:nvSpPr>
+        <p:spPr>
+          <a:xfrm>
+            <a:off x="2926080" y="5212080"/>
+            <a:ext cx="3200400" cy="548640"/>
+          </a:xfrm>
+          <a:prstGeom prst="rect">
+            <a:avLst/>
+          </a:prstGeom>
+          <a:noFill/>
+        </p:spPr>
+        <p:txBody>
+          <a:bodyPr wrap="square">
+            <a:spAutoFit/>
+          </a:bodyPr>
+          <a:lstStyle/>
+          <a:p>
+            <a:pPr algn="l">
+              <a:defRPr sz="1600" b="1">
+                <a:solidFill>
+                  <a:srgbClr val="002B5C"/>
+                </a:solidFill>
+                <a:latin typeface="Segoe UI"/>
+              </a:defRPr>
+            </a:pPr>
+            <a:r>
+              <a:t>Desempenho Matéria</a:t>
+            </a:r>
+          </a:p>
+        </p:txBody>
+      </p:sp>
+      <p:sp>
+        <p:nvSpPr>
+          <p:cNvPr id="33" name="TextBox 32"/>
+          <p:cNvSpPr txBox="1"/>
+          <p:nvPr/>
+        </p:nvSpPr>
+        <p:spPr>
+          <a:xfrm>
+            <a:off x="6217920" y="5212080"/>
+            <a:ext cx="3657600" cy="548640"/>
+          </a:xfrm>
+          <a:prstGeom prst="rect">
+            <a:avLst/>
+          </a:prstGeom>
+          <a:noFill/>
+        </p:spPr>
+        <p:txBody>
+          <a:bodyPr wrap="square">
+            <a:spAutoFit/>
+          </a:bodyPr>
+          <a:lstStyle/>
+          <a:p>
+            <a:pPr algn="l">
+              <a:defRPr sz="1400" b="0">
+                <a:solidFill>
+                  <a:srgbClr val="666666"/>
+                </a:solidFill>
+                <a:latin typeface="Segoe UI"/>
+              </a:defRPr>
+            </a:pPr>
+            <a:r>
+              <a:t>Eficácia do currículo entre turmas</a:t>
+            </a:r>
+          </a:p>
+        </p:txBody>
+      </p:sp>
+      <p:sp>
+        <p:nvSpPr>
+          <p:cNvPr id="34" name="TextBox 33"/>
+          <p:cNvSpPr txBox="1"/>
+          <p:nvPr/>
+        </p:nvSpPr>
+        <p:spPr>
+          <a:xfrm>
+            <a:off x="10058400" y="5212080"/>
+            <a:ext cx="1828800" cy="548640"/>
+          </a:xfrm>
+          <a:prstGeom prst="rect">
+            <a:avLst/>
+          </a:prstGeom>
+          <a:noFill/>
+        </p:spPr>
+        <p:txBody>
+          <a:bodyPr wrap="square">
+            <a:spAutoFit/>
+          </a:bodyPr>
+          <a:lstStyle/>
+          <a:p>
+            <a:r>
+              <a:rPr sz="1100" u="sng">
+                <a:solidFill>
+                  <a:srgbClr val="4A90D9"/>
+                </a:solidFill>
+                <a:latin typeface="Segoe UI"/>
+                <a:hlinkClick r:id="rId7"/>
+              </a:rPr>
+              <a:t>📎 Abrir PDF</a:t>
+            </a:r>
+          </a:p>
+        </p:txBody>
+      </p:sp>
+      <p:sp>
+        <p:nvSpPr>
+          <p:cNvPr id="35" name="TextBox 34"/>
+          <p:cNvSpPr txBox="1"/>
+          <p:nvPr/>
+        </p:nvSpPr>
+        <p:spPr>
+          <a:xfrm>
+            <a:off x="731520" y="6035040"/>
+            <a:ext cx="10058400" cy="457200"/>
+          </a:xfrm>
+          <a:prstGeom prst="rect">
+            <a:avLst/>
+          </a:prstGeom>
+          <a:noFill/>
+        </p:spPr>
+        <p:txBody>
+          <a:bodyPr wrap="square">
+            <a:spAutoFit/>
+          </a:bodyPr>
+          <a:lstStyle/>
+          <a:p>
+            <a:pPr algn="ctr">
+              <a:defRPr sz="1600" b="1">
+                <a:solidFill>
+                  <a:srgbClr val="0056A0"/>
+                </a:solidFill>
+                <a:latin typeface="Segoe UI"/>
+              </a:defRPr>
+            </a:pPr>
+            <a:r>
+              <a:t>Tudo gerado automaticamente. O professor clica um botão e recebe narrativas pedagógicas reais.</a:t>
+            </a:r>
+          </a:p>
+        </p:txBody>
+      </p:sp>
+    </p:spTree>
+  </p:cSld>
+  <p:clrMapOvr>
+    <a:masterClrMapping/>
+  </p:clrMapOvr>
+</p:sld>
+</file>
+
+<file path=ppt/slides/slide24.xml><?xml version="1.0" encoding="utf-8"?>
 <p:sld xmlns:a="http://schemas.openxmlformats.org/drawingml/2006/main" xmlns:p="http://schemas.openxmlformats.org/presentationml/2006/main" xmlns:r="http://schemas.openxmlformats.org/officeDocument/2006/relationships">
   <p:cSld>
     <p:bg>
@@ -9060,7 +9559,7 @@
 </p:sld>
 </file>
 
-<file path=ppt/slides/slide24.xml><?xml version="1.0" encoding="utf-8"?>
+<file path=ppt/slides/slide25.xml><?xml version="1.0" encoding="utf-8"?>
 <p:sld xmlns:a="http://schemas.openxmlformats.org/drawingml/2006/main" xmlns:p="http://schemas.openxmlformats.org/presentationml/2006/main" xmlns:r="http://schemas.openxmlformats.org/officeDocument/2006/relationships">
   <p:cSld>
     <p:bg>

--- a/NOVO_CR_Apresentacao_v3.pptx
+++ b/NOVO_CR_Apresentacao_v3.pptx
@@ -30,6 +30,10 @@
     <p:sldId id="278" r:id="rId29"/>
     <p:sldId id="279" r:id="rId30"/>
     <p:sldId id="280" r:id="rId31"/>
+    <p:sldId id="281" r:id="rId32"/>
+    <p:sldId id="282" r:id="rId33"/>
+    <p:sldId id="283" r:id="rId34"/>
+    <p:sldId id="284" r:id="rId35"/>
   </p:sldIdLst>
   <p:sldSz cx="12191695" cy="6858000" type="screen4x3"/>
   <p:notesSz cx="6858000" cy="9144000"/>
@@ -4081,7 +4085,7 @@
     <p:bg>
       <p:bgPr>
         <a:solidFill>
-          <a:srgbClr val="002B5C"/>
+          <a:srgbClr val="FFFFFF"/>
         </a:solidFill>
         <a:effectLst/>
       </p:bgPr>
@@ -4101,8 +4105,87 @@
         </p:nvSpPr>
         <p:spPr>
           <a:xfrm>
-            <a:off x="0" y="2926080"/>
-            <a:ext cx="12191695" cy="54864"/>
+            <a:off x="0" y="0"/>
+            <a:ext cx="12191695" cy="73152"/>
+          </a:xfrm>
+          <a:prstGeom prst="rect">
+            <a:avLst/>
+          </a:prstGeom>
+          <a:solidFill>
+            <a:srgbClr val="0056A0"/>
+          </a:solidFill>
+          <a:ln>
+            <a:noFill/>
+          </a:ln>
+        </p:spPr>
+        <p:style>
+          <a:lnRef idx="1">
+            <a:schemeClr val="accent1"/>
+          </a:lnRef>
+          <a:fillRef idx="3">
+            <a:schemeClr val="accent1"/>
+          </a:fillRef>
+          <a:effectRef idx="2">
+            <a:schemeClr val="accent1"/>
+          </a:effectRef>
+          <a:fontRef idx="minor">
+            <a:schemeClr val="lt1"/>
+          </a:fontRef>
+        </p:style>
+        <p:txBody>
+          <a:bodyPr rtlCol="0" anchor="ctr"/>
+          <a:lstStyle/>
+          <a:p>
+            <a:pPr algn="ctr"/>
+          </a:p>
+        </p:txBody>
+      </p:sp>
+      <p:sp>
+        <p:nvSpPr>
+          <p:cNvPr id="3" name="TextBox 2"/>
+          <p:cNvSpPr txBox="1"/>
+          <p:nvPr/>
+        </p:nvSpPr>
+        <p:spPr>
+          <a:xfrm>
+            <a:off x="731520" y="274320"/>
+            <a:ext cx="10058400" cy="731520"/>
+          </a:xfrm>
+          <a:prstGeom prst="rect">
+            <a:avLst/>
+          </a:prstGeom>
+          <a:noFill/>
+        </p:spPr>
+        <p:txBody>
+          <a:bodyPr wrap="square">
+            <a:spAutoFit/>
+          </a:bodyPr>
+          <a:lstStyle/>
+          <a:p>
+            <a:pPr algn="l">
+              <a:defRPr sz="3000" b="1">
+                <a:solidFill>
+                  <a:srgbClr val="002B5C"/>
+                </a:solidFill>
+                <a:latin typeface="Segoe UI"/>
+              </a:defRPr>
+            </a:pPr>
+            <a:r>
+              <a:t>O Próximo Passo: Métricas de Custo e Qualidade</a:t>
+            </a:r>
+          </a:p>
+        </p:txBody>
+      </p:sp>
+      <p:sp>
+        <p:nvSpPr>
+          <p:cNvPr id="4" name="Rectangle 3"/>
+          <p:cNvSpPr/>
+          <p:nvPr/>
+        </p:nvSpPr>
+        <p:spPr>
+          <a:xfrm>
+            <a:off x="731520" y="960120"/>
+            <a:ext cx="2743200" cy="36576"/>
           </a:xfrm>
           <a:prstGeom prst="rect">
             <a:avLst/>
@@ -4138,14 +4221,14 @@
       </p:sp>
       <p:sp>
         <p:nvSpPr>
-          <p:cNvPr id="3" name="TextBox 2"/>
+          <p:cNvPr id="5" name="TextBox 4"/>
           <p:cNvSpPr txBox="1"/>
           <p:nvPr/>
         </p:nvSpPr>
         <p:spPr>
           <a:xfrm>
-            <a:off x="914400" y="1828800"/>
-            <a:ext cx="10058400" cy="1097280"/>
+            <a:off x="731520" y="1188720"/>
+            <a:ext cx="10515600" cy="5029200"/>
           </a:xfrm>
           <a:prstGeom prst="rect">
             <a:avLst/>
@@ -4158,52 +4241,186 @@
           </a:bodyPr>
           <a:lstStyle/>
           <a:p>
-            <a:pPr algn="ctr">
-              <a:defRPr sz="4400" b="1">
-                <a:solidFill>
-                  <a:srgbClr val="FFFFFF"/>
-                </a:solidFill>
-                <a:latin typeface="Segoe UI"/>
-              </a:defRPr>
-            </a:pPr>
-            <a:r>
-              <a:t>Pipeline de Correção</a:t>
-            </a:r>
-          </a:p>
-        </p:txBody>
-      </p:sp>
-      <p:sp>
-        <p:nvSpPr>
-          <p:cNvPr id="4" name="TextBox 3"/>
-          <p:cNvSpPr txBox="1"/>
-          <p:nvPr/>
-        </p:nvSpPr>
-        <p:spPr>
-          <a:xfrm>
-            <a:off x="914400" y="3200400"/>
-            <a:ext cx="10058400" cy="914400"/>
-          </a:xfrm>
-          <a:prstGeom prst="rect">
-            <a:avLst/>
-          </a:prstGeom>
-          <a:noFill/>
-        </p:spPr>
-        <p:txBody>
-          <a:bodyPr wrap="square">
-            <a:spAutoFit/>
-          </a:bodyPr>
-          <a:lstStyle/>
-          <a:p>
-            <a:pPr algn="ctr">
-              <a:defRPr sz="2200" b="0">
-                <a:solidFill>
-                  <a:srgbClr val="4A90D9"/>
-                </a:solidFill>
-                <a:latin typeface="Segoe UI"/>
-              </a:defRPr>
-            </a:pPr>
-            <a:r>
-              <a:t>Como a IA processa uma prova em 9 etapas</a:t>
+            <a:pPr>
+              <a:spcAft>
+                <a:spcPts val="960"/>
+              </a:spcAft>
+              <a:defRPr sz="1600" b="1">
+                <a:solidFill>
+                  <a:srgbClr val="002B5C"/>
+                </a:solidFill>
+                <a:latin typeface="Segoe UI"/>
+              </a:defRPr>
+            </a:pPr>
+            <a:r>
+              <a:t>Múltiplos modelos existem. Qual é o melhor para cada tarefa?</a:t>
+            </a:r>
+          </a:p>
+          <a:p>
+            <a:pPr>
+              <a:spcAft>
+                <a:spcPts val="960"/>
+              </a:spcAft>
+              <a:defRPr sz="1600" b="0">
+                <a:solidFill>
+                  <a:srgbClr val="333333"/>
+                </a:solidFill>
+                <a:latin typeface="Segoe UI"/>
+              </a:defRPr>
+            </a:pPr>
+          </a:p>
+          <a:p>
+            <a:pPr>
+              <a:spcAft>
+                <a:spcPts val="960"/>
+              </a:spcAft>
+              <a:defRPr sz="1600" b="0">
+                <a:solidFill>
+                  <a:srgbClr val="333333"/>
+                </a:solidFill>
+                <a:latin typeface="Segoe UI"/>
+              </a:defRPr>
+            </a:pPr>
+            <a:r>
+              <a:t>Cada etapa do pipeline tem exigências diferentes:</a:t>
+            </a:r>
+          </a:p>
+          <a:p>
+            <a:pPr>
+              <a:spcAft>
+                <a:spcPts val="960"/>
+              </a:spcAft>
+              <a:defRPr sz="1600" b="0">
+                <a:solidFill>
+                  <a:srgbClr val="333333"/>
+                </a:solidFill>
+                <a:latin typeface="Segoe UI"/>
+              </a:defRPr>
+            </a:pPr>
+            <a:r>
+              <a:t>   •  Extração de questões: precisa de precisão estrutural</a:t>
+            </a:r>
+          </a:p>
+          <a:p>
+            <a:pPr>
+              <a:spcAft>
+                <a:spcPts val="960"/>
+              </a:spcAft>
+              <a:defRPr sz="1600" b="0">
+                <a:solidFill>
+                  <a:srgbClr val="333333"/>
+                </a:solidFill>
+                <a:latin typeface="Segoe UI"/>
+              </a:defRPr>
+            </a:pPr>
+            <a:r>
+              <a:t>   •  Correção narrativa: precisa de profundidade analítica</a:t>
+            </a:r>
+          </a:p>
+          <a:p>
+            <a:pPr>
+              <a:spcAft>
+                <a:spcPts val="960"/>
+              </a:spcAft>
+              <a:defRPr sz="1600" b="0">
+                <a:solidFill>
+                  <a:srgbClr val="333333"/>
+                </a:solidFill>
+                <a:latin typeface="Segoe UI"/>
+              </a:defRPr>
+            </a:pPr>
+            <a:r>
+              <a:t>   •  Relatórios de desempenho: precisa de síntese e visão ampla</a:t>
+            </a:r>
+          </a:p>
+          <a:p>
+            <a:pPr>
+              <a:spcAft>
+                <a:spcPts val="960"/>
+              </a:spcAft>
+              <a:defRPr sz="1600" b="0">
+                <a:solidFill>
+                  <a:srgbClr val="333333"/>
+                </a:solidFill>
+                <a:latin typeface="Segoe UI"/>
+              </a:defRPr>
+            </a:pPr>
+          </a:p>
+          <a:p>
+            <a:pPr>
+              <a:spcAft>
+                <a:spcPts val="960"/>
+              </a:spcAft>
+              <a:defRPr sz="1600" b="1">
+                <a:solidFill>
+                  <a:srgbClr val="0056A0"/>
+                </a:solidFill>
+                <a:latin typeface="Segoe UI"/>
+              </a:defRPr>
+            </a:pPr>
+            <a:r>
+              <a:t>O modelo ideal pode ser diferente em cada etapa.</a:t>
+            </a:r>
+          </a:p>
+          <a:p>
+            <a:pPr>
+              <a:spcAft>
+                <a:spcPts val="960"/>
+              </a:spcAft>
+              <a:defRPr sz="1600" b="1">
+                <a:solidFill>
+                  <a:srgbClr val="0056A0"/>
+                </a:solidFill>
+                <a:latin typeface="Segoe UI"/>
+              </a:defRPr>
+            </a:pPr>
+            <a:r>
+              <a:t>E o custo varia dramaticamente entre provedores.</a:t>
+            </a:r>
+          </a:p>
+          <a:p>
+            <a:pPr>
+              <a:spcAft>
+                <a:spcPts val="960"/>
+              </a:spcAft>
+              <a:defRPr sz="1600" b="0">
+                <a:solidFill>
+                  <a:srgbClr val="333333"/>
+                </a:solidFill>
+                <a:latin typeface="Segoe UI"/>
+              </a:defRPr>
+            </a:pPr>
+          </a:p>
+          <a:p>
+            <a:pPr>
+              <a:spcAft>
+                <a:spcPts val="960"/>
+              </a:spcAft>
+              <a:defRPr sz="1600" b="0">
+                <a:solidFill>
+                  <a:srgbClr val="333333"/>
+                </a:solidFill>
+                <a:latin typeface="Segoe UI"/>
+              </a:defRPr>
+            </a:pPr>
+            <a:r>
+              <a:t>Meta até o final do ano: entregar às escolas estimativas</a:t>
+            </a:r>
+          </a:p>
+          <a:p>
+            <a:pPr>
+              <a:spcAft>
+                <a:spcPts val="960"/>
+              </a:spcAft>
+              <a:defRPr sz="1600" b="0">
+                <a:solidFill>
+                  <a:srgbClr val="333333"/>
+                </a:solidFill>
+                <a:latin typeface="Segoe UI"/>
+              </a:defRPr>
+            </a:pPr>
+            <a:r>
+              <a:t>reais de custo para executar o pipeline completo.</a:t>
             </a:r>
           </a:p>
         </p:txBody>
@@ -4308,7 +4525,7 @@
               </a:defRPr>
             </a:pPr>
             <a:r>
-              <a:t>Pipeline de Correção Automática</a:t>
+              <a:t>O Que Precisamos Explorar</a:t>
             </a:r>
           </a:p>
         </p:txBody>
@@ -4356,40 +4573,16 @@
           </a:p>
         </p:txBody>
       </p:sp>
-      <p:pic>
-        <p:nvPicPr>
-          <p:cNvPr id="5" name="Picture 4" descr="04_pipeline_diagram.png"/>
-          <p:cNvPicPr>
-            <a:picLocks noChangeAspect="1"/>
-          </p:cNvPicPr>
-          <p:nvPr/>
-        </p:nvPicPr>
-        <p:blipFill>
-          <a:blip r:embed="rId2"/>
-          <a:stretch>
-            <a:fillRect/>
-          </a:stretch>
-        </p:blipFill>
-        <p:spPr>
-          <a:xfrm>
-            <a:off x="457200" y="1188720"/>
-            <a:ext cx="11247120" cy="7029450"/>
-          </a:xfrm>
-          <a:prstGeom prst="rect">
-            <a:avLst/>
-          </a:prstGeom>
-        </p:spPr>
-      </p:pic>
-      <p:sp>
-        <p:nvSpPr>
-          <p:cNvPr id="6" name="TextBox 5"/>
+      <p:sp>
+        <p:nvSpPr>
+          <p:cNvPr id="5" name="TextBox 4"/>
           <p:cNvSpPr txBox="1"/>
           <p:nvPr/>
         </p:nvSpPr>
         <p:spPr>
           <a:xfrm>
-            <a:off x="731520" y="5303520"/>
-            <a:ext cx="10058400" cy="1097280"/>
+            <a:off x="731520" y="1188720"/>
+            <a:ext cx="10515600" cy="5029200"/>
           </a:xfrm>
           <a:prstGeom prst="rect">
             <a:avLst/>
@@ -4402,20 +4595,202 @@
           </a:bodyPr>
           <a:lstStyle/>
           <a:p>
-            <a:pPr algn="ctr">
-              <a:defRPr sz="1600" b="0">
-                <a:solidFill>
-                  <a:srgbClr val="666666"/>
-                </a:solidFill>
-                <a:latin typeface="Segoe UI"/>
-              </a:defRPr>
-            </a:pPr>
-            <a:r>
-              <a:t>A IA processa os documentos em 6 etapas sequenciais.</a:t>
-            </a:r>
-            <a:br/>
-            <a:r>
-              <a:t>Cada etapa gera um documento que o professor pode visualizar, editar e revisar.</a:t>
+            <a:pPr>
+              <a:spcAft>
+                <a:spcPts val="960"/>
+              </a:spcAft>
+              <a:defRPr sz="1600" b="1">
+                <a:solidFill>
+                  <a:srgbClr val="002B5C"/>
+                </a:solidFill>
+                <a:latin typeface="Segoe UI"/>
+              </a:defRPr>
+            </a:pPr>
+            <a:r>
+              <a:t>Objetivo do financiamento:</a:t>
+            </a:r>
+          </a:p>
+          <a:p>
+            <a:pPr>
+              <a:spcAft>
+                <a:spcPts val="960"/>
+              </a:spcAft>
+              <a:defRPr sz="1600" b="0">
+                <a:solidFill>
+                  <a:srgbClr val="333333"/>
+                </a:solidFill>
+                <a:latin typeface="Segoe UI"/>
+              </a:defRPr>
+            </a:pPr>
+          </a:p>
+          <a:p>
+            <a:pPr>
+              <a:spcAft>
+                <a:spcPts val="960"/>
+              </a:spcAft>
+              <a:defRPr sz="1600" b="1">
+                <a:solidFill>
+                  <a:srgbClr val="0056A0"/>
+                </a:solidFill>
+                <a:latin typeface="Segoe UI"/>
+              </a:defRPr>
+            </a:pPr>
+            <a:r>
+              <a:t>1.  Criar métricas de qualidade</a:t>
+            </a:r>
+          </a:p>
+          <a:p>
+            <a:pPr>
+              <a:spcAft>
+                <a:spcPts val="960"/>
+              </a:spcAft>
+              <a:defRPr sz="1600" b="0">
+                <a:solidFill>
+                  <a:srgbClr val="333333"/>
+                </a:solidFill>
+                <a:latin typeface="Segoe UI"/>
+              </a:defRPr>
+            </a:pPr>
+            <a:r>
+              <a:t>   Comparar outputs de cada modelo em cada etapa do pipeline.</a:t>
+            </a:r>
+          </a:p>
+          <a:p>
+            <a:pPr>
+              <a:spcAft>
+                <a:spcPts val="960"/>
+              </a:spcAft>
+              <a:defRPr sz="1600" b="0">
+                <a:solidFill>
+                  <a:srgbClr val="333333"/>
+                </a:solidFill>
+                <a:latin typeface="Segoe UI"/>
+              </a:defRPr>
+            </a:pPr>
+            <a:r>
+              <a:t>   Medir: precisão, profundidade narrativa, coerência pedagógica.</a:t>
+            </a:r>
+          </a:p>
+          <a:p>
+            <a:pPr>
+              <a:spcAft>
+                <a:spcPts val="960"/>
+              </a:spcAft>
+              <a:defRPr sz="1600" b="0">
+                <a:solidFill>
+                  <a:srgbClr val="333333"/>
+                </a:solidFill>
+                <a:latin typeface="Segoe UI"/>
+              </a:defRPr>
+            </a:pPr>
+          </a:p>
+          <a:p>
+            <a:pPr>
+              <a:spcAft>
+                <a:spcPts val="960"/>
+              </a:spcAft>
+              <a:defRPr sz="1600" b="1">
+                <a:solidFill>
+                  <a:srgbClr val="0056A0"/>
+                </a:solidFill>
+                <a:latin typeface="Segoe UI"/>
+              </a:defRPr>
+            </a:pPr>
+            <a:r>
+              <a:t>2.  Explorar combinações de modelos</a:t>
+            </a:r>
+          </a:p>
+          <a:p>
+            <a:pPr>
+              <a:spcAft>
+                <a:spcPts val="960"/>
+              </a:spcAft>
+              <a:defRPr sz="1600" b="0">
+                <a:solidFill>
+                  <a:srgbClr val="333333"/>
+                </a:solidFill>
+                <a:latin typeface="Segoe UI"/>
+              </a:defRPr>
+            </a:pPr>
+            <a:r>
+              <a:t>   Modelo A pode ser mais barato para extração,</a:t>
+            </a:r>
+          </a:p>
+          <a:p>
+            <a:pPr>
+              <a:spcAft>
+                <a:spcPts val="960"/>
+              </a:spcAft>
+              <a:defRPr sz="1600" b="0">
+                <a:solidFill>
+                  <a:srgbClr val="333333"/>
+                </a:solidFill>
+                <a:latin typeface="Segoe UI"/>
+              </a:defRPr>
+            </a:pPr>
+            <a:r>
+              <a:t>   mas pior para qualidade narrativa. Testar milhares de combinações.</a:t>
+            </a:r>
+          </a:p>
+          <a:p>
+            <a:pPr>
+              <a:spcAft>
+                <a:spcPts val="960"/>
+              </a:spcAft>
+              <a:defRPr sz="1600" b="0">
+                <a:solidFill>
+                  <a:srgbClr val="333333"/>
+                </a:solidFill>
+                <a:latin typeface="Segoe UI"/>
+              </a:defRPr>
+            </a:pPr>
+          </a:p>
+          <a:p>
+            <a:pPr>
+              <a:spcAft>
+                <a:spcPts val="960"/>
+              </a:spcAft>
+              <a:defRPr sz="1600" b="1">
+                <a:solidFill>
+                  <a:srgbClr val="0056A0"/>
+                </a:solidFill>
+                <a:latin typeface="Segoe UI"/>
+              </a:defRPr>
+            </a:pPr>
+            <a:r>
+              <a:t>3.  Melhorar outputs em todos os provedores</a:t>
+            </a:r>
+          </a:p>
+          <a:p>
+            <a:pPr>
+              <a:spcAft>
+                <a:spcPts val="960"/>
+              </a:spcAft>
+              <a:defRPr sz="1600" b="0">
+                <a:solidFill>
+                  <a:srgbClr val="333333"/>
+                </a:solidFill>
+                <a:latin typeface="Segoe UI"/>
+              </a:defRPr>
+            </a:pPr>
+            <a:r>
+              <a:t>   Quanto mais financiamento, melhor a exploração de alternativas.</a:t>
+            </a:r>
+          </a:p>
+          <a:p>
+            <a:pPr>
+              <a:spcAft>
+                <a:spcPts val="960"/>
+              </a:spcAft>
+              <a:defRPr sz="1600" b="0">
+                <a:solidFill>
+                  <a:srgbClr val="333333"/>
+                </a:solidFill>
+                <a:latin typeface="Segoe UI"/>
+              </a:defRPr>
+            </a:pPr>
+            <a:r>
+              <a:t>   Cada crédito de API se traduz em dados comparativos reais.</a:t>
             </a:r>
           </a:p>
         </p:txBody>
@@ -4520,7 +4895,7 @@
               </a:defRPr>
             </a:pPr>
             <a:r>
-              <a:t>Etapas 1-3: Extração de Documentos</a:t>
+              <a:t>Chat: O Aluno Entende Suas Notas</a:t>
             </a:r>
           </a:p>
         </p:txBody>
@@ -4594,7 +4969,203 @@
               <a:spcAft>
                 <a:spcPts val="960"/>
               </a:spcAft>
-              <a:defRPr sz="1600" b="0">
+              <a:defRPr sz="1600" b="1">
+                <a:solidFill>
+                  <a:srgbClr val="002B5C"/>
+                </a:solidFill>
+                <a:latin typeface="Segoe UI"/>
+              </a:defRPr>
+            </a:pPr>
+            <a:r>
+              <a:t>O aluno pode conversar com a IA sobre suas provas.</a:t>
+            </a:r>
+          </a:p>
+          <a:p>
+            <a:pPr>
+              <a:spcAft>
+                <a:spcPts val="960"/>
+              </a:spcAft>
+              <a:defRPr sz="1600" b="0">
+                <a:solidFill>
+                  <a:srgbClr val="333333"/>
+                </a:solidFill>
+                <a:latin typeface="Segoe UI"/>
+              </a:defRPr>
+            </a:pPr>
+          </a:p>
+          <a:p>
+            <a:pPr>
+              <a:spcAft>
+                <a:spcPts val="960"/>
+              </a:spcAft>
+              <a:defRPr sz="1600" b="0">
+                <a:solidFill>
+                  <a:srgbClr val="333333"/>
+                </a:solidFill>
+                <a:latin typeface="Segoe UI"/>
+              </a:defRPr>
+            </a:pPr>
+            <a:r>
+              <a:t>A funcionalidade de chat permite que o aluno:</a:t>
+            </a:r>
+          </a:p>
+          <a:p>
+            <a:pPr>
+              <a:spcAft>
+                <a:spcPts val="960"/>
+              </a:spcAft>
+              <a:defRPr sz="1600" b="0">
+                <a:solidFill>
+                  <a:srgbClr val="333333"/>
+                </a:solidFill>
+                <a:latin typeface="Segoe UI"/>
+              </a:defRPr>
+            </a:pPr>
+          </a:p>
+          <a:p>
+            <a:pPr>
+              <a:spcAft>
+                <a:spcPts val="960"/>
+              </a:spcAft>
+              <a:defRPr sz="1600" b="0">
+                <a:solidFill>
+                  <a:srgbClr val="333333"/>
+                </a:solidFill>
+                <a:latin typeface="Segoe UI"/>
+              </a:defRPr>
+            </a:pPr>
+            <a:r>
+              <a:t>   •  Entenda os erros que cometeu — por que perdeu pontos</a:t>
+            </a:r>
+          </a:p>
+          <a:p>
+            <a:pPr>
+              <a:spcAft>
+                <a:spcPts val="960"/>
+              </a:spcAft>
+              <a:defRPr sz="1600" b="0">
+                <a:solidFill>
+                  <a:srgbClr val="333333"/>
+                </a:solidFill>
+                <a:latin typeface="Segoe UI"/>
+              </a:defRPr>
+            </a:pPr>
+            <a:r>
+              <a:t>   •  Explore o feedback da correção em profundidade</a:t>
+            </a:r>
+          </a:p>
+          <a:p>
+            <a:pPr>
+              <a:spcAft>
+                <a:spcPts val="960"/>
+              </a:spcAft>
+              <a:defRPr sz="1600" b="0">
+                <a:solidFill>
+                  <a:srgbClr val="333333"/>
+                </a:solidFill>
+                <a:latin typeface="Segoe UI"/>
+              </a:defRPr>
+            </a:pPr>
+            <a:r>
+              <a:t>   •  Pergunte sobre conceitos que não dominou</a:t>
+            </a:r>
+          </a:p>
+          <a:p>
+            <a:pPr>
+              <a:spcAft>
+                <a:spcPts val="960"/>
+              </a:spcAft>
+              <a:defRPr sz="1600" b="0">
+                <a:solidFill>
+                  <a:srgbClr val="333333"/>
+                </a:solidFill>
+                <a:latin typeface="Segoe UI"/>
+              </a:defRPr>
+            </a:pPr>
+          </a:p>
+          <a:p>
+            <a:pPr>
+              <a:spcAft>
+                <a:spcPts val="960"/>
+              </a:spcAft>
+              <a:defRPr sz="1600" b="1">
+                <a:solidFill>
+                  <a:srgbClr val="0056A0"/>
+                </a:solidFill>
+                <a:latin typeface="Segoe UI"/>
+              </a:defRPr>
+            </a:pPr>
+            <a:r>
+              <a:t>Se discordar da nota?</a:t>
+            </a:r>
+          </a:p>
+          <a:p>
+            <a:pPr>
+              <a:spcAft>
+                <a:spcPts val="960"/>
+              </a:spcAft>
+              <a:defRPr sz="1600" b="0">
+                <a:solidFill>
+                  <a:srgbClr val="333333"/>
+                </a:solidFill>
+                <a:latin typeface="Segoe UI"/>
+              </a:defRPr>
+            </a:pPr>
+            <a:r>
+              <a:t>   O aluno pode usar evidências da conversa para fundamentar</a:t>
+            </a:r>
+          </a:p>
+          <a:p>
+            <a:pPr>
+              <a:spcAft>
+                <a:spcPts val="960"/>
+              </a:spcAft>
+              <a:defRPr sz="1600" b="0">
+                <a:solidFill>
+                  <a:srgbClr val="333333"/>
+                </a:solidFill>
+                <a:latin typeface="Segoe UI"/>
+              </a:defRPr>
+            </a:pPr>
+            <a:r>
+              <a:t>   um pedido de revisão ao professor — acelerando o processo</a:t>
+            </a:r>
+          </a:p>
+          <a:p>
+            <a:pPr>
+              <a:spcAft>
+                <a:spcPts val="960"/>
+              </a:spcAft>
+              <a:defRPr sz="1600" b="0">
+                <a:solidFill>
+                  <a:srgbClr val="333333"/>
+                </a:solidFill>
+                <a:latin typeface="Segoe UI"/>
+              </a:defRPr>
+            </a:pPr>
+            <a:r>
+              <a:t>   que normalmente envolve filas, e-mails e reuniões.</a:t>
+            </a:r>
+          </a:p>
+          <a:p>
+            <a:pPr>
+              <a:spcAft>
+                <a:spcPts val="960"/>
+              </a:spcAft>
+              <a:defRPr sz="1600" b="0">
+                <a:solidFill>
+                  <a:srgbClr val="333333"/>
+                </a:solidFill>
+                <a:latin typeface="Segoe UI"/>
+              </a:defRPr>
+            </a:pPr>
+          </a:p>
+          <a:p>
+            <a:pPr>
+              <a:spcAft>
+                <a:spcPts val="960"/>
+              </a:spcAft>
+              <a:defRPr sz="1600" b="1">
                 <a:solidFill>
                   <a:srgbClr val="666666"/>
                 </a:solidFill>
@@ -4602,21 +5173,8 @@
               </a:defRPr>
             </a:pPr>
             <a:r>
-              <a:t>Antes de corrigir, a IA precisa entender os documentos.</a:t>
-            </a:r>
-          </a:p>
-          <a:p>
-            <a:pPr>
-              <a:spcAft>
-                <a:spcPts val="960"/>
-              </a:spcAft>
-              <a:defRPr sz="1600" b="0">
-                <a:solidFill>
-                  <a:srgbClr val="333333"/>
-                </a:solidFill>
-                <a:latin typeface="Segoe UI"/>
-              </a:defRPr>
-            </a:pPr>
+              <a:t>Transparência para todos: professor vê o que a IA fez,</a:t>
+            </a:r>
           </a:p>
           <a:p>
             <a:pPr>
@@ -4625,167 +5183,13 @@
               </a:spcAft>
               <a:defRPr sz="1600" b="1">
                 <a:solidFill>
-                  <a:srgbClr val="0056A0"/>
-                </a:solidFill>
-                <a:latin typeface="Segoe UI"/>
-              </a:defRPr>
-            </a:pPr>
-            <a:r>
-              <a:t>🔎  Etapa 1 — Extração de Questões</a:t>
-            </a:r>
-          </a:p>
-          <a:p>
-            <a:pPr>
-              <a:spcAft>
-                <a:spcPts val="960"/>
-              </a:spcAft>
-              <a:defRPr sz="1600" b="0">
-                <a:solidFill>
-                  <a:srgbClr val="333333"/>
-                </a:solidFill>
-                <a:latin typeface="Segoe UI"/>
-              </a:defRPr>
-            </a:pPr>
-            <a:r>
-              <a:t>   Lê o enunciado, identifica cada questão e classifica por</a:t>
-            </a:r>
-          </a:p>
-          <a:p>
-            <a:pPr>
-              <a:spcAft>
-                <a:spcPts val="960"/>
-              </a:spcAft>
-              <a:defRPr sz="1600" b="0">
-                <a:solidFill>
-                  <a:srgbClr val="333333"/>
-                </a:solidFill>
-                <a:latin typeface="Segoe UI"/>
-              </a:defRPr>
-            </a:pPr>
-            <a:r>
-              <a:t>   tipo de raciocínio: recuperação, compreensão, aplicação, análise, síntese.</a:t>
-            </a:r>
-          </a:p>
-          <a:p>
-            <a:pPr>
-              <a:spcAft>
-                <a:spcPts val="960"/>
-              </a:spcAft>
-              <a:defRPr sz="1600" b="0">
-                <a:solidFill>
-                  <a:srgbClr val="333333"/>
-                </a:solidFill>
-                <a:latin typeface="Segoe UI"/>
-              </a:defRPr>
-            </a:pPr>
-          </a:p>
-          <a:p>
-            <a:pPr>
-              <a:spcAft>
-                <a:spcPts val="960"/>
-              </a:spcAft>
-              <a:defRPr sz="1600" b="1">
-                <a:solidFill>
-                  <a:srgbClr val="0056A0"/>
-                </a:solidFill>
-                <a:latin typeface="Segoe UI"/>
-              </a:defRPr>
-            </a:pPr>
-            <a:r>
-              <a:t>🧩  Etapa 2 — Extração de Gabarito</a:t>
-            </a:r>
-          </a:p>
-          <a:p>
-            <a:pPr>
-              <a:spcAft>
-                <a:spcPts val="960"/>
-              </a:spcAft>
-              <a:defRPr sz="1600" b="0">
-                <a:solidFill>
-                  <a:srgbClr val="333333"/>
-                </a:solidFill>
-                <a:latin typeface="Segoe UI"/>
-              </a:defRPr>
-            </a:pPr>
-            <a:r>
-              <a:t>   Estrutura as respostas corretas, associa critérios de pontuação,</a:t>
-            </a:r>
-          </a:p>
-          <a:p>
-            <a:pPr>
-              <a:spcAft>
-                <a:spcPts val="960"/>
-              </a:spcAft>
-              <a:defRPr sz="1600" b="0">
-                <a:solidFill>
-                  <a:srgbClr val="333333"/>
-                </a:solidFill>
-                <a:latin typeface="Segoe UI"/>
-              </a:defRPr>
-            </a:pPr>
-            <a:r>
-              <a:t>   identifica respostas alternativas válidas.</a:t>
-            </a:r>
-          </a:p>
-          <a:p>
-            <a:pPr>
-              <a:spcAft>
-                <a:spcPts val="960"/>
-              </a:spcAft>
-              <a:defRPr sz="1600" b="0">
-                <a:solidFill>
-                  <a:srgbClr val="333333"/>
-                </a:solidFill>
-                <a:latin typeface="Segoe UI"/>
-              </a:defRPr>
-            </a:pPr>
-          </a:p>
-          <a:p>
-            <a:pPr>
-              <a:spcAft>
-                <a:spcPts val="960"/>
-              </a:spcAft>
-              <a:defRPr sz="1600" b="1">
-                <a:solidFill>
-                  <a:srgbClr val="0056A0"/>
-                </a:solidFill>
-                <a:latin typeface="Segoe UI"/>
-              </a:defRPr>
-            </a:pPr>
-            <a:r>
-              <a:t>📝  Etapa 3 — Extração de Respostas</a:t>
-            </a:r>
-          </a:p>
-          <a:p>
-            <a:pPr>
-              <a:spcAft>
-                <a:spcPts val="960"/>
-              </a:spcAft>
-              <a:defRPr sz="1600" b="0">
-                <a:solidFill>
-                  <a:srgbClr val="333333"/>
-                </a:solidFill>
-                <a:latin typeface="Segoe UI"/>
-              </a:defRPr>
-            </a:pPr>
-            <a:r>
-              <a:t>   Lê o que o aluno escreveu. Lida com caligrafia,</a:t>
-            </a:r>
-          </a:p>
-          <a:p>
-            <a:pPr>
-              <a:spcAft>
-                <a:spcPts val="960"/>
-              </a:spcAft>
-              <a:defRPr sz="1600" b="0">
-                <a:solidFill>
-                  <a:srgbClr val="333333"/>
-                </a:solidFill>
-                <a:latin typeface="Segoe UI"/>
-              </a:defRPr>
-            </a:pPr>
-            <a:r>
-              <a:t>   formatos variados e respostas parciais.</a:t>
+                  <a:srgbClr val="666666"/>
+                </a:solidFill>
+                <a:latin typeface="Segoe UI"/>
+              </a:defRPr>
+            </a:pPr>
+            <a:r>
+              <a:t>aluno vê por que recebeu aquela nota.</a:t>
             </a:r>
           </a:p>
         </p:txBody>
@@ -4804,7 +5208,7 @@
     <p:bg>
       <p:bgPr>
         <a:solidFill>
-          <a:srgbClr val="FFFFFF"/>
+          <a:srgbClr val="002B5C"/>
         </a:solidFill>
         <a:effectLst/>
       </p:bgPr>
@@ -4824,87 +5228,8 @@
         </p:nvSpPr>
         <p:spPr>
           <a:xfrm>
-            <a:off x="0" y="0"/>
-            <a:ext cx="12191695" cy="73152"/>
-          </a:xfrm>
-          <a:prstGeom prst="rect">
-            <a:avLst/>
-          </a:prstGeom>
-          <a:solidFill>
-            <a:srgbClr val="0056A0"/>
-          </a:solidFill>
-          <a:ln>
-            <a:noFill/>
-          </a:ln>
-        </p:spPr>
-        <p:style>
-          <a:lnRef idx="1">
-            <a:schemeClr val="accent1"/>
-          </a:lnRef>
-          <a:fillRef idx="3">
-            <a:schemeClr val="accent1"/>
-          </a:fillRef>
-          <a:effectRef idx="2">
-            <a:schemeClr val="accent1"/>
-          </a:effectRef>
-          <a:fontRef idx="minor">
-            <a:schemeClr val="lt1"/>
-          </a:fontRef>
-        </p:style>
-        <p:txBody>
-          <a:bodyPr rtlCol="0" anchor="ctr"/>
-          <a:lstStyle/>
-          <a:p>
-            <a:pPr algn="ctr"/>
-          </a:p>
-        </p:txBody>
-      </p:sp>
-      <p:sp>
-        <p:nvSpPr>
-          <p:cNvPr id="3" name="TextBox 2"/>
-          <p:cNvSpPr txBox="1"/>
-          <p:nvPr/>
-        </p:nvSpPr>
-        <p:spPr>
-          <a:xfrm>
-            <a:off x="731520" y="274320"/>
-            <a:ext cx="10058400" cy="731520"/>
-          </a:xfrm>
-          <a:prstGeom prst="rect">
-            <a:avLst/>
-          </a:prstGeom>
-          <a:noFill/>
-        </p:spPr>
-        <p:txBody>
-          <a:bodyPr wrap="square">
-            <a:spAutoFit/>
-          </a:bodyPr>
-          <a:lstStyle/>
-          <a:p>
-            <a:pPr algn="l">
-              <a:defRPr sz="3000" b="1">
-                <a:solidFill>
-                  <a:srgbClr val="002B5C"/>
-                </a:solidFill>
-                <a:latin typeface="Segoe UI"/>
-              </a:defRPr>
-            </a:pPr>
-            <a:r>
-              <a:t>Etapa 4: Correção Narrativa</a:t>
-            </a:r>
-          </a:p>
-        </p:txBody>
-      </p:sp>
-      <p:sp>
-        <p:nvSpPr>
-          <p:cNvPr id="4" name="Rectangle 3"/>
-          <p:cNvSpPr/>
-          <p:nvPr/>
-        </p:nvSpPr>
-        <p:spPr>
-          <a:xfrm>
-            <a:off x="731520" y="960120"/>
-            <a:ext cx="2743200" cy="36576"/>
+            <a:off x="0" y="2926080"/>
+            <a:ext cx="12191695" cy="54864"/>
           </a:xfrm>
           <a:prstGeom prst="rect">
             <a:avLst/>
@@ -4940,14 +5265,14 @@
       </p:sp>
       <p:sp>
         <p:nvSpPr>
-          <p:cNvPr id="5" name="TextBox 4"/>
+          <p:cNvPr id="3" name="TextBox 2"/>
           <p:cNvSpPr txBox="1"/>
           <p:nvPr/>
         </p:nvSpPr>
         <p:spPr>
           <a:xfrm>
-            <a:off x="731520" y="1188720"/>
-            <a:ext cx="10515600" cy="5029200"/>
+            <a:off x="914400" y="1828800"/>
+            <a:ext cx="10058400" cy="1097280"/>
           </a:xfrm>
           <a:prstGeom prst="rect">
             <a:avLst/>
@@ -4960,231 +5285,52 @@
           </a:bodyPr>
           <a:lstStyle/>
           <a:p>
-            <a:pPr>
-              <a:spcAft>
-                <a:spcPts val="960"/>
-              </a:spcAft>
-              <a:defRPr sz="1600" b="1">
-                <a:solidFill>
-                  <a:srgbClr val="002B5C"/>
-                </a:solidFill>
-                <a:latin typeface="Segoe UI"/>
-              </a:defRPr>
-            </a:pPr>
-            <a:r>
-              <a:t>Não é um simples "certo ou errado".</a:t>
-            </a:r>
-          </a:p>
-          <a:p>
-            <a:pPr>
-              <a:spcAft>
-                <a:spcPts val="960"/>
-              </a:spcAft>
-              <a:defRPr sz="1600" b="0">
-                <a:solidFill>
-                  <a:srgbClr val="666666"/>
-                </a:solidFill>
-                <a:latin typeface="Segoe UI"/>
-              </a:defRPr>
-            </a:pPr>
-            <a:r>
-              <a:t>Para cada questão, a correção inclui:</a:t>
-            </a:r>
-          </a:p>
-          <a:p>
-            <a:pPr>
-              <a:spcAft>
-                <a:spcPts val="960"/>
-              </a:spcAft>
-              <a:defRPr sz="1600" b="0">
-                <a:solidFill>
-                  <a:srgbClr val="333333"/>
-                </a:solidFill>
-                <a:latin typeface="Segoe UI"/>
-              </a:defRPr>
-            </a:pPr>
-          </a:p>
-          <a:p>
-            <a:pPr>
-              <a:spcAft>
-                <a:spcPts val="960"/>
-              </a:spcAft>
-              <a:defRPr sz="1600" b="0">
-                <a:solidFill>
-                  <a:srgbClr val="333333"/>
-                </a:solidFill>
-                <a:latin typeface="Segoe UI"/>
-              </a:defRPr>
-            </a:pPr>
-            <a:r>
-              <a:t>   ✅  Nota com justificativa</a:t>
-            </a:r>
-          </a:p>
-          <a:p>
-            <a:pPr>
-              <a:spcAft>
-                <a:spcPts val="960"/>
-              </a:spcAft>
-              <a:defRPr sz="1600" b="0">
-                <a:solidFill>
-                  <a:srgbClr val="333333"/>
-                </a:solidFill>
-                <a:latin typeface="Segoe UI"/>
-              </a:defRPr>
-            </a:pPr>
-            <a:r>
-              <a:t>   ✅  Análise do raciocínio — o que o aluno estava pensando</a:t>
-            </a:r>
-          </a:p>
-          <a:p>
-            <a:pPr>
-              <a:spcAft>
-                <a:spcPts val="960"/>
-              </a:spcAft>
-              <a:defRPr sz="1600" b="0">
-                <a:solidFill>
-                  <a:srgbClr val="333333"/>
-                </a:solidFill>
-                <a:latin typeface="Segoe UI"/>
-              </a:defRPr>
-            </a:pPr>
-            <a:r>
-              <a:t>   ✅  Tipo de erro — conceitual, de execução, de interpretação</a:t>
-            </a:r>
-          </a:p>
-          <a:p>
-            <a:pPr>
-              <a:spcAft>
-                <a:spcPts val="960"/>
-              </a:spcAft>
-              <a:defRPr sz="1600" b="0">
-                <a:solidFill>
-                  <a:srgbClr val="333333"/>
-                </a:solidFill>
-                <a:latin typeface="Segoe UI"/>
-              </a:defRPr>
-            </a:pPr>
-            <a:r>
-              <a:t>   ✅  Potencial demonstrado — o que o aluno quase acertou</a:t>
-            </a:r>
-          </a:p>
-          <a:p>
-            <a:pPr>
-              <a:spcAft>
-                <a:spcPts val="960"/>
-              </a:spcAft>
-              <a:defRPr sz="1600" b="0">
-                <a:solidFill>
-                  <a:srgbClr val="333333"/>
-                </a:solidFill>
-                <a:latin typeface="Segoe UI"/>
-              </a:defRPr>
-            </a:pPr>
-          </a:p>
-          <a:p>
-            <a:pPr>
-              <a:spcAft>
-                <a:spcPts val="960"/>
-              </a:spcAft>
-              <a:defRPr sz="1600" b="1">
-                <a:solidFill>
-                  <a:srgbClr val="0056A0"/>
-                </a:solidFill>
-                <a:latin typeface="Segoe UI"/>
-              </a:defRPr>
-            </a:pPr>
-            <a:r>
-              <a:t>Exemplo real (Cálculo 1, EPGE/FGV):</a:t>
-            </a:r>
-          </a:p>
-          <a:p>
-            <a:pPr>
-              <a:spcAft>
-                <a:spcPts val="960"/>
-              </a:spcAft>
-              <a:defRPr sz="1600" b="0">
-                <a:solidFill>
-                  <a:srgbClr val="333333"/>
-                </a:solidFill>
-                <a:latin typeface="Segoe UI"/>
-              </a:defRPr>
-            </a:pPr>
-          </a:p>
-          <a:p>
-            <a:pPr>
-              <a:spcAft>
-                <a:spcPts val="960"/>
-              </a:spcAft>
-              <a:defRPr sz="1600" b="0">
-                <a:solidFill>
-                  <a:srgbClr val="333333"/>
-                </a:solidFill>
-                <a:latin typeface="Segoe UI"/>
-              </a:defRPr>
-            </a:pPr>
-            <a:r>
-              <a:t>Q1 (0.75/1.5): "Conclusão correta de descontinuidade, mas justificativa</a:t>
-            </a:r>
-          </a:p>
-          <a:p>
-            <a:pPr>
-              <a:spcAft>
-                <a:spcPts val="960"/>
-              </a:spcAft>
-              <a:defRPr sz="1600" b="0">
-                <a:solidFill>
-                  <a:srgbClr val="333333"/>
-                </a:solidFill>
-                <a:latin typeface="Segoe UI"/>
-              </a:defRPr>
-            </a:pPr>
-            <a:r>
-              <a:t>mistura conceitos. Regra da cadeia com erro de consistência."</a:t>
-            </a:r>
-          </a:p>
-          <a:p>
-            <a:pPr>
-              <a:spcAft>
-                <a:spcPts val="960"/>
-              </a:spcAft>
-              <a:defRPr sz="1600" b="0">
-                <a:solidFill>
-                  <a:srgbClr val="333333"/>
-                </a:solidFill>
-                <a:latin typeface="Segoe UI"/>
-              </a:defRPr>
-            </a:pPr>
-          </a:p>
-          <a:p>
-            <a:pPr>
-              <a:spcAft>
-                <a:spcPts val="960"/>
-              </a:spcAft>
-              <a:defRPr sz="1600" b="0">
-                <a:solidFill>
-                  <a:srgbClr val="333333"/>
-                </a:solidFill>
-                <a:latin typeface="Segoe UI"/>
-              </a:defRPr>
-            </a:pPr>
-            <a:r>
-              <a:t>Q5 (0.0/1.0): "Resposta ilegível — sem conteúdo para avaliação."</a:t>
-            </a:r>
-          </a:p>
-          <a:p>
-            <a:pPr>
-              <a:spcAft>
-                <a:spcPts val="960"/>
-              </a:spcAft>
-              <a:defRPr sz="1600" b="0">
-                <a:solidFill>
-                  <a:srgbClr val="1B8A4A"/>
-                </a:solidFill>
-                <a:latin typeface="Segoe UI"/>
-              </a:defRPr>
-            </a:pPr>
-            <a:r>
-              <a:t>↑ A IA identifica ilegibilidade e não inventa uma nota.</a:t>
+            <a:pPr algn="ctr">
+              <a:defRPr sz="4400" b="1">
+                <a:solidFill>
+                  <a:srgbClr val="FFFFFF"/>
+                </a:solidFill>
+                <a:latin typeface="Segoe UI"/>
+              </a:defRPr>
+            </a:pPr>
+            <a:r>
+              <a:t>Pipeline de Correção</a:t>
+            </a:r>
+          </a:p>
+        </p:txBody>
+      </p:sp>
+      <p:sp>
+        <p:nvSpPr>
+          <p:cNvPr id="4" name="TextBox 3"/>
+          <p:cNvSpPr txBox="1"/>
+          <p:nvPr/>
+        </p:nvSpPr>
+        <p:spPr>
+          <a:xfrm>
+            <a:off x="914400" y="3200400"/>
+            <a:ext cx="10058400" cy="914400"/>
+          </a:xfrm>
+          <a:prstGeom prst="rect">
+            <a:avLst/>
+          </a:prstGeom>
+          <a:noFill/>
+        </p:spPr>
+        <p:txBody>
+          <a:bodyPr wrap="square">
+            <a:spAutoFit/>
+          </a:bodyPr>
+          <a:lstStyle/>
+          <a:p>
+            <a:pPr algn="ctr">
+              <a:defRPr sz="2200" b="0">
+                <a:solidFill>
+                  <a:srgbClr val="4A90D9"/>
+                </a:solidFill>
+                <a:latin typeface="Segoe UI"/>
+              </a:defRPr>
+            </a:pPr>
+            <a:r>
+              <a:t>Como a IA processa uma prova em 9 etapas</a:t>
             </a:r>
           </a:p>
         </p:txBody>
@@ -5289,7 +5435,7 @@
               </a:defRPr>
             </a:pPr>
             <a:r>
-              <a:t>Etapas 5-6: Análise e Relatório Final</a:t>
+              <a:t>Pipeline de Correção Automática</a:t>
             </a:r>
           </a:p>
         </p:txBody>
@@ -5337,16 +5483,40 @@
           </a:p>
         </p:txBody>
       </p:sp>
-      <p:sp>
-        <p:nvSpPr>
-          <p:cNvPr id="5" name="TextBox 4"/>
+      <p:pic>
+        <p:nvPicPr>
+          <p:cNvPr id="5" name="Picture 4" descr="04_pipeline_diagram.png"/>
+          <p:cNvPicPr>
+            <a:picLocks noChangeAspect="1"/>
+          </p:cNvPicPr>
+          <p:nvPr/>
+        </p:nvPicPr>
+        <p:blipFill>
+          <a:blip r:embed="rId2"/>
+          <a:stretch>
+            <a:fillRect/>
+          </a:stretch>
+        </p:blipFill>
+        <p:spPr>
+          <a:xfrm>
+            <a:off x="457200" y="1188720"/>
+            <a:ext cx="11247120" cy="7029450"/>
+          </a:xfrm>
+          <a:prstGeom prst="rect">
+            <a:avLst/>
+          </a:prstGeom>
+        </p:spPr>
+      </p:pic>
+      <p:sp>
+        <p:nvSpPr>
+          <p:cNvPr id="6" name="TextBox 5"/>
           <p:cNvSpPr txBox="1"/>
           <p:nvPr/>
         </p:nvSpPr>
         <p:spPr>
           <a:xfrm>
-            <a:off x="731520" y="1188720"/>
-            <a:ext cx="10515600" cy="5029200"/>
+            <a:off x="731520" y="5303520"/>
+            <a:ext cx="10058400" cy="1097280"/>
           </a:xfrm>
           <a:prstGeom prst="rect">
             <a:avLst/>
@@ -5359,205 +5529,20 @@
           </a:bodyPr>
           <a:lstStyle/>
           <a:p>
-            <a:pPr>
-              <a:spcAft>
-                <a:spcPts val="960"/>
-              </a:spcAft>
-              <a:defRPr sz="1600" b="1">
-                <a:solidFill>
-                  <a:srgbClr val="0056A0"/>
-                </a:solidFill>
-                <a:latin typeface="Segoe UI"/>
-              </a:defRPr>
-            </a:pPr>
-            <a:r>
-              <a:t>📊  Etapa 5 — Análise de Habilidades</a:t>
-            </a:r>
-          </a:p>
-          <a:p>
-            <a:pPr>
-              <a:spcAft>
-                <a:spcPts val="960"/>
-              </a:spcAft>
-              <a:defRPr sz="1600" b="0">
-                <a:solidFill>
-                  <a:srgbClr val="333333"/>
-                </a:solidFill>
-                <a:latin typeface="Segoe UI"/>
-              </a:defRPr>
-            </a:pPr>
-            <a:r>
-              <a:t>   Perfil de habilidades demonstradas vs. esperadas</a:t>
-            </a:r>
-          </a:p>
-          <a:p>
-            <a:pPr>
-              <a:spcAft>
-                <a:spcPts val="960"/>
-              </a:spcAft>
-              <a:defRPr sz="1600" b="0">
-                <a:solidFill>
-                  <a:srgbClr val="333333"/>
-                </a:solidFill>
-                <a:latin typeface="Segoe UI"/>
-              </a:defRPr>
-            </a:pPr>
-            <a:r>
-              <a:t>   Consistência de erros entre questões</a:t>
-            </a:r>
-          </a:p>
-          <a:p>
-            <a:pPr>
-              <a:spcAft>
-                <a:spcPts val="960"/>
-              </a:spcAft>
-              <a:defRPr sz="1600" b="0">
-                <a:solidFill>
-                  <a:srgbClr val="333333"/>
-                </a:solidFill>
-                <a:latin typeface="Segoe UI"/>
-              </a:defRPr>
-            </a:pPr>
-            <a:r>
-              <a:t>   Síntese pedagógica: pontos fortes e áreas de melhoria</a:t>
-            </a:r>
-          </a:p>
-          <a:p>
-            <a:pPr>
-              <a:spcAft>
-                <a:spcPts val="960"/>
-              </a:spcAft>
-              <a:defRPr sz="1600" b="0">
-                <a:solidFill>
-                  <a:srgbClr val="333333"/>
-                </a:solidFill>
-                <a:latin typeface="Segoe UI"/>
-              </a:defRPr>
-            </a:pPr>
-          </a:p>
-          <a:p>
-            <a:pPr>
-              <a:spcAft>
-                <a:spcPts val="960"/>
-              </a:spcAft>
-              <a:defRPr sz="1600" b="1">
-                <a:solidFill>
-                  <a:srgbClr val="0056A0"/>
-                </a:solidFill>
-                <a:latin typeface="Segoe UI"/>
-              </a:defRPr>
-            </a:pPr>
-            <a:r>
-              <a:t>📄  Etapa 6 — Relatório Final</a:t>
-            </a:r>
-          </a:p>
-          <a:p>
-            <a:pPr>
-              <a:spcAft>
-                <a:spcPts val="960"/>
-              </a:spcAft>
-              <a:defRPr sz="1600" b="0">
-                <a:solidFill>
-                  <a:srgbClr val="333333"/>
-                </a:solidFill>
-                <a:latin typeface="Segoe UI"/>
-              </a:defRPr>
-            </a:pPr>
-            <a:r>
-              <a:t>   Narrativa holística que combina nota, habilidades e análise:</a:t>
-            </a:r>
-          </a:p>
-          <a:p>
-            <a:pPr>
-              <a:spcAft>
-                <a:spcPts val="960"/>
-              </a:spcAft>
-              <a:defRPr sz="1600" b="0">
-                <a:solidFill>
-                  <a:srgbClr val="333333"/>
-                </a:solidFill>
-                <a:latin typeface="Segoe UI"/>
-              </a:defRPr>
-            </a:pPr>
-            <a:r>
-              <a:t>      1.  Visão geral do desempenho</a:t>
-            </a:r>
-          </a:p>
-          <a:p>
-            <a:pPr>
-              <a:spcAft>
-                <a:spcPts val="960"/>
-              </a:spcAft>
-              <a:defRPr sz="1600" b="0">
-                <a:solidFill>
-                  <a:srgbClr val="333333"/>
-                </a:solidFill>
-                <a:latin typeface="Segoe UI"/>
-              </a:defRPr>
-            </a:pPr>
-            <a:r>
-              <a:t>      2.  Análise detalhada por questão</a:t>
-            </a:r>
-          </a:p>
-          <a:p>
-            <a:pPr>
-              <a:spcAft>
-                <a:spcPts val="960"/>
-              </a:spcAft>
-              <a:defRPr sz="1600" b="0">
-                <a:solidFill>
-                  <a:srgbClr val="333333"/>
-                </a:solidFill>
-                <a:latin typeface="Segoe UI"/>
-              </a:defRPr>
-            </a:pPr>
-            <a:r>
-              <a:t>      3.  Pontos fortes e áreas de melhoria</a:t>
-            </a:r>
-          </a:p>
-          <a:p>
-            <a:pPr>
-              <a:spcAft>
-                <a:spcPts val="960"/>
-              </a:spcAft>
-              <a:defRPr sz="1600" b="0">
-                <a:solidFill>
-                  <a:srgbClr val="333333"/>
-                </a:solidFill>
-                <a:latin typeface="Segoe UI"/>
-              </a:defRPr>
-            </a:pPr>
-            <a:r>
-              <a:t>      4.  Recomendações específicas para o aluno</a:t>
-            </a:r>
-          </a:p>
-          <a:p>
-            <a:pPr>
-              <a:spcAft>
-                <a:spcPts val="960"/>
-              </a:spcAft>
-              <a:defRPr sz="1600" b="0">
-                <a:solidFill>
-                  <a:srgbClr val="333333"/>
-                </a:solidFill>
-                <a:latin typeface="Segoe UI"/>
-              </a:defRPr>
-            </a:pPr>
-          </a:p>
-          <a:p>
-            <a:pPr>
-              <a:spcAft>
-                <a:spcPts val="960"/>
-              </a:spcAft>
-              <a:defRPr sz="1600" b="1">
-                <a:solidFill>
-                  <a:srgbClr val="0056A0"/>
-                </a:solidFill>
-                <a:latin typeface="Segoe UI"/>
-              </a:defRPr>
-            </a:pPr>
-            <a:r>
-              <a:t>"Um relatório que posso mostrar ao aluno e aos pais."</a:t>
+            <a:pPr algn="ctr">
+              <a:defRPr sz="1600" b="0">
+                <a:solidFill>
+                  <a:srgbClr val="666666"/>
+                </a:solidFill>
+                <a:latin typeface="Segoe UI"/>
+              </a:defRPr>
+            </a:pPr>
+            <a:r>
+              <a:t>A IA processa os documentos em 6 etapas sequenciais.</a:t>
+            </a:r>
+            <a:br/>
+            <a:r>
+              <a:t>Cada etapa gera um documento que o professor pode visualizar, editar e revisar.</a:t>
             </a:r>
           </a:p>
         </p:txBody>
@@ -5662,7 +5647,7 @@
               </a:defRPr>
             </a:pPr>
             <a:r>
-              <a:t>Etapas 7-9: Relatórios de Desempenho</a:t>
+              <a:t>Etapas 1-3: Extração de Documentos</a:t>
             </a:r>
           </a:p>
         </p:txBody>
@@ -5736,15 +5721,76 @@
               <a:spcAft>
                 <a:spcPts val="960"/>
               </a:spcAft>
+              <a:defRPr sz="1600" b="0">
+                <a:solidFill>
+                  <a:srgbClr val="666666"/>
+                </a:solidFill>
+                <a:latin typeface="Segoe UI"/>
+              </a:defRPr>
+            </a:pPr>
+            <a:r>
+              <a:t>Antes de corrigir, a IA precisa entender os documentos.</a:t>
+            </a:r>
+          </a:p>
+          <a:p>
+            <a:pPr>
+              <a:spcAft>
+                <a:spcPts val="960"/>
+              </a:spcAft>
+              <a:defRPr sz="1600" b="0">
+                <a:solidFill>
+                  <a:srgbClr val="333333"/>
+                </a:solidFill>
+                <a:latin typeface="Segoe UI"/>
+              </a:defRPr>
+            </a:pPr>
+          </a:p>
+          <a:p>
+            <a:pPr>
+              <a:spcAft>
+                <a:spcPts val="960"/>
+              </a:spcAft>
               <a:defRPr sz="1600" b="1">
                 <a:solidFill>
-                  <a:srgbClr val="002B5C"/>
-                </a:solidFill>
-                <a:latin typeface="Segoe UI"/>
-              </a:defRPr>
-            </a:pPr>
-            <a:r>
-              <a:t>De uma prova para o currículo inteiro:</a:t>
+                  <a:srgbClr val="0056A0"/>
+                </a:solidFill>
+                <a:latin typeface="Segoe UI"/>
+              </a:defRPr>
+            </a:pPr>
+            <a:r>
+              <a:t>🔎  Etapa 1 — Extração de Questões</a:t>
+            </a:r>
+          </a:p>
+          <a:p>
+            <a:pPr>
+              <a:spcAft>
+                <a:spcPts val="960"/>
+              </a:spcAft>
+              <a:defRPr sz="1600" b="0">
+                <a:solidFill>
+                  <a:srgbClr val="333333"/>
+                </a:solidFill>
+                <a:latin typeface="Segoe UI"/>
+              </a:defRPr>
+            </a:pPr>
+            <a:r>
+              <a:t>   Lê o enunciado, identifica cada questão e classifica por</a:t>
+            </a:r>
+          </a:p>
+          <a:p>
+            <a:pPr>
+              <a:spcAft>
+                <a:spcPts val="960"/>
+              </a:spcAft>
+              <a:defRPr sz="1600" b="0">
+                <a:solidFill>
+                  <a:srgbClr val="333333"/>
+                </a:solidFill>
+                <a:latin typeface="Segoe UI"/>
+              </a:defRPr>
+            </a:pPr>
+            <a:r>
+              <a:t>   tipo de raciocínio: recuperação, compreensão, aplicação, análise, síntese.</a:t>
             </a:r>
           </a:p>
           <a:p>
@@ -5773,39 +5819,39 @@
               </a:defRPr>
             </a:pPr>
             <a:r>
-              <a:t>📋  Desempenho por Tarefa (Atividade)</a:t>
-            </a:r>
-          </a:p>
-          <a:p>
-            <a:pPr>
-              <a:spcAft>
-                <a:spcPts val="960"/>
-              </a:spcAft>
-              <a:defRPr sz="1600" b="0">
-                <a:solidFill>
-                  <a:srgbClr val="333333"/>
-                </a:solidFill>
-                <a:latin typeface="Segoe UI"/>
-              </a:defRPr>
-            </a:pPr>
-            <a:r>
-              <a:t>   Como a turma se saiu nesta prova específica.</a:t>
-            </a:r>
-          </a:p>
-          <a:p>
-            <a:pPr>
-              <a:spcAft>
-                <a:spcPts val="960"/>
-              </a:spcAft>
-              <a:defRPr sz="1600" b="0">
-                <a:solidFill>
-                  <a:srgbClr val="333333"/>
-                </a:solidFill>
-                <a:latin typeface="Segoe UI"/>
-              </a:defRPr>
-            </a:pPr>
-            <a:r>
-              <a:t>   Padrões de acerto/erro por questão com exemplos de alunos.</a:t>
+              <a:t>🧩  Etapa 2 — Extração de Gabarito</a:t>
+            </a:r>
+          </a:p>
+          <a:p>
+            <a:pPr>
+              <a:spcAft>
+                <a:spcPts val="960"/>
+              </a:spcAft>
+              <a:defRPr sz="1600" b="0">
+                <a:solidFill>
+                  <a:srgbClr val="333333"/>
+                </a:solidFill>
+                <a:latin typeface="Segoe UI"/>
+              </a:defRPr>
+            </a:pPr>
+            <a:r>
+              <a:t>   Estrutura as respostas corretas, associa critérios de pontuação,</a:t>
+            </a:r>
+          </a:p>
+          <a:p>
+            <a:pPr>
+              <a:spcAft>
+                <a:spcPts val="960"/>
+              </a:spcAft>
+              <a:defRPr sz="1600" b="0">
+                <a:solidFill>
+                  <a:srgbClr val="333333"/>
+                </a:solidFill>
+                <a:latin typeface="Segoe UI"/>
+              </a:defRPr>
+            </a:pPr>
+            <a:r>
+              <a:t>   identifica respostas alternativas válidas.</a:t>
             </a:r>
           </a:p>
           <a:p>
@@ -5834,100 +5880,39 @@
               </a:defRPr>
             </a:pPr>
             <a:r>
-              <a:t>👥  Desempenho por Turma</a:t>
-            </a:r>
-          </a:p>
-          <a:p>
-            <a:pPr>
-              <a:spcAft>
-                <a:spcPts val="960"/>
-              </a:spcAft>
-              <a:defRPr sz="1600" b="0">
-                <a:solidFill>
-                  <a:srgbClr val="333333"/>
-                </a:solidFill>
-                <a:latin typeface="Segoe UI"/>
-              </a:defRPr>
-            </a:pPr>
-            <a:r>
-              <a:t>   Evolução ao longo do semestre. Erros persistentes.</a:t>
-            </a:r>
-          </a:p>
-          <a:p>
-            <a:pPr>
-              <a:spcAft>
-                <a:spcPts val="960"/>
-              </a:spcAft>
-              <a:defRPr sz="1600" b="0">
-                <a:solidFill>
-                  <a:srgbClr val="333333"/>
-                </a:solidFill>
-                <a:latin typeface="Segoe UI"/>
-              </a:defRPr>
-            </a:pPr>
-            <a:r>
-              <a:t>   Perfil coletivo: quem melhorou, quem está ficando para trás.</a:t>
-            </a:r>
-          </a:p>
-          <a:p>
-            <a:pPr>
-              <a:spcAft>
-                <a:spcPts val="960"/>
-              </a:spcAft>
-              <a:defRPr sz="1600" b="0">
-                <a:solidFill>
-                  <a:srgbClr val="333333"/>
-                </a:solidFill>
-                <a:latin typeface="Segoe UI"/>
-              </a:defRPr>
-            </a:pPr>
-          </a:p>
-          <a:p>
-            <a:pPr>
-              <a:spcAft>
-                <a:spcPts val="960"/>
-              </a:spcAft>
-              <a:defRPr sz="1600" b="1">
-                <a:solidFill>
-                  <a:srgbClr val="0056A0"/>
-                </a:solidFill>
-                <a:latin typeface="Segoe UI"/>
-              </a:defRPr>
-            </a:pPr>
-            <a:r>
-              <a:t>📚  Desempenho por Matéria</a:t>
-            </a:r>
-          </a:p>
-          <a:p>
-            <a:pPr>
-              <a:spcAft>
-                <a:spcPts val="960"/>
-              </a:spcAft>
-              <a:defRPr sz="1600" b="0">
-                <a:solidFill>
-                  <a:srgbClr val="333333"/>
-                </a:solidFill>
-                <a:latin typeface="Segoe UI"/>
-              </a:defRPr>
-            </a:pPr>
-            <a:r>
-              <a:t>   Comparação entre turmas. Eficácia do currículo.</a:t>
-            </a:r>
-          </a:p>
-          <a:p>
-            <a:pPr>
-              <a:spcAft>
-                <a:spcPts val="960"/>
-              </a:spcAft>
-              <a:defRPr sz="1600" b="0">
-                <a:solidFill>
-                  <a:srgbClr val="333333"/>
-                </a:solidFill>
-                <a:latin typeface="Segoe UI"/>
-              </a:defRPr>
-            </a:pPr>
-            <a:r>
-              <a:t>   Recomendações para ajuste pedagógico.</a:t>
+              <a:t>📝  Etapa 3 — Extração de Respostas</a:t>
+            </a:r>
+          </a:p>
+          <a:p>
+            <a:pPr>
+              <a:spcAft>
+                <a:spcPts val="960"/>
+              </a:spcAft>
+              <a:defRPr sz="1600" b="0">
+                <a:solidFill>
+                  <a:srgbClr val="333333"/>
+                </a:solidFill>
+                <a:latin typeface="Segoe UI"/>
+              </a:defRPr>
+            </a:pPr>
+            <a:r>
+              <a:t>   Lê o que o aluno escreveu. Lida com caligrafia,</a:t>
+            </a:r>
+          </a:p>
+          <a:p>
+            <a:pPr>
+              <a:spcAft>
+                <a:spcPts val="960"/>
+              </a:spcAft>
+              <a:defRPr sz="1600" b="0">
+                <a:solidFill>
+                  <a:srgbClr val="333333"/>
+                </a:solidFill>
+                <a:latin typeface="Segoe UI"/>
+              </a:defRPr>
+            </a:pPr>
+            <a:r>
+              <a:t>   formatos variados e respostas parciais.</a:t>
             </a:r>
           </a:p>
         </p:txBody>
@@ -5946,7 +5931,7 @@
     <p:bg>
       <p:bgPr>
         <a:solidFill>
-          <a:srgbClr val="002B5C"/>
+          <a:srgbClr val="FFFFFF"/>
         </a:solidFill>
         <a:effectLst/>
       </p:bgPr>
@@ -5966,8 +5951,87 @@
         </p:nvSpPr>
         <p:spPr>
           <a:xfrm>
-            <a:off x="0" y="2926080"/>
-            <a:ext cx="12191695" cy="54864"/>
+            <a:off x="0" y="0"/>
+            <a:ext cx="12191695" cy="73152"/>
+          </a:xfrm>
+          <a:prstGeom prst="rect">
+            <a:avLst/>
+          </a:prstGeom>
+          <a:solidFill>
+            <a:srgbClr val="0056A0"/>
+          </a:solidFill>
+          <a:ln>
+            <a:noFill/>
+          </a:ln>
+        </p:spPr>
+        <p:style>
+          <a:lnRef idx="1">
+            <a:schemeClr val="accent1"/>
+          </a:lnRef>
+          <a:fillRef idx="3">
+            <a:schemeClr val="accent1"/>
+          </a:fillRef>
+          <a:effectRef idx="2">
+            <a:schemeClr val="accent1"/>
+          </a:effectRef>
+          <a:fontRef idx="minor">
+            <a:schemeClr val="lt1"/>
+          </a:fontRef>
+        </p:style>
+        <p:txBody>
+          <a:bodyPr rtlCol="0" anchor="ctr"/>
+          <a:lstStyle/>
+          <a:p>
+            <a:pPr algn="ctr"/>
+          </a:p>
+        </p:txBody>
+      </p:sp>
+      <p:sp>
+        <p:nvSpPr>
+          <p:cNvPr id="3" name="TextBox 2"/>
+          <p:cNvSpPr txBox="1"/>
+          <p:nvPr/>
+        </p:nvSpPr>
+        <p:spPr>
+          <a:xfrm>
+            <a:off x="731520" y="274320"/>
+            <a:ext cx="10058400" cy="731520"/>
+          </a:xfrm>
+          <a:prstGeom prst="rect">
+            <a:avLst/>
+          </a:prstGeom>
+          <a:noFill/>
+        </p:spPr>
+        <p:txBody>
+          <a:bodyPr wrap="square">
+            <a:spAutoFit/>
+          </a:bodyPr>
+          <a:lstStyle/>
+          <a:p>
+            <a:pPr algn="l">
+              <a:defRPr sz="3000" b="1">
+                <a:solidFill>
+                  <a:srgbClr val="002B5C"/>
+                </a:solidFill>
+                <a:latin typeface="Segoe UI"/>
+              </a:defRPr>
+            </a:pPr>
+            <a:r>
+              <a:t>Etapa 4: Correção Narrativa</a:t>
+            </a:r>
+          </a:p>
+        </p:txBody>
+      </p:sp>
+      <p:sp>
+        <p:nvSpPr>
+          <p:cNvPr id="4" name="Rectangle 3"/>
+          <p:cNvSpPr/>
+          <p:nvPr/>
+        </p:nvSpPr>
+        <p:spPr>
+          <a:xfrm>
+            <a:off x="731520" y="960120"/>
+            <a:ext cx="2743200" cy="36576"/>
           </a:xfrm>
           <a:prstGeom prst="rect">
             <a:avLst/>
@@ -6003,14 +6067,14 @@
       </p:sp>
       <p:sp>
         <p:nvSpPr>
-          <p:cNvPr id="3" name="TextBox 2"/>
+          <p:cNvPr id="5" name="TextBox 4"/>
           <p:cNvSpPr txBox="1"/>
           <p:nvPr/>
         </p:nvSpPr>
         <p:spPr>
           <a:xfrm>
-            <a:off x="914400" y="1828800"/>
-            <a:ext cx="10058400" cy="1097280"/>
+            <a:off x="731520" y="1188720"/>
+            <a:ext cx="10515600" cy="5029200"/>
           </a:xfrm>
           <a:prstGeom prst="rect">
             <a:avLst/>
@@ -6023,52 +6087,231 @@
           </a:bodyPr>
           <a:lstStyle/>
           <a:p>
-            <a:pPr algn="ctr">
-              <a:defRPr sz="4400" b="1">
-                <a:solidFill>
-                  <a:srgbClr val="FFFFFF"/>
-                </a:solidFill>
-                <a:latin typeface="Segoe UI"/>
-              </a:defRPr>
-            </a:pPr>
-            <a:r>
-              <a:t>Relatórios Reais</a:t>
-            </a:r>
-          </a:p>
-        </p:txBody>
-      </p:sp>
-      <p:sp>
-        <p:nvSpPr>
-          <p:cNvPr id="4" name="TextBox 3"/>
-          <p:cNvSpPr txBox="1"/>
-          <p:nvPr/>
-        </p:nvSpPr>
-        <p:spPr>
-          <a:xfrm>
-            <a:off x="914400" y="3200400"/>
-            <a:ext cx="10058400" cy="914400"/>
-          </a:xfrm>
-          <a:prstGeom prst="rect">
-            <a:avLst/>
-          </a:prstGeom>
-          <a:noFill/>
-        </p:spPr>
-        <p:txBody>
-          <a:bodyPr wrap="square">
-            <a:spAutoFit/>
-          </a:bodyPr>
-          <a:lstStyle/>
-          <a:p>
-            <a:pPr algn="ctr">
-              <a:defRPr sz="2200" b="0">
-                <a:solidFill>
-                  <a:srgbClr val="4A90D9"/>
-                </a:solidFill>
-                <a:latin typeface="Segoe UI"/>
-              </a:defRPr>
-            </a:pPr>
-            <a:r>
-              <a:t>Gerados automaticamente a partir de provas da EPGE/FGV</a:t>
+            <a:pPr>
+              <a:spcAft>
+                <a:spcPts val="960"/>
+              </a:spcAft>
+              <a:defRPr sz="1600" b="1">
+                <a:solidFill>
+                  <a:srgbClr val="002B5C"/>
+                </a:solidFill>
+                <a:latin typeface="Segoe UI"/>
+              </a:defRPr>
+            </a:pPr>
+            <a:r>
+              <a:t>Não é um simples "certo ou errado".</a:t>
+            </a:r>
+          </a:p>
+          <a:p>
+            <a:pPr>
+              <a:spcAft>
+                <a:spcPts val="960"/>
+              </a:spcAft>
+              <a:defRPr sz="1600" b="0">
+                <a:solidFill>
+                  <a:srgbClr val="666666"/>
+                </a:solidFill>
+                <a:latin typeface="Segoe UI"/>
+              </a:defRPr>
+            </a:pPr>
+            <a:r>
+              <a:t>Para cada questão, a correção inclui:</a:t>
+            </a:r>
+          </a:p>
+          <a:p>
+            <a:pPr>
+              <a:spcAft>
+                <a:spcPts val="960"/>
+              </a:spcAft>
+              <a:defRPr sz="1600" b="0">
+                <a:solidFill>
+                  <a:srgbClr val="333333"/>
+                </a:solidFill>
+                <a:latin typeface="Segoe UI"/>
+              </a:defRPr>
+            </a:pPr>
+          </a:p>
+          <a:p>
+            <a:pPr>
+              <a:spcAft>
+                <a:spcPts val="960"/>
+              </a:spcAft>
+              <a:defRPr sz="1600" b="0">
+                <a:solidFill>
+                  <a:srgbClr val="333333"/>
+                </a:solidFill>
+                <a:latin typeface="Segoe UI"/>
+              </a:defRPr>
+            </a:pPr>
+            <a:r>
+              <a:t>   ✅  Nota com justificativa</a:t>
+            </a:r>
+          </a:p>
+          <a:p>
+            <a:pPr>
+              <a:spcAft>
+                <a:spcPts val="960"/>
+              </a:spcAft>
+              <a:defRPr sz="1600" b="0">
+                <a:solidFill>
+                  <a:srgbClr val="333333"/>
+                </a:solidFill>
+                <a:latin typeface="Segoe UI"/>
+              </a:defRPr>
+            </a:pPr>
+            <a:r>
+              <a:t>   ✅  Análise do raciocínio — o que o aluno estava pensando</a:t>
+            </a:r>
+          </a:p>
+          <a:p>
+            <a:pPr>
+              <a:spcAft>
+                <a:spcPts val="960"/>
+              </a:spcAft>
+              <a:defRPr sz="1600" b="0">
+                <a:solidFill>
+                  <a:srgbClr val="333333"/>
+                </a:solidFill>
+                <a:latin typeface="Segoe UI"/>
+              </a:defRPr>
+            </a:pPr>
+            <a:r>
+              <a:t>   ✅  Tipo de erro — conceitual, de execução, de interpretação</a:t>
+            </a:r>
+          </a:p>
+          <a:p>
+            <a:pPr>
+              <a:spcAft>
+                <a:spcPts val="960"/>
+              </a:spcAft>
+              <a:defRPr sz="1600" b="0">
+                <a:solidFill>
+                  <a:srgbClr val="333333"/>
+                </a:solidFill>
+                <a:latin typeface="Segoe UI"/>
+              </a:defRPr>
+            </a:pPr>
+            <a:r>
+              <a:t>   ✅  Potencial demonstrado — o que o aluno quase acertou</a:t>
+            </a:r>
+          </a:p>
+          <a:p>
+            <a:pPr>
+              <a:spcAft>
+                <a:spcPts val="960"/>
+              </a:spcAft>
+              <a:defRPr sz="1600" b="0">
+                <a:solidFill>
+                  <a:srgbClr val="333333"/>
+                </a:solidFill>
+                <a:latin typeface="Segoe UI"/>
+              </a:defRPr>
+            </a:pPr>
+          </a:p>
+          <a:p>
+            <a:pPr>
+              <a:spcAft>
+                <a:spcPts val="960"/>
+              </a:spcAft>
+              <a:defRPr sz="1600" b="1">
+                <a:solidFill>
+                  <a:srgbClr val="0056A0"/>
+                </a:solidFill>
+                <a:latin typeface="Segoe UI"/>
+              </a:defRPr>
+            </a:pPr>
+            <a:r>
+              <a:t>Exemplo real (Cálculo 1, EPGE/FGV):</a:t>
+            </a:r>
+          </a:p>
+          <a:p>
+            <a:pPr>
+              <a:spcAft>
+                <a:spcPts val="960"/>
+              </a:spcAft>
+              <a:defRPr sz="1600" b="0">
+                <a:solidFill>
+                  <a:srgbClr val="333333"/>
+                </a:solidFill>
+                <a:latin typeface="Segoe UI"/>
+              </a:defRPr>
+            </a:pPr>
+          </a:p>
+          <a:p>
+            <a:pPr>
+              <a:spcAft>
+                <a:spcPts val="960"/>
+              </a:spcAft>
+              <a:defRPr sz="1600" b="0">
+                <a:solidFill>
+                  <a:srgbClr val="333333"/>
+                </a:solidFill>
+                <a:latin typeface="Segoe UI"/>
+              </a:defRPr>
+            </a:pPr>
+            <a:r>
+              <a:t>Q1 (0.75/1.5): "Conclusão correta de descontinuidade, mas justificativa</a:t>
+            </a:r>
+          </a:p>
+          <a:p>
+            <a:pPr>
+              <a:spcAft>
+                <a:spcPts val="960"/>
+              </a:spcAft>
+              <a:defRPr sz="1600" b="0">
+                <a:solidFill>
+                  <a:srgbClr val="333333"/>
+                </a:solidFill>
+                <a:latin typeface="Segoe UI"/>
+              </a:defRPr>
+            </a:pPr>
+            <a:r>
+              <a:t>mistura conceitos. Regra da cadeia com erro de consistência."</a:t>
+            </a:r>
+          </a:p>
+          <a:p>
+            <a:pPr>
+              <a:spcAft>
+                <a:spcPts val="960"/>
+              </a:spcAft>
+              <a:defRPr sz="1600" b="0">
+                <a:solidFill>
+                  <a:srgbClr val="333333"/>
+                </a:solidFill>
+                <a:latin typeface="Segoe UI"/>
+              </a:defRPr>
+            </a:pPr>
+          </a:p>
+          <a:p>
+            <a:pPr>
+              <a:spcAft>
+                <a:spcPts val="960"/>
+              </a:spcAft>
+              <a:defRPr sz="1600" b="0">
+                <a:solidFill>
+                  <a:srgbClr val="333333"/>
+                </a:solidFill>
+                <a:latin typeface="Segoe UI"/>
+              </a:defRPr>
+            </a:pPr>
+            <a:r>
+              <a:t>Q5 (0.0/1.0): "Resposta ilegível — sem conteúdo para avaliação."</a:t>
+            </a:r>
+          </a:p>
+          <a:p>
+            <a:pPr>
+              <a:spcAft>
+                <a:spcPts val="960"/>
+              </a:spcAft>
+              <a:defRPr sz="1600" b="0">
+                <a:solidFill>
+                  <a:srgbClr val="1B8A4A"/>
+                </a:solidFill>
+                <a:latin typeface="Segoe UI"/>
+              </a:defRPr>
+            </a:pPr>
+            <a:r>
+              <a:t>↑ A IA identifica ilegibilidade e não inventa uma nota.</a:t>
             </a:r>
           </a:p>
         </p:txBody>
@@ -6173,7 +6416,7 @@
               </a:defRPr>
             </a:pPr>
             <a:r>
-              <a:t>Estes Não São Mockups</a:t>
+              <a:t>Etapas 5-6: Análise e Relatório Final</a:t>
             </a:r>
           </a:p>
         </p:txBody>
@@ -6230,7 +6473,7 @@
         <p:spPr>
           <a:xfrm>
             <a:off x="731520" y="1188720"/>
-            <a:ext cx="5029200" cy="5029200"/>
+            <a:ext cx="10515600" cy="5029200"/>
           </a:xfrm>
           <a:prstGeom prst="rect">
             <a:avLst/>
@@ -6249,14 +6492,75 @@
               </a:spcAft>
               <a:defRPr sz="1600" b="1">
                 <a:solidFill>
-                  <a:srgbClr val="002B5C"/>
-                </a:solidFill>
-                <a:latin typeface="Segoe UI"/>
-              </a:defRPr>
-            </a:pPr>
-            <a:r>
-              <a:t>Tudo que você vai ver foi gerado automaticamente</a:t>
-            </a:r>
+                  <a:srgbClr val="0056A0"/>
+                </a:solidFill>
+                <a:latin typeface="Segoe UI"/>
+              </a:defRPr>
+            </a:pPr>
+            <a:r>
+              <a:t>📊  Etapa 5 — Análise de Habilidades</a:t>
+            </a:r>
+          </a:p>
+          <a:p>
+            <a:pPr>
+              <a:spcAft>
+                <a:spcPts val="960"/>
+              </a:spcAft>
+              <a:defRPr sz="1600" b="0">
+                <a:solidFill>
+                  <a:srgbClr val="333333"/>
+                </a:solidFill>
+                <a:latin typeface="Segoe UI"/>
+              </a:defRPr>
+            </a:pPr>
+            <a:r>
+              <a:t>   Perfil de habilidades demonstradas vs. esperadas</a:t>
+            </a:r>
+          </a:p>
+          <a:p>
+            <a:pPr>
+              <a:spcAft>
+                <a:spcPts val="960"/>
+              </a:spcAft>
+              <a:defRPr sz="1600" b="0">
+                <a:solidFill>
+                  <a:srgbClr val="333333"/>
+                </a:solidFill>
+                <a:latin typeface="Segoe UI"/>
+              </a:defRPr>
+            </a:pPr>
+            <a:r>
+              <a:t>   Consistência de erros entre questões</a:t>
+            </a:r>
+          </a:p>
+          <a:p>
+            <a:pPr>
+              <a:spcAft>
+                <a:spcPts val="960"/>
+              </a:spcAft>
+              <a:defRPr sz="1600" b="0">
+                <a:solidFill>
+                  <a:srgbClr val="333333"/>
+                </a:solidFill>
+                <a:latin typeface="Segoe UI"/>
+              </a:defRPr>
+            </a:pPr>
+            <a:r>
+              <a:t>   Síntese pedagógica: pontos fortes e áreas de melhoria</a:t>
+            </a:r>
+          </a:p>
+          <a:p>
+            <a:pPr>
+              <a:spcAft>
+                <a:spcPts val="960"/>
+              </a:spcAft>
+              <a:defRPr sz="1600" b="0">
+                <a:solidFill>
+                  <a:srgbClr val="333333"/>
+                </a:solidFill>
+                <a:latin typeface="Segoe UI"/>
+              </a:defRPr>
+            </a:pPr>
           </a:p>
           <a:p>
             <a:pPr>
@@ -6265,58 +6569,93 @@
               </a:spcAft>
               <a:defRPr sz="1600" b="1">
                 <a:solidFill>
-                  <a:srgbClr val="002B5C"/>
-                </a:solidFill>
-                <a:latin typeface="Segoe UI"/>
-              </a:defRPr>
-            </a:pPr>
-            <a:r>
-              <a:t>pelo NOVO CR a partir de provas reais.</a:t>
-            </a:r>
-          </a:p>
-          <a:p>
-            <a:pPr>
-              <a:spcAft>
-                <a:spcPts val="960"/>
-              </a:spcAft>
-              <a:defRPr sz="1600" b="0">
-                <a:solidFill>
-                  <a:srgbClr val="333333"/>
-                </a:solidFill>
-                <a:latin typeface="Segoe UI"/>
-              </a:defRPr>
-            </a:pPr>
-          </a:p>
-          <a:p>
-            <a:pPr>
-              <a:spcAft>
-                <a:spcPts val="960"/>
-              </a:spcAft>
-              <a:defRPr sz="1600" b="0">
-                <a:solidFill>
-                  <a:srgbClr val="333333"/>
-                </a:solidFill>
-                <a:latin typeface="Segoe UI"/>
-              </a:defRPr>
-            </a:pPr>
-            <a:r>
-              <a:t>Dados: Cálculo 1, EPGE/FGV, turma 2021.</a:t>
-            </a:r>
-          </a:p>
-          <a:p>
-            <a:pPr>
-              <a:spcAft>
-                <a:spcPts val="960"/>
-              </a:spcAft>
-              <a:defRPr sz="1600" b="0">
-                <a:solidFill>
-                  <a:srgbClr val="333333"/>
-                </a:solidFill>
-                <a:latin typeface="Segoe UI"/>
-              </a:defRPr>
-            </a:pPr>
-            <a:r>
-              <a:t>Baixados diretamente do sistema em produção.</a:t>
+                  <a:srgbClr val="0056A0"/>
+                </a:solidFill>
+                <a:latin typeface="Segoe UI"/>
+              </a:defRPr>
+            </a:pPr>
+            <a:r>
+              <a:t>📄  Etapa 6 — Relatório Final</a:t>
+            </a:r>
+          </a:p>
+          <a:p>
+            <a:pPr>
+              <a:spcAft>
+                <a:spcPts val="960"/>
+              </a:spcAft>
+              <a:defRPr sz="1600" b="0">
+                <a:solidFill>
+                  <a:srgbClr val="333333"/>
+                </a:solidFill>
+                <a:latin typeface="Segoe UI"/>
+              </a:defRPr>
+            </a:pPr>
+            <a:r>
+              <a:t>   Narrativa holística que combina nota, habilidades e análise:</a:t>
+            </a:r>
+          </a:p>
+          <a:p>
+            <a:pPr>
+              <a:spcAft>
+                <a:spcPts val="960"/>
+              </a:spcAft>
+              <a:defRPr sz="1600" b="0">
+                <a:solidFill>
+                  <a:srgbClr val="333333"/>
+                </a:solidFill>
+                <a:latin typeface="Segoe UI"/>
+              </a:defRPr>
+            </a:pPr>
+            <a:r>
+              <a:t>      1.  Visão geral do desempenho</a:t>
+            </a:r>
+          </a:p>
+          <a:p>
+            <a:pPr>
+              <a:spcAft>
+                <a:spcPts val="960"/>
+              </a:spcAft>
+              <a:defRPr sz="1600" b="0">
+                <a:solidFill>
+                  <a:srgbClr val="333333"/>
+                </a:solidFill>
+                <a:latin typeface="Segoe UI"/>
+              </a:defRPr>
+            </a:pPr>
+            <a:r>
+              <a:t>      2.  Análise detalhada por questão</a:t>
+            </a:r>
+          </a:p>
+          <a:p>
+            <a:pPr>
+              <a:spcAft>
+                <a:spcPts val="960"/>
+              </a:spcAft>
+              <a:defRPr sz="1600" b="0">
+                <a:solidFill>
+                  <a:srgbClr val="333333"/>
+                </a:solidFill>
+                <a:latin typeface="Segoe UI"/>
+              </a:defRPr>
+            </a:pPr>
+            <a:r>
+              <a:t>      3.  Pontos fortes e áreas de melhoria</a:t>
+            </a:r>
+          </a:p>
+          <a:p>
+            <a:pPr>
+              <a:spcAft>
+                <a:spcPts val="960"/>
+              </a:spcAft>
+              <a:defRPr sz="1600" b="0">
+                <a:solidFill>
+                  <a:srgbClr val="333333"/>
+                </a:solidFill>
+                <a:latin typeface="Segoe UI"/>
+              </a:defRPr>
+            </a:pPr>
+            <a:r>
+              <a:t>      4.  Recomendações específicas para o aluno</a:t>
             </a:r>
           </a:p>
           <a:p>
@@ -6345,131 +6684,11 @@
               </a:defRPr>
             </a:pPr>
             <a:r>
-              <a:t>Relatórios disponíveis:</a:t>
-            </a:r>
-          </a:p>
-          <a:p>
-            <a:pPr>
-              <a:spcAft>
-                <a:spcPts val="960"/>
-              </a:spcAft>
-              <a:defRPr sz="1600" b="0">
-                <a:solidFill>
-                  <a:srgbClr val="333333"/>
-                </a:solidFill>
-                <a:latin typeface="Segoe UI"/>
-              </a:defRPr>
-            </a:pPr>
-            <a:r>
-              <a:t>   •  Correção individual (por questão)</a:t>
-            </a:r>
-          </a:p>
-          <a:p>
-            <a:pPr>
-              <a:spcAft>
-                <a:spcPts val="960"/>
-              </a:spcAft>
-              <a:defRPr sz="1600" b="0">
-                <a:solidFill>
-                  <a:srgbClr val="333333"/>
-                </a:solidFill>
-                <a:latin typeface="Segoe UI"/>
-              </a:defRPr>
-            </a:pPr>
-            <a:r>
-              <a:t>   •  Análise de habilidades (perfil cognitivo)</a:t>
-            </a:r>
-          </a:p>
-          <a:p>
-            <a:pPr>
-              <a:spcAft>
-                <a:spcPts val="960"/>
-              </a:spcAft>
-              <a:defRPr sz="1600" b="0">
-                <a:solidFill>
-                  <a:srgbClr val="333333"/>
-                </a:solidFill>
-                <a:latin typeface="Segoe UI"/>
-              </a:defRPr>
-            </a:pPr>
-            <a:r>
-              <a:t>   •  Relatório final (narrativa para aluno e pais)</a:t>
-            </a:r>
-          </a:p>
-          <a:p>
-            <a:pPr>
-              <a:spcAft>
-                <a:spcPts val="960"/>
-              </a:spcAft>
-              <a:defRPr sz="1600" b="0">
-                <a:solidFill>
-                  <a:srgbClr val="333333"/>
-                </a:solidFill>
-                <a:latin typeface="Segoe UI"/>
-              </a:defRPr>
-            </a:pPr>
-            <a:r>
-              <a:t>   •  Desempenho por tarefa (visão da turma)</a:t>
-            </a:r>
-          </a:p>
-          <a:p>
-            <a:pPr>
-              <a:spcAft>
-                <a:spcPts val="960"/>
-              </a:spcAft>
-              <a:defRPr sz="1600" b="0">
-                <a:solidFill>
-                  <a:srgbClr val="333333"/>
-                </a:solidFill>
-                <a:latin typeface="Segoe UI"/>
-              </a:defRPr>
-            </a:pPr>
-            <a:r>
-              <a:t>   •  Desempenho por turma (evolução temporal)</a:t>
-            </a:r>
-          </a:p>
-          <a:p>
-            <a:pPr>
-              <a:spcAft>
-                <a:spcPts val="960"/>
-              </a:spcAft>
-              <a:defRPr sz="1600" b="0">
-                <a:solidFill>
-                  <a:srgbClr val="333333"/>
-                </a:solidFill>
-                <a:latin typeface="Segoe UI"/>
-              </a:defRPr>
-            </a:pPr>
-            <a:r>
-              <a:t>   •  Desempenho por matéria (eficácia curricular)</a:t>
-            </a:r>
-          </a:p>
-        </p:txBody>
-      </p:sp>
-      <p:pic>
-        <p:nvPicPr>
-          <p:cNvPr id="6" name="Picture 5" descr="05_dashboard_clean.png"/>
-          <p:cNvPicPr>
-            <a:picLocks noChangeAspect="1"/>
-          </p:cNvPicPr>
-          <p:nvPr/>
-        </p:nvPicPr>
-        <p:blipFill>
-          <a:blip r:embed="rId2"/>
-          <a:stretch>
-            <a:fillRect/>
-          </a:stretch>
-        </p:blipFill>
-        <p:spPr>
-          <a:xfrm>
-            <a:off x="6400800" y="1188720"/>
-            <a:ext cx="5303520" cy="3314700"/>
-          </a:xfrm>
-          <a:prstGeom prst="rect">
-            <a:avLst/>
-          </a:prstGeom>
-        </p:spPr>
-      </p:pic>
+              <a:t>"Um relatório que posso mostrar ao aluno e aos pais."</a:t>
+            </a:r>
+          </a:p>
+        </p:txBody>
+      </p:sp>
     </p:spTree>
   </p:cSld>
   <p:clrMapOvr>
@@ -6711,7 +6930,7 @@
               </a:defRPr>
             </a:pPr>
             <a:r>
-              <a:t>Correção Individual — O Microscópio</a:t>
+              <a:t>Etapas 7-9: Relatórios de Desempenho</a:t>
             </a:r>
           </a:p>
         </p:txBody>
@@ -6768,7 +6987,7 @@
         <p:spPr>
           <a:xfrm>
             <a:off x="731520" y="1188720"/>
-            <a:ext cx="10515600" cy="4389120"/>
+            <a:ext cx="10515600" cy="5029200"/>
           </a:xfrm>
           <a:prstGeom prst="rect">
             <a:avLst/>
@@ -6783,9 +7002,38 @@
           <a:p>
             <a:pPr>
               <a:spcAft>
-                <a:spcPts val="840"/>
-              </a:spcAft>
-              <a:defRPr sz="1400" b="1">
+                <a:spcPts val="960"/>
+              </a:spcAft>
+              <a:defRPr sz="1600" b="1">
+                <a:solidFill>
+                  <a:srgbClr val="002B5C"/>
+                </a:solidFill>
+                <a:latin typeface="Segoe UI"/>
+              </a:defRPr>
+            </a:pPr>
+            <a:r>
+              <a:t>De uma prova para o currículo inteiro:</a:t>
+            </a:r>
+          </a:p>
+          <a:p>
+            <a:pPr>
+              <a:spcAft>
+                <a:spcPts val="960"/>
+              </a:spcAft>
+              <a:defRPr sz="1600" b="0">
+                <a:solidFill>
+                  <a:srgbClr val="333333"/>
+                </a:solidFill>
+                <a:latin typeface="Segoe UI"/>
+              </a:defRPr>
+            </a:pPr>
+          </a:p>
+          <a:p>
+            <a:pPr>
+              <a:spcAft>
+                <a:spcPts val="960"/>
+              </a:spcAft>
+              <a:defRPr sz="1600" b="1">
                 <a:solidFill>
                   <a:srgbClr val="0056A0"/>
                 </a:solidFill>
@@ -6793,121 +7041,60 @@
               </a:defRPr>
             </a:pPr>
             <a:r>
-              <a:t>Dados reais — Cálculo 1, EPGE/FGV:</a:t>
-            </a:r>
-          </a:p>
-          <a:p>
-            <a:pPr>
-              <a:spcAft>
-                <a:spcPts val="840"/>
-              </a:spcAft>
-              <a:defRPr sz="1400" b="1">
-                <a:solidFill>
-                  <a:srgbClr val="002B5C"/>
-                </a:solidFill>
-                <a:latin typeface="Segoe UI"/>
-              </a:defRPr>
-            </a:pPr>
-            <a:r>
-              <a:t>Nota final: 6.0/10</a:t>
-            </a:r>
-          </a:p>
-          <a:p>
-            <a:pPr>
-              <a:spcAft>
-                <a:spcPts val="840"/>
-              </a:spcAft>
-              <a:defRPr sz="1400" b="0">
-                <a:solidFill>
-                  <a:srgbClr val="333333"/>
-                </a:solidFill>
-                <a:latin typeface="Segoe UI"/>
-              </a:defRPr>
-            </a:pPr>
-          </a:p>
-          <a:p>
-            <a:pPr>
-              <a:spcAft>
-                <a:spcPts val="840"/>
-              </a:spcAft>
-              <a:defRPr sz="1400" b="0">
-                <a:solidFill>
-                  <a:srgbClr val="333333"/>
-                </a:solidFill>
-                <a:latin typeface="Segoe UI"/>
-              </a:defRPr>
-            </a:pPr>
-            <a:r>
-              <a:t>  ❌ Q1 (0.75/1.5): Q1a: conclusão correta de descontinuidade de f', mas a justificativa mistura con...</a:t>
-            </a:r>
-          </a:p>
-          <a:p>
-            <a:pPr>
-              <a:spcAft>
-                <a:spcPts val="840"/>
-              </a:spcAft>
-              <a:defRPr sz="1400" b="0">
-                <a:solidFill>
-                  <a:srgbClr val="333333"/>
-                </a:solidFill>
-                <a:latin typeface="Segoe UI"/>
-              </a:defRPr>
-            </a:pPr>
-            <a:r>
-              <a:t>  ✅ Q2 (0.75/1.0): Q2a: correto que y = 4x+2x^2 não satisfaz a edp. Q2b: coeficientes incorretos; r...</a:t>
-            </a:r>
-          </a:p>
-          <a:p>
-            <a:pPr>
-              <a:spcAft>
-                <a:spcPts val="840"/>
-              </a:spcAft>
-              <a:defRPr sz="1400" b="0">
-                <a:solidFill>
-                  <a:srgbClr val="333333"/>
-                </a:solidFill>
-                <a:latin typeface="Segoe UI"/>
-              </a:defRPr>
-            </a:pPr>
-            <a:r>
-              <a:t>  ✅ Q3 (1.0/1.5): Q3a: gráfico em V com vértice em (0,4), constante 4 para -2≤x≤2. Q3b: f'(-1)=0. ...</a:t>
-            </a:r>
-          </a:p>
-          <a:p>
-            <a:pPr>
-              <a:spcAft>
-                <a:spcPts val="840"/>
-              </a:spcAft>
-              <a:defRPr sz="1400" b="0">
-                <a:solidFill>
-                  <a:srgbClr val="333333"/>
-                </a:solidFill>
-                <a:latin typeface="Segoe UI"/>
-              </a:defRPr>
-            </a:pPr>
-            <a:r>
-              <a:t>  ❌ Q4 (0.75/1.0): Q4a: cálculo da derivada da razão está quase completo; falta transcrição final d...</a:t>
-            </a:r>
-          </a:p>
-          <a:p>
-            <a:pPr>
-              <a:spcAft>
-                <a:spcPts val="840"/>
-              </a:spcAft>
-              <a:defRPr sz="1400" b="0">
-                <a:solidFill>
-                  <a:srgbClr val="333333"/>
-                </a:solidFill>
-                <a:latin typeface="Segoe UI"/>
-              </a:defRPr>
-            </a:pPr>
-          </a:p>
-          <a:p>
-            <a:pPr>
-              <a:spcAft>
-                <a:spcPts val="840"/>
-              </a:spcAft>
-              <a:defRPr sz="1400" b="1">
+              <a:t>📋  Desempenho por Tarefa (Atividade)</a:t>
+            </a:r>
+          </a:p>
+          <a:p>
+            <a:pPr>
+              <a:spcAft>
+                <a:spcPts val="960"/>
+              </a:spcAft>
+              <a:defRPr sz="1600" b="0">
+                <a:solidFill>
+                  <a:srgbClr val="333333"/>
+                </a:solidFill>
+                <a:latin typeface="Segoe UI"/>
+              </a:defRPr>
+            </a:pPr>
+            <a:r>
+              <a:t>   Como a turma se saiu nesta prova específica.</a:t>
+            </a:r>
+          </a:p>
+          <a:p>
+            <a:pPr>
+              <a:spcAft>
+                <a:spcPts val="960"/>
+              </a:spcAft>
+              <a:defRPr sz="1600" b="0">
+                <a:solidFill>
+                  <a:srgbClr val="333333"/>
+                </a:solidFill>
+                <a:latin typeface="Segoe UI"/>
+              </a:defRPr>
+            </a:pPr>
+            <a:r>
+              <a:t>   Padrões de acerto/erro por questão com exemplos de alunos.</a:t>
+            </a:r>
+          </a:p>
+          <a:p>
+            <a:pPr>
+              <a:spcAft>
+                <a:spcPts val="960"/>
+              </a:spcAft>
+              <a:defRPr sz="1600" b="0">
+                <a:solidFill>
+                  <a:srgbClr val="333333"/>
+                </a:solidFill>
+                <a:latin typeface="Segoe UI"/>
+              </a:defRPr>
+            </a:pPr>
+          </a:p>
+          <a:p>
+            <a:pPr>
+              <a:spcAft>
+                <a:spcPts val="960"/>
+              </a:spcAft>
+              <a:defRPr sz="1600" b="1">
                 <a:solidFill>
                   <a:srgbClr val="0056A0"/>
                 </a:solidFill>
@@ -6915,58 +7102,100 @@
               </a:defRPr>
             </a:pPr>
             <a:r>
-              <a:t>Feedback geral:</a:t>
-            </a:r>
-          </a:p>
-          <a:p>
-            <a:pPr>
-              <a:spcAft>
-                <a:spcPts val="840"/>
-              </a:spcAft>
-              <a:defRPr sz="1400" b="0">
-                <a:solidFill>
-                  <a:srgbClr val="666666"/>
-                </a:solidFill>
-                <a:latin typeface="Segoe UI"/>
-              </a:defRPr>
-            </a:pPr>
-            <a:r>
-              <a:t>O aluno demonstra domínio considerável de cálculo diferencial com bons resultados, identificando corretamente os pontos-chave. Houve alguns equívocos em justificativas (Q1, Q4) e uma área de incerteza...</a:t>
-            </a:r>
-          </a:p>
-        </p:txBody>
-      </p:sp>
-      <p:sp>
-        <p:nvSpPr>
-          <p:cNvPr id="6" name="TextBox 5"/>
-          <p:cNvSpPr txBox="1"/>
-          <p:nvPr/>
-        </p:nvSpPr>
-        <p:spPr>
-          <a:xfrm>
-            <a:off x="731520" y="5669280"/>
-            <a:ext cx="5486400" cy="365760"/>
-          </a:xfrm>
-          <a:prstGeom prst="rect">
-            <a:avLst/>
-          </a:prstGeom>
-          <a:noFill/>
-        </p:spPr>
-        <p:txBody>
-          <a:bodyPr wrap="square">
-            <a:spAutoFit/>
-          </a:bodyPr>
-          <a:lstStyle/>
-          <a:p>
-            <a:r>
-              <a:rPr sz="1400" u="sng">
-                <a:solidFill>
-                  <a:srgbClr val="4A90D9"/>
-                </a:solidFill>
-                <a:latin typeface="Segoe UI"/>
-                <a:hlinkClick r:id="rId2"/>
-              </a:rPr>
-              <a:t>→ Ver relatório completo: 01_correcao_otavio.pdf</a:t>
+              <a:t>👥  Desempenho por Turma</a:t>
+            </a:r>
+          </a:p>
+          <a:p>
+            <a:pPr>
+              <a:spcAft>
+                <a:spcPts val="960"/>
+              </a:spcAft>
+              <a:defRPr sz="1600" b="0">
+                <a:solidFill>
+                  <a:srgbClr val="333333"/>
+                </a:solidFill>
+                <a:latin typeface="Segoe UI"/>
+              </a:defRPr>
+            </a:pPr>
+            <a:r>
+              <a:t>   Evolução ao longo do semestre. Erros persistentes.</a:t>
+            </a:r>
+          </a:p>
+          <a:p>
+            <a:pPr>
+              <a:spcAft>
+                <a:spcPts val="960"/>
+              </a:spcAft>
+              <a:defRPr sz="1600" b="0">
+                <a:solidFill>
+                  <a:srgbClr val="333333"/>
+                </a:solidFill>
+                <a:latin typeface="Segoe UI"/>
+              </a:defRPr>
+            </a:pPr>
+            <a:r>
+              <a:t>   Perfil coletivo: quem melhorou, quem está ficando para trás.</a:t>
+            </a:r>
+          </a:p>
+          <a:p>
+            <a:pPr>
+              <a:spcAft>
+                <a:spcPts val="960"/>
+              </a:spcAft>
+              <a:defRPr sz="1600" b="0">
+                <a:solidFill>
+                  <a:srgbClr val="333333"/>
+                </a:solidFill>
+                <a:latin typeface="Segoe UI"/>
+              </a:defRPr>
+            </a:pPr>
+          </a:p>
+          <a:p>
+            <a:pPr>
+              <a:spcAft>
+                <a:spcPts val="960"/>
+              </a:spcAft>
+              <a:defRPr sz="1600" b="1">
+                <a:solidFill>
+                  <a:srgbClr val="0056A0"/>
+                </a:solidFill>
+                <a:latin typeface="Segoe UI"/>
+              </a:defRPr>
+            </a:pPr>
+            <a:r>
+              <a:t>📚  Desempenho por Matéria</a:t>
+            </a:r>
+          </a:p>
+          <a:p>
+            <a:pPr>
+              <a:spcAft>
+                <a:spcPts val="960"/>
+              </a:spcAft>
+              <a:defRPr sz="1600" b="0">
+                <a:solidFill>
+                  <a:srgbClr val="333333"/>
+                </a:solidFill>
+                <a:latin typeface="Segoe UI"/>
+              </a:defRPr>
+            </a:pPr>
+            <a:r>
+              <a:t>   Comparação entre turmas. Eficácia do currículo.</a:t>
+            </a:r>
+          </a:p>
+          <a:p>
+            <a:pPr>
+              <a:spcAft>
+                <a:spcPts val="960"/>
+              </a:spcAft>
+              <a:defRPr sz="1600" b="0">
+                <a:solidFill>
+                  <a:srgbClr val="333333"/>
+                </a:solidFill>
+                <a:latin typeface="Segoe UI"/>
+              </a:defRPr>
+            </a:pPr>
+            <a:r>
+              <a:t>   Recomendações para ajuste pedagógico.</a:t>
             </a:r>
           </a:p>
         </p:txBody>
@@ -6985,7 +7214,7 @@
     <p:bg>
       <p:bgPr>
         <a:solidFill>
-          <a:srgbClr val="FFFFFF"/>
+          <a:srgbClr val="002B5C"/>
         </a:solidFill>
         <a:effectLst/>
       </p:bgPr>
@@ -7005,87 +7234,8 @@
         </p:nvSpPr>
         <p:spPr>
           <a:xfrm>
-            <a:off x="0" y="0"/>
-            <a:ext cx="12191695" cy="73152"/>
-          </a:xfrm>
-          <a:prstGeom prst="rect">
-            <a:avLst/>
-          </a:prstGeom>
-          <a:solidFill>
-            <a:srgbClr val="0056A0"/>
-          </a:solidFill>
-          <a:ln>
-            <a:noFill/>
-          </a:ln>
-        </p:spPr>
-        <p:style>
-          <a:lnRef idx="1">
-            <a:schemeClr val="accent1"/>
-          </a:lnRef>
-          <a:fillRef idx="3">
-            <a:schemeClr val="accent1"/>
-          </a:fillRef>
-          <a:effectRef idx="2">
-            <a:schemeClr val="accent1"/>
-          </a:effectRef>
-          <a:fontRef idx="minor">
-            <a:schemeClr val="lt1"/>
-          </a:fontRef>
-        </p:style>
-        <p:txBody>
-          <a:bodyPr rtlCol="0" anchor="ctr"/>
-          <a:lstStyle/>
-          <a:p>
-            <a:pPr algn="ctr"/>
-          </a:p>
-        </p:txBody>
-      </p:sp>
-      <p:sp>
-        <p:nvSpPr>
-          <p:cNvPr id="3" name="TextBox 2"/>
-          <p:cNvSpPr txBox="1"/>
-          <p:nvPr/>
-        </p:nvSpPr>
-        <p:spPr>
-          <a:xfrm>
-            <a:off x="731520" y="274320"/>
-            <a:ext cx="10058400" cy="731520"/>
-          </a:xfrm>
-          <a:prstGeom prst="rect">
-            <a:avLst/>
-          </a:prstGeom>
-          <a:noFill/>
-        </p:spPr>
-        <p:txBody>
-          <a:bodyPr wrap="square">
-            <a:spAutoFit/>
-          </a:bodyPr>
-          <a:lstStyle/>
-          <a:p>
-            <a:pPr algn="l">
-              <a:defRPr sz="3000" b="1">
-                <a:solidFill>
-                  <a:srgbClr val="002B5C"/>
-                </a:solidFill>
-                <a:latin typeface="Segoe UI"/>
-              </a:defRPr>
-            </a:pPr>
-            <a:r>
-              <a:t>Desempenho por Tarefa — A Visão da Turma</a:t>
-            </a:r>
-          </a:p>
-        </p:txBody>
-      </p:sp>
-      <p:sp>
-        <p:nvSpPr>
-          <p:cNvPr id="4" name="Rectangle 3"/>
-          <p:cNvSpPr/>
-          <p:nvPr/>
-        </p:nvSpPr>
-        <p:spPr>
-          <a:xfrm>
-            <a:off x="731520" y="960120"/>
-            <a:ext cx="2743200" cy="36576"/>
+            <a:off x="0" y="2926080"/>
+            <a:ext cx="12191695" cy="54864"/>
           </a:xfrm>
           <a:prstGeom prst="rect">
             <a:avLst/>
@@ -7121,100 +7271,14 @@
       </p:sp>
       <p:sp>
         <p:nvSpPr>
-          <p:cNvPr id="5" name="Rectangle 4"/>
-          <p:cNvSpPr/>
-          <p:nvPr/>
-        </p:nvSpPr>
-        <p:spPr>
-          <a:xfrm>
-            <a:off x="548640" y="1188720"/>
-            <a:ext cx="10972800" cy="2011680"/>
-          </a:xfrm>
-          <a:prstGeom prst="rect">
-            <a:avLst/>
-          </a:prstGeom>
-          <a:solidFill>
-            <a:srgbClr val="F0F2F5"/>
-          </a:solidFill>
-          <a:ln>
-            <a:noFill/>
-          </a:ln>
-        </p:spPr>
-        <p:style>
-          <a:lnRef idx="1">
-            <a:schemeClr val="accent1"/>
-          </a:lnRef>
-          <a:fillRef idx="3">
-            <a:schemeClr val="accent1"/>
-          </a:fillRef>
-          <a:effectRef idx="2">
-            <a:schemeClr val="accent1"/>
-          </a:effectRef>
-          <a:fontRef idx="minor">
-            <a:schemeClr val="lt1"/>
-          </a:fontRef>
-        </p:style>
-        <p:txBody>
-          <a:bodyPr rtlCol="0" anchor="ctr"/>
-          <a:lstStyle/>
-          <a:p>
-            <a:pPr algn="ctr"/>
-          </a:p>
-        </p:txBody>
-      </p:sp>
-      <p:sp>
-        <p:nvSpPr>
-          <p:cNvPr id="6" name="Rectangle 5"/>
-          <p:cNvSpPr/>
-          <p:nvPr/>
-        </p:nvSpPr>
-        <p:spPr>
-          <a:xfrm>
-            <a:off x="548640" y="1188720"/>
-            <a:ext cx="54864" cy="2011680"/>
-          </a:xfrm>
-          <a:prstGeom prst="rect">
-            <a:avLst/>
-          </a:prstGeom>
-          <a:solidFill>
-            <a:srgbClr val="0056A0"/>
-          </a:solidFill>
-          <a:ln>
-            <a:noFill/>
-          </a:ln>
-        </p:spPr>
-        <p:style>
-          <a:lnRef idx="1">
-            <a:schemeClr val="accent1"/>
-          </a:lnRef>
-          <a:fillRef idx="3">
-            <a:schemeClr val="accent1"/>
-          </a:fillRef>
-          <a:effectRef idx="2">
-            <a:schemeClr val="accent1"/>
-          </a:effectRef>
-          <a:fontRef idx="minor">
-            <a:schemeClr val="lt1"/>
-          </a:fontRef>
-        </p:style>
-        <p:txBody>
-          <a:bodyPr rtlCol="0" anchor="ctr"/>
-          <a:lstStyle/>
-          <a:p>
-            <a:pPr algn="ctr"/>
-          </a:p>
-        </p:txBody>
-      </p:sp>
-      <p:sp>
-        <p:nvSpPr>
-          <p:cNvPr id="7" name="TextBox 6"/>
+          <p:cNvPr id="3" name="TextBox 2"/>
           <p:cNvSpPr txBox="1"/>
           <p:nvPr/>
         </p:nvSpPr>
         <p:spPr>
           <a:xfrm>
-            <a:off x="822960" y="1371600"/>
-            <a:ext cx="10332720" cy="1645920"/>
+            <a:off x="914400" y="1828800"/>
+            <a:ext cx="10058400" cy="1097280"/>
           </a:xfrm>
           <a:prstGeom prst="rect">
             <a:avLst/>
@@ -7227,62 +7291,30 @@
           </a:bodyPr>
           <a:lstStyle/>
           <a:p>
-            <a:pPr>
-              <a:spcAft>
-                <a:spcPts val="840"/>
-              </a:spcAft>
-              <a:defRPr sz="1400" b="1">
-                <a:solidFill>
-                  <a:srgbClr val="0056A0"/>
-                </a:solidFill>
-                <a:latin typeface="Segoe UI"/>
-              </a:defRPr>
-            </a:pPr>
-            <a:r>
-              <a:t>Trecho real do relatório gerado pelo sistema:</a:t>
-            </a:r>
-          </a:p>
-          <a:p>
-            <a:pPr>
-              <a:spcAft>
-                <a:spcPts val="840"/>
-              </a:spcAft>
-              <a:defRPr sz="1400" b="0">
-                <a:solidFill>
-                  <a:srgbClr val="333333"/>
-                </a:solidFill>
-                <a:latin typeface="Segoe UI"/>
-              </a:defRPr>
-            </a:pPr>
-          </a:p>
-          <a:p>
-            <a:pPr>
-              <a:spcAft>
-                <a:spcPts val="840"/>
-              </a:spcAft>
-              <a:defRPr sz="1400" b="0">
-                <a:solidFill>
-                  <a:srgbClr val="333333"/>
-                </a:solidFill>
-                <a:latin typeface="Segoe UI"/>
-              </a:defRPr>
-            </a:pPr>
-            <a:r>
-              <a:t>A Prova Álgebra-V revelou uma turma em **transição entre domínio operacional e formalização**. Os dados disponíveis mostram um contraste marcante: enquanto um aluno (Ana) demonstra excelência consolidada em todas as dimensões algébricas, o outro (Bruno) revela um padrão recorrente de competência conceitual mascarada por deficiências em documentação e completude de procedimentos.</a:t>
-            </a:r>
-          </a:p>
-        </p:txBody>
-      </p:sp>
-      <p:sp>
-        <p:nvSpPr>
-          <p:cNvPr id="8" name="TextBox 7"/>
+            <a:pPr algn="ctr">
+              <a:defRPr sz="4400" b="1">
+                <a:solidFill>
+                  <a:srgbClr val="FFFFFF"/>
+                </a:solidFill>
+                <a:latin typeface="Segoe UI"/>
+              </a:defRPr>
+            </a:pPr>
+            <a:r>
+              <a:t>Relatórios Reais</a:t>
+            </a:r>
+          </a:p>
+        </p:txBody>
+      </p:sp>
+      <p:sp>
+        <p:nvSpPr>
+          <p:cNvPr id="4" name="TextBox 3"/>
           <p:cNvSpPr txBox="1"/>
           <p:nvPr/>
         </p:nvSpPr>
         <p:spPr>
           <a:xfrm>
-            <a:off x="731520" y="3474720"/>
-            <a:ext cx="10515600" cy="2286000"/>
+            <a:off x="914400" y="3200400"/>
+            <a:ext cx="10058400" cy="914400"/>
           </a:xfrm>
           <a:prstGeom prst="rect">
             <a:avLst/>
@@ -7295,115 +7327,16 @@
           </a:bodyPr>
           <a:lstStyle/>
           <a:p>
-            <a:pPr>
-              <a:spcAft>
-                <a:spcPts val="900"/>
-              </a:spcAft>
-              <a:defRPr sz="1500" b="1">
-                <a:solidFill>
-                  <a:srgbClr val="0056A0"/>
-                </a:solidFill>
-                <a:latin typeface="Segoe UI"/>
-              </a:defRPr>
-            </a:pPr>
-            <a:r>
-              <a:t>Diagnóstico gerado pela IA:</a:t>
-            </a:r>
-          </a:p>
-          <a:p>
-            <a:pPr>
-              <a:spcAft>
-                <a:spcPts val="900"/>
-              </a:spcAft>
-              <a:defRPr sz="1500" b="0">
-                <a:solidFill>
-                  <a:srgbClr val="333333"/>
-                </a:solidFill>
-                <a:latin typeface="Segoe UI"/>
-              </a:defRPr>
-            </a:pPr>
-          </a:p>
-          <a:p>
-            <a:pPr>
-              <a:spcAft>
-                <a:spcPts val="900"/>
-              </a:spcAft>
-              <a:defRPr sz="1500" b="0">
-                <a:solidFill>
-                  <a:srgbClr val="333333"/>
-                </a:solidFill>
-                <a:latin typeface="Segoe UI"/>
-              </a:defRPr>
-            </a:pPr>
-            <a:r>
-              <a:t>  Turma em transição entre domínio operacional e formalização.</a:t>
-            </a:r>
-          </a:p>
-          <a:p>
-            <a:pPr>
-              <a:spcAft>
-                <a:spcPts val="900"/>
-              </a:spcAft>
-              <a:defRPr sz="1500" b="0">
-                <a:solidFill>
-                  <a:srgbClr val="333333"/>
-                </a:solidFill>
-                <a:latin typeface="Segoe UI"/>
-              </a:defRPr>
-            </a:pPr>
-            <a:r>
-              <a:t>  Excelência consolidada em alguns alunos vs. deficiências estruturais em outros.</a:t>
-            </a:r>
-          </a:p>
-          <a:p>
-            <a:pPr>
-              <a:spcAft>
-                <a:spcPts val="900"/>
-              </a:spcAft>
-              <a:defRPr sz="1500" b="0">
-                <a:solidFill>
-                  <a:srgbClr val="333333"/>
-                </a:solidFill>
-                <a:latin typeface="Segoe UI"/>
-              </a:defRPr>
-            </a:pPr>
-            <a:r>
-              <a:t>  Competência conceitual mascarada por deficiências em documentação.</a:t>
-            </a:r>
-          </a:p>
-        </p:txBody>
-      </p:sp>
-      <p:sp>
-        <p:nvSpPr>
-          <p:cNvPr id="9" name="TextBox 8"/>
-          <p:cNvSpPr txBox="1"/>
-          <p:nvPr/>
-        </p:nvSpPr>
-        <p:spPr>
-          <a:xfrm>
-            <a:off x="731520" y="5669280"/>
-            <a:ext cx="5486400" cy="365760"/>
-          </a:xfrm>
-          <a:prstGeom prst="rect">
-            <a:avLst/>
-          </a:prstGeom>
-          <a:noFill/>
-        </p:spPr>
-        <p:txBody>
-          <a:bodyPr wrap="square">
-            <a:spAutoFit/>
-          </a:bodyPr>
-          <a:lstStyle/>
-          <a:p>
-            <a:r>
-              <a:rPr sz="1400" u="sng">
+            <a:pPr algn="ctr">
+              <a:defRPr sz="2200" b="0">
                 <a:solidFill>
                   <a:srgbClr val="4A90D9"/>
                 </a:solidFill>
                 <a:latin typeface="Segoe UI"/>
-                <a:hlinkClick r:id="rId2"/>
-              </a:rPr>
-              <a:t>→ Ver relatório completo: Desempenho Tarefa (Matemática-V)</a:t>
+              </a:defRPr>
+            </a:pPr>
+            <a:r>
+              <a:t>Gerados automaticamente a partir de provas da EPGE/FGV</a:t>
             </a:r>
           </a:p>
         </p:txBody>
@@ -7508,7 +7441,7 @@
               </a:defRPr>
             </a:pPr>
             <a:r>
-              <a:t>Desempenho por Matéria — Análise Cross-Turma</a:t>
+              <a:t>Estes Não São Mockups</a:t>
             </a:r>
           </a:p>
         </p:txBody>
@@ -7558,100 +7491,14 @@
       </p:sp>
       <p:sp>
         <p:nvSpPr>
-          <p:cNvPr id="5" name="Rectangle 4"/>
-          <p:cNvSpPr/>
-          <p:nvPr/>
-        </p:nvSpPr>
-        <p:spPr>
-          <a:xfrm>
-            <a:off x="548640" y="1188720"/>
-            <a:ext cx="10972800" cy="2194560"/>
-          </a:xfrm>
-          <a:prstGeom prst="rect">
-            <a:avLst/>
-          </a:prstGeom>
-          <a:solidFill>
-            <a:srgbClr val="F0F2F5"/>
-          </a:solidFill>
-          <a:ln>
-            <a:noFill/>
-          </a:ln>
-        </p:spPr>
-        <p:style>
-          <a:lnRef idx="1">
-            <a:schemeClr val="accent1"/>
-          </a:lnRef>
-          <a:fillRef idx="3">
-            <a:schemeClr val="accent1"/>
-          </a:fillRef>
-          <a:effectRef idx="2">
-            <a:schemeClr val="accent1"/>
-          </a:effectRef>
-          <a:fontRef idx="minor">
-            <a:schemeClr val="lt1"/>
-          </a:fontRef>
-        </p:style>
-        <p:txBody>
-          <a:bodyPr rtlCol="0" anchor="ctr"/>
-          <a:lstStyle/>
-          <a:p>
-            <a:pPr algn="ctr"/>
-          </a:p>
-        </p:txBody>
-      </p:sp>
-      <p:sp>
-        <p:nvSpPr>
-          <p:cNvPr id="6" name="Rectangle 5"/>
-          <p:cNvSpPr/>
-          <p:nvPr/>
-        </p:nvSpPr>
-        <p:spPr>
-          <a:xfrm>
-            <a:off x="548640" y="1188720"/>
-            <a:ext cx="54864" cy="2194560"/>
-          </a:xfrm>
-          <a:prstGeom prst="rect">
-            <a:avLst/>
-          </a:prstGeom>
-          <a:solidFill>
-            <a:srgbClr val="0056A0"/>
-          </a:solidFill>
-          <a:ln>
-            <a:noFill/>
-          </a:ln>
-        </p:spPr>
-        <p:style>
-          <a:lnRef idx="1">
-            <a:schemeClr val="accent1"/>
-          </a:lnRef>
-          <a:fillRef idx="3">
-            <a:schemeClr val="accent1"/>
-          </a:fillRef>
-          <a:effectRef idx="2">
-            <a:schemeClr val="accent1"/>
-          </a:effectRef>
-          <a:fontRef idx="minor">
-            <a:schemeClr val="lt1"/>
-          </a:fontRef>
-        </p:style>
-        <p:txBody>
-          <a:bodyPr rtlCol="0" anchor="ctr"/>
-          <a:lstStyle/>
-          <a:p>
-            <a:pPr algn="ctr"/>
-          </a:p>
-        </p:txBody>
-      </p:sp>
-      <p:sp>
-        <p:nvSpPr>
-          <p:cNvPr id="7" name="TextBox 6"/>
+          <p:cNvPr id="5" name="TextBox 4"/>
           <p:cNvSpPr txBox="1"/>
           <p:nvPr/>
         </p:nvSpPr>
         <p:spPr>
           <a:xfrm>
-            <a:off x="822960" y="1371600"/>
-            <a:ext cx="10332720" cy="1828800"/>
+            <a:off x="731520" y="1188720"/>
+            <a:ext cx="5029200" cy="5029200"/>
           </a:xfrm>
           <a:prstGeom prst="rect">
             <a:avLst/>
@@ -7666,9 +7513,99 @@
           <a:p>
             <a:pPr>
               <a:spcAft>
-                <a:spcPts val="840"/>
-              </a:spcAft>
-              <a:defRPr sz="1400" b="1">
+                <a:spcPts val="960"/>
+              </a:spcAft>
+              <a:defRPr sz="1600" b="1">
+                <a:solidFill>
+                  <a:srgbClr val="002B5C"/>
+                </a:solidFill>
+                <a:latin typeface="Segoe UI"/>
+              </a:defRPr>
+            </a:pPr>
+            <a:r>
+              <a:t>Tudo que você vai ver foi gerado automaticamente</a:t>
+            </a:r>
+          </a:p>
+          <a:p>
+            <a:pPr>
+              <a:spcAft>
+                <a:spcPts val="960"/>
+              </a:spcAft>
+              <a:defRPr sz="1600" b="1">
+                <a:solidFill>
+                  <a:srgbClr val="002B5C"/>
+                </a:solidFill>
+                <a:latin typeface="Segoe UI"/>
+              </a:defRPr>
+            </a:pPr>
+            <a:r>
+              <a:t>pelo NOVO CR a partir de provas reais.</a:t>
+            </a:r>
+          </a:p>
+          <a:p>
+            <a:pPr>
+              <a:spcAft>
+                <a:spcPts val="960"/>
+              </a:spcAft>
+              <a:defRPr sz="1600" b="0">
+                <a:solidFill>
+                  <a:srgbClr val="333333"/>
+                </a:solidFill>
+                <a:latin typeface="Segoe UI"/>
+              </a:defRPr>
+            </a:pPr>
+          </a:p>
+          <a:p>
+            <a:pPr>
+              <a:spcAft>
+                <a:spcPts val="960"/>
+              </a:spcAft>
+              <a:defRPr sz="1600" b="0">
+                <a:solidFill>
+                  <a:srgbClr val="333333"/>
+                </a:solidFill>
+                <a:latin typeface="Segoe UI"/>
+              </a:defRPr>
+            </a:pPr>
+            <a:r>
+              <a:t>Dados: Cálculo 1, EPGE/FGV, turma 2021.</a:t>
+            </a:r>
+          </a:p>
+          <a:p>
+            <a:pPr>
+              <a:spcAft>
+                <a:spcPts val="960"/>
+              </a:spcAft>
+              <a:defRPr sz="1600" b="0">
+                <a:solidFill>
+                  <a:srgbClr val="333333"/>
+                </a:solidFill>
+                <a:latin typeface="Segoe UI"/>
+              </a:defRPr>
+            </a:pPr>
+            <a:r>
+              <a:t>Baixados diretamente do sistema em produção.</a:t>
+            </a:r>
+          </a:p>
+          <a:p>
+            <a:pPr>
+              <a:spcAft>
+                <a:spcPts val="960"/>
+              </a:spcAft>
+              <a:defRPr sz="1600" b="0">
+                <a:solidFill>
+                  <a:srgbClr val="333333"/>
+                </a:solidFill>
+                <a:latin typeface="Segoe UI"/>
+              </a:defRPr>
+            </a:pPr>
+          </a:p>
+          <a:p>
+            <a:pPr>
+              <a:spcAft>
+                <a:spcPts val="960"/>
+              </a:spcAft>
+              <a:defRPr sz="1600" b="1">
                 <a:solidFill>
                   <a:srgbClr val="0056A0"/>
                 </a:solidFill>
@@ -7676,236 +7613,131 @@
               </a:defRPr>
             </a:pPr>
             <a:r>
-              <a:t>Trecho real — Síntese Cross-Turma (Matemática-V):</a:t>
-            </a:r>
-          </a:p>
-          <a:p>
-            <a:pPr>
-              <a:spcAft>
-                <a:spcPts val="840"/>
-              </a:spcAft>
-              <a:defRPr sz="1400" b="0">
-                <a:solidFill>
-                  <a:srgbClr val="333333"/>
-                </a:solidFill>
-                <a:latin typeface="Segoe UI"/>
-              </a:defRPr>
-            </a:pPr>
-          </a:p>
-          <a:p>
-            <a:pPr>
-              <a:spcAft>
-                <a:spcPts val="840"/>
-              </a:spcAft>
-              <a:defRPr sz="1400" b="0">
-                <a:solidFill>
-                  <a:srgbClr val="333333"/>
-                </a:solidFill>
-                <a:latin typeface="Segoe UI"/>
-              </a:defRPr>
-            </a:pPr>
-            <a:r>
-              <a:t>Matemática-V apresenta um quadro misto e polarizado. O aprendizado não é</a:t>
-            </a:r>
-          </a:p>
-          <a:p>
-            <a:pPr>
-              <a:spcAft>
-                <a:spcPts val="840"/>
-              </a:spcAft>
-              <a:defRPr sz="1400" b="0">
-                <a:solidFill>
-                  <a:srgbClr val="333333"/>
-                </a:solidFill>
-                <a:latin typeface="Segoe UI"/>
-              </a:defRPr>
-            </a:pPr>
-            <a:r>
-              <a:t>uniforme: há alunos com domínio excepcional, mas também alunos com deficiências</a:t>
-            </a:r>
-          </a:p>
-          <a:p>
-            <a:pPr>
-              <a:spcAft>
-                <a:spcPts val="840"/>
-              </a:spcAft>
-              <a:defRPr sz="1400" b="0">
-                <a:solidFill>
-                  <a:srgbClr val="333333"/>
-                </a:solidFill>
-                <a:latin typeface="Segoe UI"/>
-              </a:defRPr>
-            </a:pPr>
-            <a:r>
-              <a:t>estruturais significativas.</a:t>
-            </a:r>
-          </a:p>
-        </p:txBody>
-      </p:sp>
-      <p:sp>
-        <p:nvSpPr>
-          <p:cNvPr id="8" name="TextBox 7"/>
-          <p:cNvSpPr txBox="1"/>
-          <p:nvPr/>
-        </p:nvSpPr>
-        <p:spPr>
-          <a:xfrm>
-            <a:off x="731520" y="3657600"/>
-            <a:ext cx="10515600" cy="2011680"/>
-          </a:xfrm>
-          <a:prstGeom prst="rect">
-            <a:avLst/>
-          </a:prstGeom>
-          <a:noFill/>
-        </p:spPr>
-        <p:txBody>
-          <a:bodyPr wrap="square">
-            <a:spAutoFit/>
-          </a:bodyPr>
-          <a:lstStyle/>
-          <a:p>
-            <a:pPr>
-              <a:spcAft>
-                <a:spcPts val="840"/>
-              </a:spcAft>
-              <a:defRPr sz="1400" b="1">
-                <a:solidFill>
-                  <a:srgbClr val="0056A0"/>
-                </a:solidFill>
-                <a:latin typeface="Segoe UI"/>
-              </a:defRPr>
-            </a:pPr>
-            <a:r>
-              <a:t>Comparação entre turmas (gerada automaticamente):</a:t>
-            </a:r>
-          </a:p>
-          <a:p>
-            <a:pPr>
-              <a:spcAft>
-                <a:spcPts val="840"/>
-              </a:spcAft>
-              <a:defRPr sz="1400" b="0">
-                <a:solidFill>
-                  <a:srgbClr val="333333"/>
-                </a:solidFill>
-                <a:latin typeface="Segoe UI"/>
-              </a:defRPr>
-            </a:pPr>
-          </a:p>
-          <a:p>
-            <a:pPr>
-              <a:spcAft>
-                <a:spcPts val="840"/>
-              </a:spcAft>
-              <a:defRPr sz="1400" b="0">
-                <a:solidFill>
-                  <a:srgbClr val="333333"/>
-                </a:solidFill>
-                <a:latin typeface="Segoe UI"/>
-              </a:defRPr>
-            </a:pPr>
-            <a:r>
-              <a:t>Alpha-V:  Média Álgebra 6.63  |  Média Geometria 6.88  |  Polarizado</a:t>
-            </a:r>
-          </a:p>
-          <a:p>
-            <a:pPr>
-              <a:spcAft>
-                <a:spcPts val="840"/>
-              </a:spcAft>
-              <a:defRPr sz="1400" b="0">
-                <a:solidFill>
-                  <a:srgbClr val="333333"/>
-                </a:solidFill>
-                <a:latin typeface="Segoe UI"/>
-              </a:defRPr>
-            </a:pPr>
-            <a:r>
-              <a:t>Beta-V:   Média Álgebra ~5.6   |  Média Geometria ~5.95  |  Intermediário</a:t>
-            </a:r>
-          </a:p>
-          <a:p>
-            <a:pPr>
-              <a:spcAft>
-                <a:spcPts val="840"/>
-              </a:spcAft>
-              <a:defRPr sz="1400" b="0">
-                <a:solidFill>
-                  <a:srgbClr val="333333"/>
-                </a:solidFill>
-                <a:latin typeface="Segoe UI"/>
-              </a:defRPr>
-            </a:pPr>
-          </a:p>
-          <a:p>
-            <a:pPr>
-              <a:spcAft>
-                <a:spcPts val="840"/>
-              </a:spcAft>
-              <a:defRPr sz="1400" b="1">
-                <a:solidFill>
-                  <a:srgbClr val="002B5C"/>
-                </a:solidFill>
-                <a:latin typeface="Segoe UI"/>
-              </a:defRPr>
-            </a:pPr>
-            <a:r>
-              <a:t>Diagnóstico: não é um problema de capacidade cognitiva geral, mas de lacunas</a:t>
-            </a:r>
-          </a:p>
-          <a:p>
-            <a:pPr>
-              <a:spcAft>
-                <a:spcPts val="840"/>
-              </a:spcAft>
-              <a:defRPr sz="1400" b="1">
-                <a:solidFill>
-                  <a:srgbClr val="002B5C"/>
-                </a:solidFill>
-                <a:latin typeface="Segoe UI"/>
-              </a:defRPr>
-            </a:pPr>
-            <a:r>
-              <a:t>específicas, falta de metodologia, e deficiências em comunicação matemática.</a:t>
-            </a:r>
-          </a:p>
-        </p:txBody>
-      </p:sp>
-      <p:sp>
-        <p:nvSpPr>
-          <p:cNvPr id="9" name="TextBox 8"/>
-          <p:cNvSpPr txBox="1"/>
-          <p:nvPr/>
-        </p:nvSpPr>
-        <p:spPr>
-          <a:xfrm>
-            <a:off x="731520" y="5943600"/>
-            <a:ext cx="7315200" cy="365760"/>
-          </a:xfrm>
-          <a:prstGeom prst="rect">
-            <a:avLst/>
-          </a:prstGeom>
-          <a:noFill/>
-        </p:spPr>
-        <p:txBody>
-          <a:bodyPr wrap="square">
-            <a:spAutoFit/>
-          </a:bodyPr>
-          <a:lstStyle/>
-          <a:p>
-            <a:r>
-              <a:rPr sz="1400" u="sng">
-                <a:solidFill>
-                  <a:srgbClr val="4A90D9"/>
-                </a:solidFill>
-                <a:latin typeface="Segoe UI"/>
-                <a:hlinkClick r:id="rId2"/>
-              </a:rPr>
-              <a:t>→ Ver relatório completo: Desempenho Matéria (Matemática-V)</a:t>
-            </a:r>
-          </a:p>
-        </p:txBody>
-      </p:sp>
+              <a:t>Relatórios disponíveis:</a:t>
+            </a:r>
+          </a:p>
+          <a:p>
+            <a:pPr>
+              <a:spcAft>
+                <a:spcPts val="960"/>
+              </a:spcAft>
+              <a:defRPr sz="1600" b="0">
+                <a:solidFill>
+                  <a:srgbClr val="333333"/>
+                </a:solidFill>
+                <a:latin typeface="Segoe UI"/>
+              </a:defRPr>
+            </a:pPr>
+            <a:r>
+              <a:t>   •  Correção individual (por questão)</a:t>
+            </a:r>
+          </a:p>
+          <a:p>
+            <a:pPr>
+              <a:spcAft>
+                <a:spcPts val="960"/>
+              </a:spcAft>
+              <a:defRPr sz="1600" b="0">
+                <a:solidFill>
+                  <a:srgbClr val="333333"/>
+                </a:solidFill>
+                <a:latin typeface="Segoe UI"/>
+              </a:defRPr>
+            </a:pPr>
+            <a:r>
+              <a:t>   •  Análise de habilidades (perfil cognitivo)</a:t>
+            </a:r>
+          </a:p>
+          <a:p>
+            <a:pPr>
+              <a:spcAft>
+                <a:spcPts val="960"/>
+              </a:spcAft>
+              <a:defRPr sz="1600" b="0">
+                <a:solidFill>
+                  <a:srgbClr val="333333"/>
+                </a:solidFill>
+                <a:latin typeface="Segoe UI"/>
+              </a:defRPr>
+            </a:pPr>
+            <a:r>
+              <a:t>   •  Relatório final (narrativa para aluno e pais)</a:t>
+            </a:r>
+          </a:p>
+          <a:p>
+            <a:pPr>
+              <a:spcAft>
+                <a:spcPts val="960"/>
+              </a:spcAft>
+              <a:defRPr sz="1600" b="0">
+                <a:solidFill>
+                  <a:srgbClr val="333333"/>
+                </a:solidFill>
+                <a:latin typeface="Segoe UI"/>
+              </a:defRPr>
+            </a:pPr>
+            <a:r>
+              <a:t>   •  Desempenho por tarefa (visão da turma)</a:t>
+            </a:r>
+          </a:p>
+          <a:p>
+            <a:pPr>
+              <a:spcAft>
+                <a:spcPts val="960"/>
+              </a:spcAft>
+              <a:defRPr sz="1600" b="0">
+                <a:solidFill>
+                  <a:srgbClr val="333333"/>
+                </a:solidFill>
+                <a:latin typeface="Segoe UI"/>
+              </a:defRPr>
+            </a:pPr>
+            <a:r>
+              <a:t>   •  Desempenho por turma (evolução temporal)</a:t>
+            </a:r>
+          </a:p>
+          <a:p>
+            <a:pPr>
+              <a:spcAft>
+                <a:spcPts val="960"/>
+              </a:spcAft>
+              <a:defRPr sz="1600" b="0">
+                <a:solidFill>
+                  <a:srgbClr val="333333"/>
+                </a:solidFill>
+                <a:latin typeface="Segoe UI"/>
+              </a:defRPr>
+            </a:pPr>
+            <a:r>
+              <a:t>   •  Desempenho por matéria (eficácia curricular)</a:t>
+            </a:r>
+          </a:p>
+        </p:txBody>
+      </p:sp>
+      <p:pic>
+        <p:nvPicPr>
+          <p:cNvPr id="6" name="Picture 5" descr="05_dashboard_clean.png"/>
+          <p:cNvPicPr>
+            <a:picLocks noChangeAspect="1"/>
+          </p:cNvPicPr>
+          <p:nvPr/>
+        </p:nvPicPr>
+        <p:blipFill>
+          <a:blip r:embed="rId2"/>
+          <a:stretch>
+            <a:fillRect/>
+          </a:stretch>
+        </p:blipFill>
+        <p:spPr>
+          <a:xfrm>
+            <a:off x="6400800" y="1188720"/>
+            <a:ext cx="5303520" cy="3314700"/>
+          </a:xfrm>
+          <a:prstGeom prst="rect">
+            <a:avLst/>
+          </a:prstGeom>
+        </p:spPr>
+      </p:pic>
     </p:spTree>
   </p:cSld>
   <p:clrMapOvr>
@@ -8006,7 +7838,7 @@
               </a:defRPr>
             </a:pPr>
             <a:r>
-              <a:t>Tudo Isso É Real</a:t>
+              <a:t>Correção Individual — O Microscópio</a:t>
             </a:r>
           </a:p>
         </p:txBody>
@@ -8056,57 +7888,14 @@
       </p:sp>
       <p:sp>
         <p:nvSpPr>
-          <p:cNvPr id="5" name="Rectangle 4"/>
-          <p:cNvSpPr/>
-          <p:nvPr/>
-        </p:nvSpPr>
-        <p:spPr>
-          <a:xfrm>
-            <a:off x="731520" y="1280160"/>
-            <a:ext cx="2011680" cy="594360"/>
-          </a:xfrm>
-          <a:prstGeom prst="rect">
-            <a:avLst/>
-          </a:prstGeom>
-          <a:solidFill>
-            <a:srgbClr val="0056A0"/>
-          </a:solidFill>
-          <a:ln>
-            <a:noFill/>
-          </a:ln>
-        </p:spPr>
-        <p:style>
-          <a:lnRef idx="1">
-            <a:schemeClr val="accent1"/>
-          </a:lnRef>
-          <a:fillRef idx="3">
-            <a:schemeClr val="accent1"/>
-          </a:fillRef>
-          <a:effectRef idx="2">
-            <a:schemeClr val="accent1"/>
-          </a:effectRef>
-          <a:fontRef idx="minor">
-            <a:schemeClr val="lt1"/>
-          </a:fontRef>
-        </p:style>
-        <p:txBody>
-          <a:bodyPr rtlCol="0" anchor="ctr"/>
-          <a:lstStyle/>
-          <a:p>
-            <a:pPr algn="ctr"/>
-          </a:p>
-        </p:txBody>
-      </p:sp>
-      <p:sp>
-        <p:nvSpPr>
-          <p:cNvPr id="6" name="TextBox 5"/>
+          <p:cNvPr id="5" name="TextBox 4"/>
           <p:cNvSpPr txBox="1"/>
           <p:nvPr/>
         </p:nvSpPr>
         <p:spPr>
           <a:xfrm>
-            <a:off x="731520" y="1389888"/>
-            <a:ext cx="2011680" cy="411480"/>
+            <a:off x="731520" y="1188720"/>
+            <a:ext cx="10515600" cy="4389120"/>
           </a:xfrm>
           <a:prstGeom prst="rect">
             <a:avLst/>
@@ -8119,30 +7908,171 @@
           </a:bodyPr>
           <a:lstStyle/>
           <a:p>
-            <a:pPr algn="ctr">
+            <a:pPr>
+              <a:spcAft>
+                <a:spcPts val="840"/>
+              </a:spcAft>
               <a:defRPr sz="1400" b="1">
                 <a:solidFill>
-                  <a:srgbClr val="FFFFFF"/>
-                </a:solidFill>
-                <a:latin typeface="Segoe UI"/>
-              </a:defRPr>
-            </a:pPr>
-            <a:r>
-              <a:t>Questão</a:t>
-            </a:r>
-          </a:p>
-        </p:txBody>
-      </p:sp>
-      <p:sp>
-        <p:nvSpPr>
-          <p:cNvPr id="7" name="TextBox 6"/>
+                  <a:srgbClr val="0056A0"/>
+                </a:solidFill>
+                <a:latin typeface="Segoe UI"/>
+              </a:defRPr>
+            </a:pPr>
+            <a:r>
+              <a:t>Dados reais — Cálculo 1, EPGE/FGV:</a:t>
+            </a:r>
+          </a:p>
+          <a:p>
+            <a:pPr>
+              <a:spcAft>
+                <a:spcPts val="840"/>
+              </a:spcAft>
+              <a:defRPr sz="1400" b="1">
+                <a:solidFill>
+                  <a:srgbClr val="002B5C"/>
+                </a:solidFill>
+                <a:latin typeface="Segoe UI"/>
+              </a:defRPr>
+            </a:pPr>
+            <a:r>
+              <a:t>Nota final: 6.0/10</a:t>
+            </a:r>
+          </a:p>
+          <a:p>
+            <a:pPr>
+              <a:spcAft>
+                <a:spcPts val="840"/>
+              </a:spcAft>
+              <a:defRPr sz="1400" b="0">
+                <a:solidFill>
+                  <a:srgbClr val="333333"/>
+                </a:solidFill>
+                <a:latin typeface="Segoe UI"/>
+              </a:defRPr>
+            </a:pPr>
+          </a:p>
+          <a:p>
+            <a:pPr>
+              <a:spcAft>
+                <a:spcPts val="840"/>
+              </a:spcAft>
+              <a:defRPr sz="1400" b="0">
+                <a:solidFill>
+                  <a:srgbClr val="333333"/>
+                </a:solidFill>
+                <a:latin typeface="Segoe UI"/>
+              </a:defRPr>
+            </a:pPr>
+            <a:r>
+              <a:t>  ❌ Q1 (0.75/1.5): Q1a: conclusão correta de descontinuidade de f', mas a justificativa mistura con...</a:t>
+            </a:r>
+          </a:p>
+          <a:p>
+            <a:pPr>
+              <a:spcAft>
+                <a:spcPts val="840"/>
+              </a:spcAft>
+              <a:defRPr sz="1400" b="0">
+                <a:solidFill>
+                  <a:srgbClr val="333333"/>
+                </a:solidFill>
+                <a:latin typeface="Segoe UI"/>
+              </a:defRPr>
+            </a:pPr>
+            <a:r>
+              <a:t>  ✅ Q2 (0.75/1.0): Q2a: correto que y = 4x+2x^2 não satisfaz a edp. Q2b: coeficientes incorretos; r...</a:t>
+            </a:r>
+          </a:p>
+          <a:p>
+            <a:pPr>
+              <a:spcAft>
+                <a:spcPts val="840"/>
+              </a:spcAft>
+              <a:defRPr sz="1400" b="0">
+                <a:solidFill>
+                  <a:srgbClr val="333333"/>
+                </a:solidFill>
+                <a:latin typeface="Segoe UI"/>
+              </a:defRPr>
+            </a:pPr>
+            <a:r>
+              <a:t>  ✅ Q3 (1.0/1.5): Q3a: gráfico em V com vértice em (0,4), constante 4 para -2≤x≤2. Q3b: f'(-1)=0. ...</a:t>
+            </a:r>
+          </a:p>
+          <a:p>
+            <a:pPr>
+              <a:spcAft>
+                <a:spcPts val="840"/>
+              </a:spcAft>
+              <a:defRPr sz="1400" b="0">
+                <a:solidFill>
+                  <a:srgbClr val="333333"/>
+                </a:solidFill>
+                <a:latin typeface="Segoe UI"/>
+              </a:defRPr>
+            </a:pPr>
+            <a:r>
+              <a:t>  ❌ Q4 (0.75/1.0): Q4a: cálculo da derivada da razão está quase completo; falta transcrição final d...</a:t>
+            </a:r>
+          </a:p>
+          <a:p>
+            <a:pPr>
+              <a:spcAft>
+                <a:spcPts val="840"/>
+              </a:spcAft>
+              <a:defRPr sz="1400" b="0">
+                <a:solidFill>
+                  <a:srgbClr val="333333"/>
+                </a:solidFill>
+                <a:latin typeface="Segoe UI"/>
+              </a:defRPr>
+            </a:pPr>
+          </a:p>
+          <a:p>
+            <a:pPr>
+              <a:spcAft>
+                <a:spcPts val="840"/>
+              </a:spcAft>
+              <a:defRPr sz="1400" b="1">
+                <a:solidFill>
+                  <a:srgbClr val="0056A0"/>
+                </a:solidFill>
+                <a:latin typeface="Segoe UI"/>
+              </a:defRPr>
+            </a:pPr>
+            <a:r>
+              <a:t>Feedback geral:</a:t>
+            </a:r>
+          </a:p>
+          <a:p>
+            <a:pPr>
+              <a:spcAft>
+                <a:spcPts val="840"/>
+              </a:spcAft>
+              <a:defRPr sz="1400" b="0">
+                <a:solidFill>
+                  <a:srgbClr val="666666"/>
+                </a:solidFill>
+                <a:latin typeface="Segoe UI"/>
+              </a:defRPr>
+            </a:pPr>
+            <a:r>
+              <a:t>O aluno demonstra domínio considerável de cálculo diferencial com bons resultados, identificando corretamente os pontos-chave. Houve alguns equívocos em justificativas (Q1, Q4) e uma área de incerteza...</a:t>
+            </a:r>
+          </a:p>
+        </p:txBody>
+      </p:sp>
+      <p:sp>
+        <p:nvSpPr>
+          <p:cNvPr id="6" name="TextBox 5"/>
           <p:cNvSpPr txBox="1"/>
           <p:nvPr/>
         </p:nvSpPr>
         <p:spPr>
           <a:xfrm>
-            <a:off x="2926080" y="1325880"/>
-            <a:ext cx="3200400" cy="548640"/>
+            <a:off x="731520" y="5669280"/>
+            <a:ext cx="5486400" cy="365760"/>
           </a:xfrm>
           <a:prstGeom prst="rect">
             <a:avLst/>
@@ -8155,1053 +8085,15 @@
           </a:bodyPr>
           <a:lstStyle/>
           <a:p>
-            <a:pPr algn="l">
-              <a:defRPr sz="1600" b="1">
-                <a:solidFill>
-                  <a:srgbClr val="002B5C"/>
-                </a:solidFill>
-                <a:latin typeface="Segoe UI"/>
-              </a:defRPr>
-            </a:pPr>
-            <a:r>
-              <a:t>Correção</a:t>
-            </a:r>
-          </a:p>
-        </p:txBody>
-      </p:sp>
-      <p:sp>
-        <p:nvSpPr>
-          <p:cNvPr id="8" name="TextBox 7"/>
-          <p:cNvSpPr txBox="1"/>
-          <p:nvPr/>
-        </p:nvSpPr>
-        <p:spPr>
-          <a:xfrm>
-            <a:off x="6217920" y="1325880"/>
-            <a:ext cx="3657600" cy="548640"/>
-          </a:xfrm>
-          <a:prstGeom prst="rect">
-            <a:avLst/>
-          </a:prstGeom>
-          <a:noFill/>
-        </p:spPr>
-        <p:txBody>
-          <a:bodyPr wrap="square">
-            <a:spAutoFit/>
-          </a:bodyPr>
-          <a:lstStyle/>
-          <a:p>
-            <a:pPr algn="l">
-              <a:defRPr sz="1400" b="0">
-                <a:solidFill>
-                  <a:srgbClr val="666666"/>
-                </a:solidFill>
-                <a:latin typeface="Segoe UI"/>
-              </a:defRPr>
-            </a:pPr>
-            <a:r>
-              <a:t>Raciocínio, tipo de erro, potencial</a:t>
-            </a:r>
-          </a:p>
-        </p:txBody>
-      </p:sp>
-      <p:sp>
-        <p:nvSpPr>
-          <p:cNvPr id="9" name="TextBox 8"/>
-          <p:cNvSpPr txBox="1"/>
-          <p:nvPr/>
-        </p:nvSpPr>
-        <p:spPr>
-          <a:xfrm>
-            <a:off x="10058400" y="1325880"/>
-            <a:ext cx="1828800" cy="548640"/>
-          </a:xfrm>
-          <a:prstGeom prst="rect">
-            <a:avLst/>
-          </a:prstGeom>
-          <a:noFill/>
-        </p:spPr>
-        <p:txBody>
-          <a:bodyPr wrap="square">
-            <a:spAutoFit/>
-          </a:bodyPr>
-          <a:lstStyle/>
-          <a:p>
-            <a:r>
-              <a:rPr sz="1100" u="sng">
+            <a:r>
+              <a:rPr sz="1400" u="sng">
                 <a:solidFill>
                   <a:srgbClr val="4A90D9"/>
                 </a:solidFill>
                 <a:latin typeface="Segoe UI"/>
                 <a:hlinkClick r:id="rId2"/>
               </a:rPr>
-              <a:t>📎 Abrir PDF</a:t>
-            </a:r>
-          </a:p>
-        </p:txBody>
-      </p:sp>
-      <p:sp>
-        <p:nvSpPr>
-          <p:cNvPr id="10" name="Rectangle 9"/>
-          <p:cNvSpPr/>
-          <p:nvPr/>
-        </p:nvSpPr>
-        <p:spPr>
-          <a:xfrm>
-            <a:off x="731520" y="2057400"/>
-            <a:ext cx="2011680" cy="594360"/>
-          </a:xfrm>
-          <a:prstGeom prst="rect">
-            <a:avLst/>
-          </a:prstGeom>
-          <a:solidFill>
-            <a:srgbClr val="0056A0"/>
-          </a:solidFill>
-          <a:ln>
-            <a:noFill/>
-          </a:ln>
-        </p:spPr>
-        <p:style>
-          <a:lnRef idx="1">
-            <a:schemeClr val="accent1"/>
-          </a:lnRef>
-          <a:fillRef idx="3">
-            <a:schemeClr val="accent1"/>
-          </a:fillRef>
-          <a:effectRef idx="2">
-            <a:schemeClr val="accent1"/>
-          </a:effectRef>
-          <a:fontRef idx="minor">
-            <a:schemeClr val="lt1"/>
-          </a:fontRef>
-        </p:style>
-        <p:txBody>
-          <a:bodyPr rtlCol="0" anchor="ctr"/>
-          <a:lstStyle/>
-          <a:p>
-            <a:pPr algn="ctr"/>
-          </a:p>
-        </p:txBody>
-      </p:sp>
-      <p:sp>
-        <p:nvSpPr>
-          <p:cNvPr id="11" name="TextBox 10"/>
-          <p:cNvSpPr txBox="1"/>
-          <p:nvPr/>
-        </p:nvSpPr>
-        <p:spPr>
-          <a:xfrm>
-            <a:off x="731520" y="2167128"/>
-            <a:ext cx="2011680" cy="411480"/>
-          </a:xfrm>
-          <a:prstGeom prst="rect">
-            <a:avLst/>
-          </a:prstGeom>
-          <a:noFill/>
-        </p:spPr>
-        <p:txBody>
-          <a:bodyPr wrap="square">
-            <a:spAutoFit/>
-          </a:bodyPr>
-          <a:lstStyle/>
-          <a:p>
-            <a:pPr algn="ctr">
-              <a:defRPr sz="1400" b="1">
-                <a:solidFill>
-                  <a:srgbClr val="FFFFFF"/>
-                </a:solidFill>
-                <a:latin typeface="Segoe UI"/>
-              </a:defRPr>
-            </a:pPr>
-            <a:r>
-              <a:t>Aluno</a:t>
-            </a:r>
-          </a:p>
-        </p:txBody>
-      </p:sp>
-      <p:sp>
-        <p:nvSpPr>
-          <p:cNvPr id="12" name="TextBox 11"/>
-          <p:cNvSpPr txBox="1"/>
-          <p:nvPr/>
-        </p:nvSpPr>
-        <p:spPr>
-          <a:xfrm>
-            <a:off x="2926080" y="2103120"/>
-            <a:ext cx="3200400" cy="548640"/>
-          </a:xfrm>
-          <a:prstGeom prst="rect">
-            <a:avLst/>
-          </a:prstGeom>
-          <a:noFill/>
-        </p:spPr>
-        <p:txBody>
-          <a:bodyPr wrap="square">
-            <a:spAutoFit/>
-          </a:bodyPr>
-          <a:lstStyle/>
-          <a:p>
-            <a:pPr algn="l">
-              <a:defRPr sz="1600" b="1">
-                <a:solidFill>
-                  <a:srgbClr val="002B5C"/>
-                </a:solidFill>
-                <a:latin typeface="Segoe UI"/>
-              </a:defRPr>
-            </a:pPr>
-            <a:r>
-              <a:t>Análise de Habilidades</a:t>
-            </a:r>
-          </a:p>
-        </p:txBody>
-      </p:sp>
-      <p:sp>
-        <p:nvSpPr>
-          <p:cNvPr id="13" name="TextBox 12"/>
-          <p:cNvSpPr txBox="1"/>
-          <p:nvPr/>
-        </p:nvSpPr>
-        <p:spPr>
-          <a:xfrm>
-            <a:off x="6217920" y="2103120"/>
-            <a:ext cx="3657600" cy="548640"/>
-          </a:xfrm>
-          <a:prstGeom prst="rect">
-            <a:avLst/>
-          </a:prstGeom>
-          <a:noFill/>
-        </p:spPr>
-        <p:txBody>
-          <a:bodyPr wrap="square">
-            <a:spAutoFit/>
-          </a:bodyPr>
-          <a:lstStyle/>
-          <a:p>
-            <a:pPr algn="l">
-              <a:defRPr sz="1400" b="0">
-                <a:solidFill>
-                  <a:srgbClr val="666666"/>
-                </a:solidFill>
-                <a:latin typeface="Segoe UI"/>
-              </a:defRPr>
-            </a:pPr>
-            <a:r>
-              <a:t>Perfil cognitivo, padrões, recomendações</a:t>
-            </a:r>
-          </a:p>
-        </p:txBody>
-      </p:sp>
-      <p:sp>
-        <p:nvSpPr>
-          <p:cNvPr id="14" name="TextBox 13"/>
-          <p:cNvSpPr txBox="1"/>
-          <p:nvPr/>
-        </p:nvSpPr>
-        <p:spPr>
-          <a:xfrm>
-            <a:off x="10058400" y="2103120"/>
-            <a:ext cx="1828800" cy="548640"/>
-          </a:xfrm>
-          <a:prstGeom prst="rect">
-            <a:avLst/>
-          </a:prstGeom>
-          <a:noFill/>
-        </p:spPr>
-        <p:txBody>
-          <a:bodyPr wrap="square">
-            <a:spAutoFit/>
-          </a:bodyPr>
-          <a:lstStyle/>
-          <a:p>
-            <a:r>
-              <a:rPr sz="1100" u="sng">
-                <a:solidFill>
-                  <a:srgbClr val="4A90D9"/>
-                </a:solidFill>
-                <a:latin typeface="Segoe UI"/>
-                <a:hlinkClick r:id="rId3"/>
-              </a:rPr>
-              <a:t>📎 Abrir PDF</a:t>
-            </a:r>
-          </a:p>
-        </p:txBody>
-      </p:sp>
-      <p:sp>
-        <p:nvSpPr>
-          <p:cNvPr id="15" name="Rectangle 14"/>
-          <p:cNvSpPr/>
-          <p:nvPr/>
-        </p:nvSpPr>
-        <p:spPr>
-          <a:xfrm>
-            <a:off x="731520" y="2834640"/>
-            <a:ext cx="2011680" cy="594360"/>
-          </a:xfrm>
-          <a:prstGeom prst="rect">
-            <a:avLst/>
-          </a:prstGeom>
-          <a:solidFill>
-            <a:srgbClr val="0056A0"/>
-          </a:solidFill>
-          <a:ln>
-            <a:noFill/>
-          </a:ln>
-        </p:spPr>
-        <p:style>
-          <a:lnRef idx="1">
-            <a:schemeClr val="accent1"/>
-          </a:lnRef>
-          <a:fillRef idx="3">
-            <a:schemeClr val="accent1"/>
-          </a:fillRef>
-          <a:effectRef idx="2">
-            <a:schemeClr val="accent1"/>
-          </a:effectRef>
-          <a:fontRef idx="minor">
-            <a:schemeClr val="lt1"/>
-          </a:fontRef>
-        </p:style>
-        <p:txBody>
-          <a:bodyPr rtlCol="0" anchor="ctr"/>
-          <a:lstStyle/>
-          <a:p>
-            <a:pPr algn="ctr"/>
-          </a:p>
-        </p:txBody>
-      </p:sp>
-      <p:sp>
-        <p:nvSpPr>
-          <p:cNvPr id="16" name="TextBox 15"/>
-          <p:cNvSpPr txBox="1"/>
-          <p:nvPr/>
-        </p:nvSpPr>
-        <p:spPr>
-          <a:xfrm>
-            <a:off x="731520" y="2944368"/>
-            <a:ext cx="2011680" cy="411480"/>
-          </a:xfrm>
-          <a:prstGeom prst="rect">
-            <a:avLst/>
-          </a:prstGeom>
-          <a:noFill/>
-        </p:spPr>
-        <p:txBody>
-          <a:bodyPr wrap="square">
-            <a:spAutoFit/>
-          </a:bodyPr>
-          <a:lstStyle/>
-          <a:p>
-            <a:pPr algn="ctr">
-              <a:defRPr sz="1400" b="1">
-                <a:solidFill>
-                  <a:srgbClr val="FFFFFF"/>
-                </a:solidFill>
-                <a:latin typeface="Segoe UI"/>
-              </a:defRPr>
-            </a:pPr>
-            <a:r>
-              <a:t>Aluno</a:t>
-            </a:r>
-          </a:p>
-        </p:txBody>
-      </p:sp>
-      <p:sp>
-        <p:nvSpPr>
-          <p:cNvPr id="17" name="TextBox 16"/>
-          <p:cNvSpPr txBox="1"/>
-          <p:nvPr/>
-        </p:nvSpPr>
-        <p:spPr>
-          <a:xfrm>
-            <a:off x="2926080" y="2880360"/>
-            <a:ext cx="3200400" cy="548640"/>
-          </a:xfrm>
-          <a:prstGeom prst="rect">
-            <a:avLst/>
-          </a:prstGeom>
-          <a:noFill/>
-        </p:spPr>
-        <p:txBody>
-          <a:bodyPr wrap="square">
-            <a:spAutoFit/>
-          </a:bodyPr>
-          <a:lstStyle/>
-          <a:p>
-            <a:pPr algn="l">
-              <a:defRPr sz="1600" b="1">
-                <a:solidFill>
-                  <a:srgbClr val="002B5C"/>
-                </a:solidFill>
-                <a:latin typeface="Segoe UI"/>
-              </a:defRPr>
-            </a:pPr>
-            <a:r>
-              <a:t>Relatório Final</a:t>
-            </a:r>
-          </a:p>
-        </p:txBody>
-      </p:sp>
-      <p:sp>
-        <p:nvSpPr>
-          <p:cNvPr id="18" name="TextBox 17"/>
-          <p:cNvSpPr txBox="1"/>
-          <p:nvPr/>
-        </p:nvSpPr>
-        <p:spPr>
-          <a:xfrm>
-            <a:off x="6217920" y="2880360"/>
-            <a:ext cx="3657600" cy="548640"/>
-          </a:xfrm>
-          <a:prstGeom prst="rect">
-            <a:avLst/>
-          </a:prstGeom>
-          <a:noFill/>
-        </p:spPr>
-        <p:txBody>
-          <a:bodyPr wrap="square">
-            <a:spAutoFit/>
-          </a:bodyPr>
-          <a:lstStyle/>
-          <a:p>
-            <a:pPr algn="l">
-              <a:defRPr sz="1400" b="0">
-                <a:solidFill>
-                  <a:srgbClr val="666666"/>
-                </a:solidFill>
-                <a:latin typeface="Segoe UI"/>
-              </a:defRPr>
-            </a:pPr>
-            <a:r>
-              <a:t>Narrativa completa para aluno e pais</a:t>
-            </a:r>
-          </a:p>
-        </p:txBody>
-      </p:sp>
-      <p:sp>
-        <p:nvSpPr>
-          <p:cNvPr id="19" name="TextBox 18"/>
-          <p:cNvSpPr txBox="1"/>
-          <p:nvPr/>
-        </p:nvSpPr>
-        <p:spPr>
-          <a:xfrm>
-            <a:off x="10058400" y="2880360"/>
-            <a:ext cx="1828800" cy="548640"/>
-          </a:xfrm>
-          <a:prstGeom prst="rect">
-            <a:avLst/>
-          </a:prstGeom>
-          <a:noFill/>
-        </p:spPr>
-        <p:txBody>
-          <a:bodyPr wrap="square">
-            <a:spAutoFit/>
-          </a:bodyPr>
-          <a:lstStyle/>
-          <a:p>
-            <a:r>
-              <a:rPr sz="1100" u="sng">
-                <a:solidFill>
-                  <a:srgbClr val="4A90D9"/>
-                </a:solidFill>
-                <a:latin typeface="Segoe UI"/>
-                <a:hlinkClick r:id="rId4"/>
-              </a:rPr>
-              <a:t>📎 Abrir PDF</a:t>
-            </a:r>
-          </a:p>
-        </p:txBody>
-      </p:sp>
-      <p:sp>
-        <p:nvSpPr>
-          <p:cNvPr id="20" name="Rectangle 19"/>
-          <p:cNvSpPr/>
-          <p:nvPr/>
-        </p:nvSpPr>
-        <p:spPr>
-          <a:xfrm>
-            <a:off x="731520" y="3611880"/>
-            <a:ext cx="2011680" cy="594360"/>
-          </a:xfrm>
-          <a:prstGeom prst="rect">
-            <a:avLst/>
-          </a:prstGeom>
-          <a:solidFill>
-            <a:srgbClr val="002B5C"/>
-          </a:solidFill>
-          <a:ln>
-            <a:noFill/>
-          </a:ln>
-        </p:spPr>
-        <p:style>
-          <a:lnRef idx="1">
-            <a:schemeClr val="accent1"/>
-          </a:lnRef>
-          <a:fillRef idx="3">
-            <a:schemeClr val="accent1"/>
-          </a:fillRef>
-          <a:effectRef idx="2">
-            <a:schemeClr val="accent1"/>
-          </a:effectRef>
-          <a:fontRef idx="minor">
-            <a:schemeClr val="lt1"/>
-          </a:fontRef>
-        </p:style>
-        <p:txBody>
-          <a:bodyPr rtlCol="0" anchor="ctr"/>
-          <a:lstStyle/>
-          <a:p>
-            <a:pPr algn="ctr"/>
-          </a:p>
-        </p:txBody>
-      </p:sp>
-      <p:sp>
-        <p:nvSpPr>
-          <p:cNvPr id="21" name="TextBox 20"/>
-          <p:cNvSpPr txBox="1"/>
-          <p:nvPr/>
-        </p:nvSpPr>
-        <p:spPr>
-          <a:xfrm>
-            <a:off x="731520" y="3721608"/>
-            <a:ext cx="2011680" cy="411480"/>
-          </a:xfrm>
-          <a:prstGeom prst="rect">
-            <a:avLst/>
-          </a:prstGeom>
-          <a:noFill/>
-        </p:spPr>
-        <p:txBody>
-          <a:bodyPr wrap="square">
-            <a:spAutoFit/>
-          </a:bodyPr>
-          <a:lstStyle/>
-          <a:p>
-            <a:pPr algn="ctr">
-              <a:defRPr sz="1400" b="1">
-                <a:solidFill>
-                  <a:srgbClr val="FFFFFF"/>
-                </a:solidFill>
-                <a:latin typeface="Segoe UI"/>
-              </a:defRPr>
-            </a:pPr>
-            <a:r>
-              <a:t>Turma × Atividade</a:t>
-            </a:r>
-          </a:p>
-        </p:txBody>
-      </p:sp>
-      <p:sp>
-        <p:nvSpPr>
-          <p:cNvPr id="22" name="TextBox 21"/>
-          <p:cNvSpPr txBox="1"/>
-          <p:nvPr/>
-        </p:nvSpPr>
-        <p:spPr>
-          <a:xfrm>
-            <a:off x="2926080" y="3657600"/>
-            <a:ext cx="3200400" cy="548640"/>
-          </a:xfrm>
-          <a:prstGeom prst="rect">
-            <a:avLst/>
-          </a:prstGeom>
-          <a:noFill/>
-        </p:spPr>
-        <p:txBody>
-          <a:bodyPr wrap="square">
-            <a:spAutoFit/>
-          </a:bodyPr>
-          <a:lstStyle/>
-          <a:p>
-            <a:pPr algn="l">
-              <a:defRPr sz="1600" b="1">
-                <a:solidFill>
-                  <a:srgbClr val="002B5C"/>
-                </a:solidFill>
-                <a:latin typeface="Segoe UI"/>
-              </a:defRPr>
-            </a:pPr>
-            <a:r>
-              <a:t>Desempenho Tarefa</a:t>
-            </a:r>
-          </a:p>
-        </p:txBody>
-      </p:sp>
-      <p:sp>
-        <p:nvSpPr>
-          <p:cNvPr id="23" name="TextBox 22"/>
-          <p:cNvSpPr txBox="1"/>
-          <p:nvPr/>
-        </p:nvSpPr>
-        <p:spPr>
-          <a:xfrm>
-            <a:off x="6217920" y="3657600"/>
-            <a:ext cx="3657600" cy="548640"/>
-          </a:xfrm>
-          <a:prstGeom prst="rect">
-            <a:avLst/>
-          </a:prstGeom>
-          <a:noFill/>
-        </p:spPr>
-        <p:txBody>
-          <a:bodyPr wrap="square">
-            <a:spAutoFit/>
-          </a:bodyPr>
-          <a:lstStyle/>
-          <a:p>
-            <a:pPr algn="l">
-              <a:defRPr sz="1400" b="0">
-                <a:solidFill>
-                  <a:srgbClr val="666666"/>
-                </a:solidFill>
-                <a:latin typeface="Segoe UI"/>
-              </a:defRPr>
-            </a:pPr>
-            <a:r>
-              <a:t>Padrões coletivos, exemplos específicos</a:t>
-            </a:r>
-          </a:p>
-        </p:txBody>
-      </p:sp>
-      <p:sp>
-        <p:nvSpPr>
-          <p:cNvPr id="24" name="TextBox 23"/>
-          <p:cNvSpPr txBox="1"/>
-          <p:nvPr/>
-        </p:nvSpPr>
-        <p:spPr>
-          <a:xfrm>
-            <a:off x="10058400" y="3657600"/>
-            <a:ext cx="1828800" cy="548640"/>
-          </a:xfrm>
-          <a:prstGeom prst="rect">
-            <a:avLst/>
-          </a:prstGeom>
-          <a:noFill/>
-        </p:spPr>
-        <p:txBody>
-          <a:bodyPr wrap="square">
-            <a:spAutoFit/>
-          </a:bodyPr>
-          <a:lstStyle/>
-          <a:p>
-            <a:r>
-              <a:rPr sz="1100" u="sng">
-                <a:solidFill>
-                  <a:srgbClr val="4A90D9"/>
-                </a:solidFill>
-                <a:latin typeface="Segoe UI"/>
-                <a:hlinkClick r:id="rId5"/>
-              </a:rPr>
-              <a:t>📎 Abrir PDF</a:t>
-            </a:r>
-          </a:p>
-        </p:txBody>
-      </p:sp>
-      <p:sp>
-        <p:nvSpPr>
-          <p:cNvPr id="25" name="Rectangle 24"/>
-          <p:cNvSpPr/>
-          <p:nvPr/>
-        </p:nvSpPr>
-        <p:spPr>
-          <a:xfrm>
-            <a:off x="731520" y="4389120"/>
-            <a:ext cx="2011680" cy="594360"/>
-          </a:xfrm>
-          <a:prstGeom prst="rect">
-            <a:avLst/>
-          </a:prstGeom>
-          <a:solidFill>
-            <a:srgbClr val="002B5C"/>
-          </a:solidFill>
-          <a:ln>
-            <a:noFill/>
-          </a:ln>
-        </p:spPr>
-        <p:style>
-          <a:lnRef idx="1">
-            <a:schemeClr val="accent1"/>
-          </a:lnRef>
-          <a:fillRef idx="3">
-            <a:schemeClr val="accent1"/>
-          </a:fillRef>
-          <a:effectRef idx="2">
-            <a:schemeClr val="accent1"/>
-          </a:effectRef>
-          <a:fontRef idx="minor">
-            <a:schemeClr val="lt1"/>
-          </a:fontRef>
-        </p:style>
-        <p:txBody>
-          <a:bodyPr rtlCol="0" anchor="ctr"/>
-          <a:lstStyle/>
-          <a:p>
-            <a:pPr algn="ctr"/>
-          </a:p>
-        </p:txBody>
-      </p:sp>
-      <p:sp>
-        <p:nvSpPr>
-          <p:cNvPr id="26" name="TextBox 25"/>
-          <p:cNvSpPr txBox="1"/>
-          <p:nvPr/>
-        </p:nvSpPr>
-        <p:spPr>
-          <a:xfrm>
-            <a:off x="731520" y="4498848"/>
-            <a:ext cx="2011680" cy="411480"/>
-          </a:xfrm>
-          <a:prstGeom prst="rect">
-            <a:avLst/>
-          </a:prstGeom>
-          <a:noFill/>
-        </p:spPr>
-        <p:txBody>
-          <a:bodyPr wrap="square">
-            <a:spAutoFit/>
-          </a:bodyPr>
-          <a:lstStyle/>
-          <a:p>
-            <a:pPr algn="ctr">
-              <a:defRPr sz="1400" b="1">
-                <a:solidFill>
-                  <a:srgbClr val="FFFFFF"/>
-                </a:solidFill>
-                <a:latin typeface="Segoe UI"/>
-              </a:defRPr>
-            </a:pPr>
-            <a:r>
-              <a:t>Turma</a:t>
-            </a:r>
-          </a:p>
-        </p:txBody>
-      </p:sp>
-      <p:sp>
-        <p:nvSpPr>
-          <p:cNvPr id="27" name="TextBox 26"/>
-          <p:cNvSpPr txBox="1"/>
-          <p:nvPr/>
-        </p:nvSpPr>
-        <p:spPr>
-          <a:xfrm>
-            <a:off x="2926080" y="4434840"/>
-            <a:ext cx="3200400" cy="548640"/>
-          </a:xfrm>
-          <a:prstGeom prst="rect">
-            <a:avLst/>
-          </a:prstGeom>
-          <a:noFill/>
-        </p:spPr>
-        <p:txBody>
-          <a:bodyPr wrap="square">
-            <a:spAutoFit/>
-          </a:bodyPr>
-          <a:lstStyle/>
-          <a:p>
-            <a:pPr algn="l">
-              <a:defRPr sz="1600" b="1">
-                <a:solidFill>
-                  <a:srgbClr val="002B5C"/>
-                </a:solidFill>
-                <a:latin typeface="Segoe UI"/>
-              </a:defRPr>
-            </a:pPr>
-            <a:r>
-              <a:t>Desempenho Turma</a:t>
-            </a:r>
-          </a:p>
-        </p:txBody>
-      </p:sp>
-      <p:sp>
-        <p:nvSpPr>
-          <p:cNvPr id="28" name="TextBox 27"/>
-          <p:cNvSpPr txBox="1"/>
-          <p:nvPr/>
-        </p:nvSpPr>
-        <p:spPr>
-          <a:xfrm>
-            <a:off x="6217920" y="4434840"/>
-            <a:ext cx="3657600" cy="548640"/>
-          </a:xfrm>
-          <a:prstGeom prst="rect">
-            <a:avLst/>
-          </a:prstGeom>
-          <a:noFill/>
-        </p:spPr>
-        <p:txBody>
-          <a:bodyPr wrap="square">
-            <a:spAutoFit/>
-          </a:bodyPr>
-          <a:lstStyle/>
-          <a:p>
-            <a:pPr algn="l">
-              <a:defRPr sz="1400" b="0">
-                <a:solidFill>
-                  <a:srgbClr val="666666"/>
-                </a:solidFill>
-                <a:latin typeface="Segoe UI"/>
-              </a:defRPr>
-            </a:pPr>
-            <a:r>
-              <a:t>Evolução ao longo do tempo</a:t>
-            </a:r>
-          </a:p>
-        </p:txBody>
-      </p:sp>
-      <p:sp>
-        <p:nvSpPr>
-          <p:cNvPr id="29" name="TextBox 28"/>
-          <p:cNvSpPr txBox="1"/>
-          <p:nvPr/>
-        </p:nvSpPr>
-        <p:spPr>
-          <a:xfrm>
-            <a:off x="10058400" y="4434840"/>
-            <a:ext cx="1828800" cy="548640"/>
-          </a:xfrm>
-          <a:prstGeom prst="rect">
-            <a:avLst/>
-          </a:prstGeom>
-          <a:noFill/>
-        </p:spPr>
-        <p:txBody>
-          <a:bodyPr wrap="square">
-            <a:spAutoFit/>
-          </a:bodyPr>
-          <a:lstStyle/>
-          <a:p>
-            <a:r>
-              <a:rPr sz="1100" u="sng">
-                <a:solidFill>
-                  <a:srgbClr val="4A90D9"/>
-                </a:solidFill>
-                <a:latin typeface="Segoe UI"/>
-                <a:hlinkClick r:id="rId6"/>
-              </a:rPr>
-              <a:t>📎 Abrir PDF</a:t>
-            </a:r>
-          </a:p>
-        </p:txBody>
-      </p:sp>
-      <p:sp>
-        <p:nvSpPr>
-          <p:cNvPr id="30" name="Rectangle 29"/>
-          <p:cNvSpPr/>
-          <p:nvPr/>
-        </p:nvSpPr>
-        <p:spPr>
-          <a:xfrm>
-            <a:off x="731520" y="5166360"/>
-            <a:ext cx="2011680" cy="594360"/>
-          </a:xfrm>
-          <a:prstGeom prst="rect">
-            <a:avLst/>
-          </a:prstGeom>
-          <a:solidFill>
-            <a:srgbClr val="002B5C"/>
-          </a:solidFill>
-          <a:ln>
-            <a:noFill/>
-          </a:ln>
-        </p:spPr>
-        <p:style>
-          <a:lnRef idx="1">
-            <a:schemeClr val="accent1"/>
-          </a:lnRef>
-          <a:fillRef idx="3">
-            <a:schemeClr val="accent1"/>
-          </a:fillRef>
-          <a:effectRef idx="2">
-            <a:schemeClr val="accent1"/>
-          </a:effectRef>
-          <a:fontRef idx="minor">
-            <a:schemeClr val="lt1"/>
-          </a:fontRef>
-        </p:style>
-        <p:txBody>
-          <a:bodyPr rtlCol="0" anchor="ctr"/>
-          <a:lstStyle/>
-          <a:p>
-            <a:pPr algn="ctr"/>
-          </a:p>
-        </p:txBody>
-      </p:sp>
-      <p:sp>
-        <p:nvSpPr>
-          <p:cNvPr id="31" name="TextBox 30"/>
-          <p:cNvSpPr txBox="1"/>
-          <p:nvPr/>
-        </p:nvSpPr>
-        <p:spPr>
-          <a:xfrm>
-            <a:off x="731520" y="5276088"/>
-            <a:ext cx="2011680" cy="411480"/>
-          </a:xfrm>
-          <a:prstGeom prst="rect">
-            <a:avLst/>
-          </a:prstGeom>
-          <a:noFill/>
-        </p:spPr>
-        <p:txBody>
-          <a:bodyPr wrap="square">
-            <a:spAutoFit/>
-          </a:bodyPr>
-          <a:lstStyle/>
-          <a:p>
-            <a:pPr algn="ctr">
-              <a:defRPr sz="1400" b="1">
-                <a:solidFill>
-                  <a:srgbClr val="FFFFFF"/>
-                </a:solidFill>
-                <a:latin typeface="Segoe UI"/>
-              </a:defRPr>
-            </a:pPr>
-            <a:r>
-              <a:t>Matéria</a:t>
-            </a:r>
-          </a:p>
-        </p:txBody>
-      </p:sp>
-      <p:sp>
-        <p:nvSpPr>
-          <p:cNvPr id="32" name="TextBox 31"/>
-          <p:cNvSpPr txBox="1"/>
-          <p:nvPr/>
-        </p:nvSpPr>
-        <p:spPr>
-          <a:xfrm>
-            <a:off x="2926080" y="5212080"/>
-            <a:ext cx="3200400" cy="548640"/>
-          </a:xfrm>
-          <a:prstGeom prst="rect">
-            <a:avLst/>
-          </a:prstGeom>
-          <a:noFill/>
-        </p:spPr>
-        <p:txBody>
-          <a:bodyPr wrap="square">
-            <a:spAutoFit/>
-          </a:bodyPr>
-          <a:lstStyle/>
-          <a:p>
-            <a:pPr algn="l">
-              <a:defRPr sz="1600" b="1">
-                <a:solidFill>
-                  <a:srgbClr val="002B5C"/>
-                </a:solidFill>
-                <a:latin typeface="Segoe UI"/>
-              </a:defRPr>
-            </a:pPr>
-            <a:r>
-              <a:t>Desempenho Matéria</a:t>
-            </a:r>
-          </a:p>
-        </p:txBody>
-      </p:sp>
-      <p:sp>
-        <p:nvSpPr>
-          <p:cNvPr id="33" name="TextBox 32"/>
-          <p:cNvSpPr txBox="1"/>
-          <p:nvPr/>
-        </p:nvSpPr>
-        <p:spPr>
-          <a:xfrm>
-            <a:off x="6217920" y="5212080"/>
-            <a:ext cx="3657600" cy="548640"/>
-          </a:xfrm>
-          <a:prstGeom prst="rect">
-            <a:avLst/>
-          </a:prstGeom>
-          <a:noFill/>
-        </p:spPr>
-        <p:txBody>
-          <a:bodyPr wrap="square">
-            <a:spAutoFit/>
-          </a:bodyPr>
-          <a:lstStyle/>
-          <a:p>
-            <a:pPr algn="l">
-              <a:defRPr sz="1400" b="0">
-                <a:solidFill>
-                  <a:srgbClr val="666666"/>
-                </a:solidFill>
-                <a:latin typeface="Segoe UI"/>
-              </a:defRPr>
-            </a:pPr>
-            <a:r>
-              <a:t>Eficácia do currículo entre turmas</a:t>
-            </a:r>
-          </a:p>
-        </p:txBody>
-      </p:sp>
-      <p:sp>
-        <p:nvSpPr>
-          <p:cNvPr id="34" name="TextBox 33"/>
-          <p:cNvSpPr txBox="1"/>
-          <p:nvPr/>
-        </p:nvSpPr>
-        <p:spPr>
-          <a:xfrm>
-            <a:off x="10058400" y="5212080"/>
-            <a:ext cx="1828800" cy="548640"/>
-          </a:xfrm>
-          <a:prstGeom prst="rect">
-            <a:avLst/>
-          </a:prstGeom>
-          <a:noFill/>
-        </p:spPr>
-        <p:txBody>
-          <a:bodyPr wrap="square">
-            <a:spAutoFit/>
-          </a:bodyPr>
-          <a:lstStyle/>
-          <a:p>
-            <a:r>
-              <a:rPr sz="1100" u="sng">
-                <a:solidFill>
-                  <a:srgbClr val="4A90D9"/>
-                </a:solidFill>
-                <a:latin typeface="Segoe UI"/>
-                <a:hlinkClick r:id="rId7"/>
-              </a:rPr>
-              <a:t>📎 Abrir PDF</a:t>
-            </a:r>
-          </a:p>
-        </p:txBody>
-      </p:sp>
-      <p:sp>
-        <p:nvSpPr>
-          <p:cNvPr id="35" name="TextBox 34"/>
-          <p:cNvSpPr txBox="1"/>
-          <p:nvPr/>
-        </p:nvSpPr>
-        <p:spPr>
-          <a:xfrm>
-            <a:off x="731520" y="6035040"/>
-            <a:ext cx="10058400" cy="457200"/>
-          </a:xfrm>
-          <a:prstGeom prst="rect">
-            <a:avLst/>
-          </a:prstGeom>
-          <a:noFill/>
-        </p:spPr>
-        <p:txBody>
-          <a:bodyPr wrap="square">
-            <a:spAutoFit/>
-          </a:bodyPr>
-          <a:lstStyle/>
-          <a:p>
-            <a:pPr algn="ctr">
-              <a:defRPr sz="1600" b="1">
-                <a:solidFill>
-                  <a:srgbClr val="0056A0"/>
-                </a:solidFill>
-                <a:latin typeface="Segoe UI"/>
-              </a:defRPr>
-            </a:pPr>
-            <a:r>
-              <a:t>Tudo gerado automaticamente. O professor clica um botão e recebe narrativas pedagógicas reais.</a:t>
+              <a:t>→ Ver relatório completo: 01_correcao_otavio.pdf</a:t>
             </a:r>
           </a:p>
         </p:txBody>
@@ -9215,6 +8107,2992 @@
 </file>
 
 <file path=ppt/slides/slide24.xml><?xml version="1.0" encoding="utf-8"?>
+<p:sld xmlns:a="http://schemas.openxmlformats.org/drawingml/2006/main" xmlns:p="http://schemas.openxmlformats.org/presentationml/2006/main" xmlns:r="http://schemas.openxmlformats.org/officeDocument/2006/relationships">
+  <p:cSld>
+    <p:bg>
+      <p:bgPr>
+        <a:solidFill>
+          <a:srgbClr val="FFFFFF"/>
+        </a:solidFill>
+        <a:effectLst/>
+      </p:bgPr>
+    </p:bg>
+    <p:spTree>
+      <p:nvGrpSpPr>
+        <p:cNvPr id="1" name=""/>
+        <p:cNvGrpSpPr/>
+        <p:nvPr/>
+      </p:nvGrpSpPr>
+      <p:grpSpPr/>
+      <p:sp>
+        <p:nvSpPr>
+          <p:cNvPr id="2" name="Rectangle 1"/>
+          <p:cNvSpPr/>
+          <p:nvPr/>
+        </p:nvSpPr>
+        <p:spPr>
+          <a:xfrm>
+            <a:off x="0" y="0"/>
+            <a:ext cx="12191695" cy="73152"/>
+          </a:xfrm>
+          <a:prstGeom prst="rect">
+            <a:avLst/>
+          </a:prstGeom>
+          <a:solidFill>
+            <a:srgbClr val="0056A0"/>
+          </a:solidFill>
+          <a:ln>
+            <a:noFill/>
+          </a:ln>
+        </p:spPr>
+        <p:style>
+          <a:lnRef idx="1">
+            <a:schemeClr val="accent1"/>
+          </a:lnRef>
+          <a:fillRef idx="3">
+            <a:schemeClr val="accent1"/>
+          </a:fillRef>
+          <a:effectRef idx="2">
+            <a:schemeClr val="accent1"/>
+          </a:effectRef>
+          <a:fontRef idx="minor">
+            <a:schemeClr val="lt1"/>
+          </a:fontRef>
+        </p:style>
+        <p:txBody>
+          <a:bodyPr rtlCol="0" anchor="ctr"/>
+          <a:lstStyle/>
+          <a:p>
+            <a:pPr algn="ctr"/>
+          </a:p>
+        </p:txBody>
+      </p:sp>
+      <p:sp>
+        <p:nvSpPr>
+          <p:cNvPr id="3" name="TextBox 2"/>
+          <p:cNvSpPr txBox="1"/>
+          <p:nvPr/>
+        </p:nvSpPr>
+        <p:spPr>
+          <a:xfrm>
+            <a:off x="731520" y="274320"/>
+            <a:ext cx="10058400" cy="731520"/>
+          </a:xfrm>
+          <a:prstGeom prst="rect">
+            <a:avLst/>
+          </a:prstGeom>
+          <a:noFill/>
+        </p:spPr>
+        <p:txBody>
+          <a:bodyPr wrap="square">
+            <a:spAutoFit/>
+          </a:bodyPr>
+          <a:lstStyle/>
+          <a:p>
+            <a:pPr algn="l">
+              <a:defRPr sz="3000" b="1">
+                <a:solidFill>
+                  <a:srgbClr val="002B5C"/>
+                </a:solidFill>
+                <a:latin typeface="Segoe UI"/>
+              </a:defRPr>
+            </a:pPr>
+            <a:r>
+              <a:t>Desempenho por Tarefa — A Visão da Turma</a:t>
+            </a:r>
+          </a:p>
+        </p:txBody>
+      </p:sp>
+      <p:sp>
+        <p:nvSpPr>
+          <p:cNvPr id="4" name="Rectangle 3"/>
+          <p:cNvSpPr/>
+          <p:nvPr/>
+        </p:nvSpPr>
+        <p:spPr>
+          <a:xfrm>
+            <a:off x="731520" y="960120"/>
+            <a:ext cx="2743200" cy="36576"/>
+          </a:xfrm>
+          <a:prstGeom prst="rect">
+            <a:avLst/>
+          </a:prstGeom>
+          <a:solidFill>
+            <a:srgbClr val="4A90D9"/>
+          </a:solidFill>
+          <a:ln>
+            <a:noFill/>
+          </a:ln>
+        </p:spPr>
+        <p:style>
+          <a:lnRef idx="1">
+            <a:schemeClr val="accent1"/>
+          </a:lnRef>
+          <a:fillRef idx="3">
+            <a:schemeClr val="accent1"/>
+          </a:fillRef>
+          <a:effectRef idx="2">
+            <a:schemeClr val="accent1"/>
+          </a:effectRef>
+          <a:fontRef idx="minor">
+            <a:schemeClr val="lt1"/>
+          </a:fontRef>
+        </p:style>
+        <p:txBody>
+          <a:bodyPr rtlCol="0" anchor="ctr"/>
+          <a:lstStyle/>
+          <a:p>
+            <a:pPr algn="ctr"/>
+          </a:p>
+        </p:txBody>
+      </p:sp>
+      <p:sp>
+        <p:nvSpPr>
+          <p:cNvPr id="5" name="Rectangle 4"/>
+          <p:cNvSpPr/>
+          <p:nvPr/>
+        </p:nvSpPr>
+        <p:spPr>
+          <a:xfrm>
+            <a:off x="548640" y="1188720"/>
+            <a:ext cx="10972800" cy="2011680"/>
+          </a:xfrm>
+          <a:prstGeom prst="rect">
+            <a:avLst/>
+          </a:prstGeom>
+          <a:solidFill>
+            <a:srgbClr val="F0F2F5"/>
+          </a:solidFill>
+          <a:ln>
+            <a:noFill/>
+          </a:ln>
+        </p:spPr>
+        <p:style>
+          <a:lnRef idx="1">
+            <a:schemeClr val="accent1"/>
+          </a:lnRef>
+          <a:fillRef idx="3">
+            <a:schemeClr val="accent1"/>
+          </a:fillRef>
+          <a:effectRef idx="2">
+            <a:schemeClr val="accent1"/>
+          </a:effectRef>
+          <a:fontRef idx="minor">
+            <a:schemeClr val="lt1"/>
+          </a:fontRef>
+        </p:style>
+        <p:txBody>
+          <a:bodyPr rtlCol="0" anchor="ctr"/>
+          <a:lstStyle/>
+          <a:p>
+            <a:pPr algn="ctr"/>
+          </a:p>
+        </p:txBody>
+      </p:sp>
+      <p:sp>
+        <p:nvSpPr>
+          <p:cNvPr id="6" name="Rectangle 5"/>
+          <p:cNvSpPr/>
+          <p:nvPr/>
+        </p:nvSpPr>
+        <p:spPr>
+          <a:xfrm>
+            <a:off x="548640" y="1188720"/>
+            <a:ext cx="54864" cy="2011680"/>
+          </a:xfrm>
+          <a:prstGeom prst="rect">
+            <a:avLst/>
+          </a:prstGeom>
+          <a:solidFill>
+            <a:srgbClr val="0056A0"/>
+          </a:solidFill>
+          <a:ln>
+            <a:noFill/>
+          </a:ln>
+        </p:spPr>
+        <p:style>
+          <a:lnRef idx="1">
+            <a:schemeClr val="accent1"/>
+          </a:lnRef>
+          <a:fillRef idx="3">
+            <a:schemeClr val="accent1"/>
+          </a:fillRef>
+          <a:effectRef idx="2">
+            <a:schemeClr val="accent1"/>
+          </a:effectRef>
+          <a:fontRef idx="minor">
+            <a:schemeClr val="lt1"/>
+          </a:fontRef>
+        </p:style>
+        <p:txBody>
+          <a:bodyPr rtlCol="0" anchor="ctr"/>
+          <a:lstStyle/>
+          <a:p>
+            <a:pPr algn="ctr"/>
+          </a:p>
+        </p:txBody>
+      </p:sp>
+      <p:sp>
+        <p:nvSpPr>
+          <p:cNvPr id="7" name="TextBox 6"/>
+          <p:cNvSpPr txBox="1"/>
+          <p:nvPr/>
+        </p:nvSpPr>
+        <p:spPr>
+          <a:xfrm>
+            <a:off x="822960" y="1371600"/>
+            <a:ext cx="10332720" cy="1645920"/>
+          </a:xfrm>
+          <a:prstGeom prst="rect">
+            <a:avLst/>
+          </a:prstGeom>
+          <a:noFill/>
+        </p:spPr>
+        <p:txBody>
+          <a:bodyPr wrap="square">
+            <a:spAutoFit/>
+          </a:bodyPr>
+          <a:lstStyle/>
+          <a:p>
+            <a:pPr>
+              <a:spcAft>
+                <a:spcPts val="840"/>
+              </a:spcAft>
+              <a:defRPr sz="1400" b="1">
+                <a:solidFill>
+                  <a:srgbClr val="0056A0"/>
+                </a:solidFill>
+                <a:latin typeface="Segoe UI"/>
+              </a:defRPr>
+            </a:pPr>
+            <a:r>
+              <a:t>Trecho real do relatório gerado pelo sistema:</a:t>
+            </a:r>
+          </a:p>
+          <a:p>
+            <a:pPr>
+              <a:spcAft>
+                <a:spcPts val="840"/>
+              </a:spcAft>
+              <a:defRPr sz="1400" b="0">
+                <a:solidFill>
+                  <a:srgbClr val="333333"/>
+                </a:solidFill>
+                <a:latin typeface="Segoe UI"/>
+              </a:defRPr>
+            </a:pPr>
+          </a:p>
+          <a:p>
+            <a:pPr>
+              <a:spcAft>
+                <a:spcPts val="840"/>
+              </a:spcAft>
+              <a:defRPr sz="1400" b="0">
+                <a:solidFill>
+                  <a:srgbClr val="333333"/>
+                </a:solidFill>
+                <a:latin typeface="Segoe UI"/>
+              </a:defRPr>
+            </a:pPr>
+            <a:r>
+              <a:t>A Prova Álgebra-V revelou uma turma em **transição entre domínio operacional e formalização**. Os dados disponíveis mostram um contraste marcante: enquanto um aluno (Ana) demonstra excelência consolidada em todas as dimensões algébricas, o outro (Bruno) revela um padrão recorrente de competência conceitual mascarada por deficiências em documentação e completude de procedimentos.</a:t>
+            </a:r>
+          </a:p>
+        </p:txBody>
+      </p:sp>
+      <p:sp>
+        <p:nvSpPr>
+          <p:cNvPr id="8" name="TextBox 7"/>
+          <p:cNvSpPr txBox="1"/>
+          <p:nvPr/>
+        </p:nvSpPr>
+        <p:spPr>
+          <a:xfrm>
+            <a:off x="731520" y="3474720"/>
+            <a:ext cx="10515600" cy="2286000"/>
+          </a:xfrm>
+          <a:prstGeom prst="rect">
+            <a:avLst/>
+          </a:prstGeom>
+          <a:noFill/>
+        </p:spPr>
+        <p:txBody>
+          <a:bodyPr wrap="square">
+            <a:spAutoFit/>
+          </a:bodyPr>
+          <a:lstStyle/>
+          <a:p>
+            <a:pPr>
+              <a:spcAft>
+                <a:spcPts val="900"/>
+              </a:spcAft>
+              <a:defRPr sz="1500" b="1">
+                <a:solidFill>
+                  <a:srgbClr val="0056A0"/>
+                </a:solidFill>
+                <a:latin typeface="Segoe UI"/>
+              </a:defRPr>
+            </a:pPr>
+            <a:r>
+              <a:t>Diagnóstico gerado pela IA:</a:t>
+            </a:r>
+          </a:p>
+          <a:p>
+            <a:pPr>
+              <a:spcAft>
+                <a:spcPts val="900"/>
+              </a:spcAft>
+              <a:defRPr sz="1500" b="0">
+                <a:solidFill>
+                  <a:srgbClr val="333333"/>
+                </a:solidFill>
+                <a:latin typeface="Segoe UI"/>
+              </a:defRPr>
+            </a:pPr>
+          </a:p>
+          <a:p>
+            <a:pPr>
+              <a:spcAft>
+                <a:spcPts val="900"/>
+              </a:spcAft>
+              <a:defRPr sz="1500" b="0">
+                <a:solidFill>
+                  <a:srgbClr val="333333"/>
+                </a:solidFill>
+                <a:latin typeface="Segoe UI"/>
+              </a:defRPr>
+            </a:pPr>
+            <a:r>
+              <a:t>  Turma em transição entre domínio operacional e formalização.</a:t>
+            </a:r>
+          </a:p>
+          <a:p>
+            <a:pPr>
+              <a:spcAft>
+                <a:spcPts val="900"/>
+              </a:spcAft>
+              <a:defRPr sz="1500" b="0">
+                <a:solidFill>
+                  <a:srgbClr val="333333"/>
+                </a:solidFill>
+                <a:latin typeface="Segoe UI"/>
+              </a:defRPr>
+            </a:pPr>
+            <a:r>
+              <a:t>  Excelência consolidada em alguns alunos vs. deficiências estruturais em outros.</a:t>
+            </a:r>
+          </a:p>
+          <a:p>
+            <a:pPr>
+              <a:spcAft>
+                <a:spcPts val="900"/>
+              </a:spcAft>
+              <a:defRPr sz="1500" b="0">
+                <a:solidFill>
+                  <a:srgbClr val="333333"/>
+                </a:solidFill>
+                <a:latin typeface="Segoe UI"/>
+              </a:defRPr>
+            </a:pPr>
+            <a:r>
+              <a:t>  Competência conceitual mascarada por deficiências em documentação.</a:t>
+            </a:r>
+          </a:p>
+        </p:txBody>
+      </p:sp>
+      <p:sp>
+        <p:nvSpPr>
+          <p:cNvPr id="9" name="TextBox 8"/>
+          <p:cNvSpPr txBox="1"/>
+          <p:nvPr/>
+        </p:nvSpPr>
+        <p:spPr>
+          <a:xfrm>
+            <a:off x="731520" y="5669280"/>
+            <a:ext cx="5486400" cy="365760"/>
+          </a:xfrm>
+          <a:prstGeom prst="rect">
+            <a:avLst/>
+          </a:prstGeom>
+          <a:noFill/>
+        </p:spPr>
+        <p:txBody>
+          <a:bodyPr wrap="square">
+            <a:spAutoFit/>
+          </a:bodyPr>
+          <a:lstStyle/>
+          <a:p>
+            <a:r>
+              <a:rPr sz="1400" u="sng">
+                <a:solidFill>
+                  <a:srgbClr val="4A90D9"/>
+                </a:solidFill>
+                <a:latin typeface="Segoe UI"/>
+                <a:hlinkClick r:id="rId2"/>
+              </a:rPr>
+              <a:t>→ Ver relatório completo: Desempenho Tarefa (Matemática-V)</a:t>
+            </a:r>
+          </a:p>
+        </p:txBody>
+      </p:sp>
+    </p:spTree>
+  </p:cSld>
+  <p:clrMapOvr>
+    <a:masterClrMapping/>
+  </p:clrMapOvr>
+</p:sld>
+</file>
+
+<file path=ppt/slides/slide25.xml><?xml version="1.0" encoding="utf-8"?>
+<p:sld xmlns:a="http://schemas.openxmlformats.org/drawingml/2006/main" xmlns:p="http://schemas.openxmlformats.org/presentationml/2006/main" xmlns:r="http://schemas.openxmlformats.org/officeDocument/2006/relationships">
+  <p:cSld>
+    <p:bg>
+      <p:bgPr>
+        <a:solidFill>
+          <a:srgbClr val="FFFFFF"/>
+        </a:solidFill>
+        <a:effectLst/>
+      </p:bgPr>
+    </p:bg>
+    <p:spTree>
+      <p:nvGrpSpPr>
+        <p:cNvPr id="1" name=""/>
+        <p:cNvGrpSpPr/>
+        <p:nvPr/>
+      </p:nvGrpSpPr>
+      <p:grpSpPr/>
+      <p:sp>
+        <p:nvSpPr>
+          <p:cNvPr id="2" name="Rectangle 1"/>
+          <p:cNvSpPr/>
+          <p:nvPr/>
+        </p:nvSpPr>
+        <p:spPr>
+          <a:xfrm>
+            <a:off x="0" y="0"/>
+            <a:ext cx="12191695" cy="73152"/>
+          </a:xfrm>
+          <a:prstGeom prst="rect">
+            <a:avLst/>
+          </a:prstGeom>
+          <a:solidFill>
+            <a:srgbClr val="0056A0"/>
+          </a:solidFill>
+          <a:ln>
+            <a:noFill/>
+          </a:ln>
+        </p:spPr>
+        <p:style>
+          <a:lnRef idx="1">
+            <a:schemeClr val="accent1"/>
+          </a:lnRef>
+          <a:fillRef idx="3">
+            <a:schemeClr val="accent1"/>
+          </a:fillRef>
+          <a:effectRef idx="2">
+            <a:schemeClr val="accent1"/>
+          </a:effectRef>
+          <a:fontRef idx="minor">
+            <a:schemeClr val="lt1"/>
+          </a:fontRef>
+        </p:style>
+        <p:txBody>
+          <a:bodyPr rtlCol="0" anchor="ctr"/>
+          <a:lstStyle/>
+          <a:p>
+            <a:pPr algn="ctr"/>
+          </a:p>
+        </p:txBody>
+      </p:sp>
+      <p:sp>
+        <p:nvSpPr>
+          <p:cNvPr id="3" name="TextBox 2"/>
+          <p:cNvSpPr txBox="1"/>
+          <p:nvPr/>
+        </p:nvSpPr>
+        <p:spPr>
+          <a:xfrm>
+            <a:off x="731520" y="274320"/>
+            <a:ext cx="10058400" cy="731520"/>
+          </a:xfrm>
+          <a:prstGeom prst="rect">
+            <a:avLst/>
+          </a:prstGeom>
+          <a:noFill/>
+        </p:spPr>
+        <p:txBody>
+          <a:bodyPr wrap="square">
+            <a:spAutoFit/>
+          </a:bodyPr>
+          <a:lstStyle/>
+          <a:p>
+            <a:pPr algn="l">
+              <a:defRPr sz="3000" b="1">
+                <a:solidFill>
+                  <a:srgbClr val="002B5C"/>
+                </a:solidFill>
+                <a:latin typeface="Segoe UI"/>
+              </a:defRPr>
+            </a:pPr>
+            <a:r>
+              <a:t>Desempenho por Matéria — Análise Cross-Turma</a:t>
+            </a:r>
+          </a:p>
+        </p:txBody>
+      </p:sp>
+      <p:sp>
+        <p:nvSpPr>
+          <p:cNvPr id="4" name="Rectangle 3"/>
+          <p:cNvSpPr/>
+          <p:nvPr/>
+        </p:nvSpPr>
+        <p:spPr>
+          <a:xfrm>
+            <a:off x="731520" y="960120"/>
+            <a:ext cx="2743200" cy="36576"/>
+          </a:xfrm>
+          <a:prstGeom prst="rect">
+            <a:avLst/>
+          </a:prstGeom>
+          <a:solidFill>
+            <a:srgbClr val="4A90D9"/>
+          </a:solidFill>
+          <a:ln>
+            <a:noFill/>
+          </a:ln>
+        </p:spPr>
+        <p:style>
+          <a:lnRef idx="1">
+            <a:schemeClr val="accent1"/>
+          </a:lnRef>
+          <a:fillRef idx="3">
+            <a:schemeClr val="accent1"/>
+          </a:fillRef>
+          <a:effectRef idx="2">
+            <a:schemeClr val="accent1"/>
+          </a:effectRef>
+          <a:fontRef idx="minor">
+            <a:schemeClr val="lt1"/>
+          </a:fontRef>
+        </p:style>
+        <p:txBody>
+          <a:bodyPr rtlCol="0" anchor="ctr"/>
+          <a:lstStyle/>
+          <a:p>
+            <a:pPr algn="ctr"/>
+          </a:p>
+        </p:txBody>
+      </p:sp>
+      <p:sp>
+        <p:nvSpPr>
+          <p:cNvPr id="5" name="Rectangle 4"/>
+          <p:cNvSpPr/>
+          <p:nvPr/>
+        </p:nvSpPr>
+        <p:spPr>
+          <a:xfrm>
+            <a:off x="548640" y="1188720"/>
+            <a:ext cx="10972800" cy="2194560"/>
+          </a:xfrm>
+          <a:prstGeom prst="rect">
+            <a:avLst/>
+          </a:prstGeom>
+          <a:solidFill>
+            <a:srgbClr val="F0F2F5"/>
+          </a:solidFill>
+          <a:ln>
+            <a:noFill/>
+          </a:ln>
+        </p:spPr>
+        <p:style>
+          <a:lnRef idx="1">
+            <a:schemeClr val="accent1"/>
+          </a:lnRef>
+          <a:fillRef idx="3">
+            <a:schemeClr val="accent1"/>
+          </a:fillRef>
+          <a:effectRef idx="2">
+            <a:schemeClr val="accent1"/>
+          </a:effectRef>
+          <a:fontRef idx="minor">
+            <a:schemeClr val="lt1"/>
+          </a:fontRef>
+        </p:style>
+        <p:txBody>
+          <a:bodyPr rtlCol="0" anchor="ctr"/>
+          <a:lstStyle/>
+          <a:p>
+            <a:pPr algn="ctr"/>
+          </a:p>
+        </p:txBody>
+      </p:sp>
+      <p:sp>
+        <p:nvSpPr>
+          <p:cNvPr id="6" name="Rectangle 5"/>
+          <p:cNvSpPr/>
+          <p:nvPr/>
+        </p:nvSpPr>
+        <p:spPr>
+          <a:xfrm>
+            <a:off x="548640" y="1188720"/>
+            <a:ext cx="54864" cy="2194560"/>
+          </a:xfrm>
+          <a:prstGeom prst="rect">
+            <a:avLst/>
+          </a:prstGeom>
+          <a:solidFill>
+            <a:srgbClr val="0056A0"/>
+          </a:solidFill>
+          <a:ln>
+            <a:noFill/>
+          </a:ln>
+        </p:spPr>
+        <p:style>
+          <a:lnRef idx="1">
+            <a:schemeClr val="accent1"/>
+          </a:lnRef>
+          <a:fillRef idx="3">
+            <a:schemeClr val="accent1"/>
+          </a:fillRef>
+          <a:effectRef idx="2">
+            <a:schemeClr val="accent1"/>
+          </a:effectRef>
+          <a:fontRef idx="minor">
+            <a:schemeClr val="lt1"/>
+          </a:fontRef>
+        </p:style>
+        <p:txBody>
+          <a:bodyPr rtlCol="0" anchor="ctr"/>
+          <a:lstStyle/>
+          <a:p>
+            <a:pPr algn="ctr"/>
+          </a:p>
+        </p:txBody>
+      </p:sp>
+      <p:sp>
+        <p:nvSpPr>
+          <p:cNvPr id="7" name="TextBox 6"/>
+          <p:cNvSpPr txBox="1"/>
+          <p:nvPr/>
+        </p:nvSpPr>
+        <p:spPr>
+          <a:xfrm>
+            <a:off x="822960" y="1371600"/>
+            <a:ext cx="10332720" cy="1828800"/>
+          </a:xfrm>
+          <a:prstGeom prst="rect">
+            <a:avLst/>
+          </a:prstGeom>
+          <a:noFill/>
+        </p:spPr>
+        <p:txBody>
+          <a:bodyPr wrap="square">
+            <a:spAutoFit/>
+          </a:bodyPr>
+          <a:lstStyle/>
+          <a:p>
+            <a:pPr>
+              <a:spcAft>
+                <a:spcPts val="840"/>
+              </a:spcAft>
+              <a:defRPr sz="1400" b="1">
+                <a:solidFill>
+                  <a:srgbClr val="0056A0"/>
+                </a:solidFill>
+                <a:latin typeface="Segoe UI"/>
+              </a:defRPr>
+            </a:pPr>
+            <a:r>
+              <a:t>Trecho real — Síntese Cross-Turma (Matemática-V):</a:t>
+            </a:r>
+          </a:p>
+          <a:p>
+            <a:pPr>
+              <a:spcAft>
+                <a:spcPts val="840"/>
+              </a:spcAft>
+              <a:defRPr sz="1400" b="0">
+                <a:solidFill>
+                  <a:srgbClr val="333333"/>
+                </a:solidFill>
+                <a:latin typeface="Segoe UI"/>
+              </a:defRPr>
+            </a:pPr>
+          </a:p>
+          <a:p>
+            <a:pPr>
+              <a:spcAft>
+                <a:spcPts val="840"/>
+              </a:spcAft>
+              <a:defRPr sz="1400" b="0">
+                <a:solidFill>
+                  <a:srgbClr val="333333"/>
+                </a:solidFill>
+                <a:latin typeface="Segoe UI"/>
+              </a:defRPr>
+            </a:pPr>
+            <a:r>
+              <a:t>Matemática-V apresenta um quadro misto e polarizado. O aprendizado não é</a:t>
+            </a:r>
+          </a:p>
+          <a:p>
+            <a:pPr>
+              <a:spcAft>
+                <a:spcPts val="840"/>
+              </a:spcAft>
+              <a:defRPr sz="1400" b="0">
+                <a:solidFill>
+                  <a:srgbClr val="333333"/>
+                </a:solidFill>
+                <a:latin typeface="Segoe UI"/>
+              </a:defRPr>
+            </a:pPr>
+            <a:r>
+              <a:t>uniforme: há alunos com domínio excepcional, mas também alunos com deficiências</a:t>
+            </a:r>
+          </a:p>
+          <a:p>
+            <a:pPr>
+              <a:spcAft>
+                <a:spcPts val="840"/>
+              </a:spcAft>
+              <a:defRPr sz="1400" b="0">
+                <a:solidFill>
+                  <a:srgbClr val="333333"/>
+                </a:solidFill>
+                <a:latin typeface="Segoe UI"/>
+              </a:defRPr>
+            </a:pPr>
+            <a:r>
+              <a:t>estruturais significativas.</a:t>
+            </a:r>
+          </a:p>
+        </p:txBody>
+      </p:sp>
+      <p:sp>
+        <p:nvSpPr>
+          <p:cNvPr id="8" name="TextBox 7"/>
+          <p:cNvSpPr txBox="1"/>
+          <p:nvPr/>
+        </p:nvSpPr>
+        <p:spPr>
+          <a:xfrm>
+            <a:off x="731520" y="3657600"/>
+            <a:ext cx="10515600" cy="2011680"/>
+          </a:xfrm>
+          <a:prstGeom prst="rect">
+            <a:avLst/>
+          </a:prstGeom>
+          <a:noFill/>
+        </p:spPr>
+        <p:txBody>
+          <a:bodyPr wrap="square">
+            <a:spAutoFit/>
+          </a:bodyPr>
+          <a:lstStyle/>
+          <a:p>
+            <a:pPr>
+              <a:spcAft>
+                <a:spcPts val="840"/>
+              </a:spcAft>
+              <a:defRPr sz="1400" b="1">
+                <a:solidFill>
+                  <a:srgbClr val="0056A0"/>
+                </a:solidFill>
+                <a:latin typeface="Segoe UI"/>
+              </a:defRPr>
+            </a:pPr>
+            <a:r>
+              <a:t>Comparação entre turmas (gerada automaticamente):</a:t>
+            </a:r>
+          </a:p>
+          <a:p>
+            <a:pPr>
+              <a:spcAft>
+                <a:spcPts val="840"/>
+              </a:spcAft>
+              <a:defRPr sz="1400" b="0">
+                <a:solidFill>
+                  <a:srgbClr val="333333"/>
+                </a:solidFill>
+                <a:latin typeface="Segoe UI"/>
+              </a:defRPr>
+            </a:pPr>
+          </a:p>
+          <a:p>
+            <a:pPr>
+              <a:spcAft>
+                <a:spcPts val="840"/>
+              </a:spcAft>
+              <a:defRPr sz="1400" b="0">
+                <a:solidFill>
+                  <a:srgbClr val="333333"/>
+                </a:solidFill>
+                <a:latin typeface="Segoe UI"/>
+              </a:defRPr>
+            </a:pPr>
+            <a:r>
+              <a:t>Alpha-V:  Média Álgebra 6.63  |  Média Geometria 6.88  |  Polarizado</a:t>
+            </a:r>
+          </a:p>
+          <a:p>
+            <a:pPr>
+              <a:spcAft>
+                <a:spcPts val="840"/>
+              </a:spcAft>
+              <a:defRPr sz="1400" b="0">
+                <a:solidFill>
+                  <a:srgbClr val="333333"/>
+                </a:solidFill>
+                <a:latin typeface="Segoe UI"/>
+              </a:defRPr>
+            </a:pPr>
+            <a:r>
+              <a:t>Beta-V:   Média Álgebra ~5.6   |  Média Geometria ~5.95  |  Intermediário</a:t>
+            </a:r>
+          </a:p>
+          <a:p>
+            <a:pPr>
+              <a:spcAft>
+                <a:spcPts val="840"/>
+              </a:spcAft>
+              <a:defRPr sz="1400" b="0">
+                <a:solidFill>
+                  <a:srgbClr val="333333"/>
+                </a:solidFill>
+                <a:latin typeface="Segoe UI"/>
+              </a:defRPr>
+            </a:pPr>
+          </a:p>
+          <a:p>
+            <a:pPr>
+              <a:spcAft>
+                <a:spcPts val="840"/>
+              </a:spcAft>
+              <a:defRPr sz="1400" b="1">
+                <a:solidFill>
+                  <a:srgbClr val="002B5C"/>
+                </a:solidFill>
+                <a:latin typeface="Segoe UI"/>
+              </a:defRPr>
+            </a:pPr>
+            <a:r>
+              <a:t>Diagnóstico: não é um problema de capacidade cognitiva geral, mas de lacunas</a:t>
+            </a:r>
+          </a:p>
+          <a:p>
+            <a:pPr>
+              <a:spcAft>
+                <a:spcPts val="840"/>
+              </a:spcAft>
+              <a:defRPr sz="1400" b="1">
+                <a:solidFill>
+                  <a:srgbClr val="002B5C"/>
+                </a:solidFill>
+                <a:latin typeface="Segoe UI"/>
+              </a:defRPr>
+            </a:pPr>
+            <a:r>
+              <a:t>específicas, falta de metodologia, e deficiências em comunicação matemática.</a:t>
+            </a:r>
+          </a:p>
+        </p:txBody>
+      </p:sp>
+      <p:sp>
+        <p:nvSpPr>
+          <p:cNvPr id="9" name="TextBox 8"/>
+          <p:cNvSpPr txBox="1"/>
+          <p:nvPr/>
+        </p:nvSpPr>
+        <p:spPr>
+          <a:xfrm>
+            <a:off x="731520" y="5943600"/>
+            <a:ext cx="7315200" cy="365760"/>
+          </a:xfrm>
+          <a:prstGeom prst="rect">
+            <a:avLst/>
+          </a:prstGeom>
+          <a:noFill/>
+        </p:spPr>
+        <p:txBody>
+          <a:bodyPr wrap="square">
+            <a:spAutoFit/>
+          </a:bodyPr>
+          <a:lstStyle/>
+          <a:p>
+            <a:r>
+              <a:rPr sz="1400" u="sng">
+                <a:solidFill>
+                  <a:srgbClr val="4A90D9"/>
+                </a:solidFill>
+                <a:latin typeface="Segoe UI"/>
+                <a:hlinkClick r:id="rId2"/>
+              </a:rPr>
+              <a:t>→ Ver relatório completo: Desempenho Matéria (Matemática-V)</a:t>
+            </a:r>
+          </a:p>
+        </p:txBody>
+      </p:sp>
+    </p:spTree>
+  </p:cSld>
+  <p:clrMapOvr>
+    <a:masterClrMapping/>
+  </p:clrMapOvr>
+</p:sld>
+</file>
+
+<file path=ppt/slides/slide26.xml><?xml version="1.0" encoding="utf-8"?>
+<p:sld xmlns:a="http://schemas.openxmlformats.org/drawingml/2006/main" xmlns:p="http://schemas.openxmlformats.org/presentationml/2006/main" xmlns:r="http://schemas.openxmlformats.org/officeDocument/2006/relationships">
+  <p:cSld>
+    <p:bg>
+      <p:bgPr>
+        <a:solidFill>
+          <a:srgbClr val="FFFFFF"/>
+        </a:solidFill>
+        <a:effectLst/>
+      </p:bgPr>
+    </p:bg>
+    <p:spTree>
+      <p:nvGrpSpPr>
+        <p:cNvPr id="1" name=""/>
+        <p:cNvGrpSpPr/>
+        <p:nvPr/>
+      </p:nvGrpSpPr>
+      <p:grpSpPr/>
+      <p:sp>
+        <p:nvSpPr>
+          <p:cNvPr id="2" name="Rectangle 1"/>
+          <p:cNvSpPr/>
+          <p:nvPr/>
+        </p:nvSpPr>
+        <p:spPr>
+          <a:xfrm>
+            <a:off x="0" y="0"/>
+            <a:ext cx="12191695" cy="73152"/>
+          </a:xfrm>
+          <a:prstGeom prst="rect">
+            <a:avLst/>
+          </a:prstGeom>
+          <a:solidFill>
+            <a:srgbClr val="0056A0"/>
+          </a:solidFill>
+          <a:ln>
+            <a:noFill/>
+          </a:ln>
+        </p:spPr>
+        <p:style>
+          <a:lnRef idx="1">
+            <a:schemeClr val="accent1"/>
+          </a:lnRef>
+          <a:fillRef idx="3">
+            <a:schemeClr val="accent1"/>
+          </a:fillRef>
+          <a:effectRef idx="2">
+            <a:schemeClr val="accent1"/>
+          </a:effectRef>
+          <a:fontRef idx="minor">
+            <a:schemeClr val="lt1"/>
+          </a:fontRef>
+        </p:style>
+        <p:txBody>
+          <a:bodyPr rtlCol="0" anchor="ctr"/>
+          <a:lstStyle/>
+          <a:p>
+            <a:pPr algn="ctr"/>
+          </a:p>
+        </p:txBody>
+      </p:sp>
+      <p:sp>
+        <p:nvSpPr>
+          <p:cNvPr id="3" name="TextBox 2"/>
+          <p:cNvSpPr txBox="1"/>
+          <p:nvPr/>
+        </p:nvSpPr>
+        <p:spPr>
+          <a:xfrm>
+            <a:off x="731520" y="274320"/>
+            <a:ext cx="10058400" cy="731520"/>
+          </a:xfrm>
+          <a:prstGeom prst="rect">
+            <a:avLst/>
+          </a:prstGeom>
+          <a:noFill/>
+        </p:spPr>
+        <p:txBody>
+          <a:bodyPr wrap="square">
+            <a:spAutoFit/>
+          </a:bodyPr>
+          <a:lstStyle/>
+          <a:p>
+            <a:pPr algn="l">
+              <a:defRPr sz="3000" b="1">
+                <a:solidFill>
+                  <a:srgbClr val="002B5C"/>
+                </a:solidFill>
+                <a:latin typeface="Segoe UI"/>
+              </a:defRPr>
+            </a:pPr>
+            <a:r>
+              <a:t>Relatório Longitudinal — A Jornada do Aluno</a:t>
+            </a:r>
+          </a:p>
+        </p:txBody>
+      </p:sp>
+      <p:sp>
+        <p:nvSpPr>
+          <p:cNvPr id="4" name="Rectangle 3"/>
+          <p:cNvSpPr/>
+          <p:nvPr/>
+        </p:nvSpPr>
+        <p:spPr>
+          <a:xfrm>
+            <a:off x="731520" y="960120"/>
+            <a:ext cx="2743200" cy="36576"/>
+          </a:xfrm>
+          <a:prstGeom prst="rect">
+            <a:avLst/>
+          </a:prstGeom>
+          <a:solidFill>
+            <a:srgbClr val="4A90D9"/>
+          </a:solidFill>
+          <a:ln>
+            <a:noFill/>
+          </a:ln>
+        </p:spPr>
+        <p:style>
+          <a:lnRef idx="1">
+            <a:schemeClr val="accent1"/>
+          </a:lnRef>
+          <a:fillRef idx="3">
+            <a:schemeClr val="accent1"/>
+          </a:fillRef>
+          <a:effectRef idx="2">
+            <a:schemeClr val="accent1"/>
+          </a:effectRef>
+          <a:fontRef idx="minor">
+            <a:schemeClr val="lt1"/>
+          </a:fontRef>
+        </p:style>
+        <p:txBody>
+          <a:bodyPr rtlCol="0" anchor="ctr"/>
+          <a:lstStyle/>
+          <a:p>
+            <a:pPr algn="ctr"/>
+          </a:p>
+        </p:txBody>
+      </p:sp>
+      <p:sp>
+        <p:nvSpPr>
+          <p:cNvPr id="5" name="Rectangle 4"/>
+          <p:cNvSpPr/>
+          <p:nvPr/>
+        </p:nvSpPr>
+        <p:spPr>
+          <a:xfrm>
+            <a:off x="548640" y="1188720"/>
+            <a:ext cx="10972800" cy="1463040"/>
+          </a:xfrm>
+          <a:prstGeom prst="rect">
+            <a:avLst/>
+          </a:prstGeom>
+          <a:solidFill>
+            <a:srgbClr val="F0F2F5"/>
+          </a:solidFill>
+          <a:ln>
+            <a:noFill/>
+          </a:ln>
+        </p:spPr>
+        <p:style>
+          <a:lnRef idx="1">
+            <a:schemeClr val="accent1"/>
+          </a:lnRef>
+          <a:fillRef idx="3">
+            <a:schemeClr val="accent1"/>
+          </a:fillRef>
+          <a:effectRef idx="2">
+            <a:schemeClr val="accent1"/>
+          </a:effectRef>
+          <a:fontRef idx="minor">
+            <a:schemeClr val="lt1"/>
+          </a:fontRef>
+        </p:style>
+        <p:txBody>
+          <a:bodyPr rtlCol="0" anchor="ctr"/>
+          <a:lstStyle/>
+          <a:p>
+            <a:pPr algn="ctr"/>
+          </a:p>
+        </p:txBody>
+      </p:sp>
+      <p:sp>
+        <p:nvSpPr>
+          <p:cNvPr id="6" name="Rectangle 5"/>
+          <p:cNvSpPr/>
+          <p:nvPr/>
+        </p:nvSpPr>
+        <p:spPr>
+          <a:xfrm>
+            <a:off x="548640" y="1188720"/>
+            <a:ext cx="54864" cy="1463040"/>
+          </a:xfrm>
+          <a:prstGeom prst="rect">
+            <a:avLst/>
+          </a:prstGeom>
+          <a:solidFill>
+            <a:srgbClr val="0056A0"/>
+          </a:solidFill>
+          <a:ln>
+            <a:noFill/>
+          </a:ln>
+        </p:spPr>
+        <p:style>
+          <a:lnRef idx="1">
+            <a:schemeClr val="accent1"/>
+          </a:lnRef>
+          <a:fillRef idx="3">
+            <a:schemeClr val="accent1"/>
+          </a:fillRef>
+          <a:effectRef idx="2">
+            <a:schemeClr val="accent1"/>
+          </a:effectRef>
+          <a:fontRef idx="minor">
+            <a:schemeClr val="lt1"/>
+          </a:fontRef>
+        </p:style>
+        <p:txBody>
+          <a:bodyPr rtlCol="0" anchor="ctr"/>
+          <a:lstStyle/>
+          <a:p>
+            <a:pPr algn="ctr"/>
+          </a:p>
+        </p:txBody>
+      </p:sp>
+      <p:sp>
+        <p:nvSpPr>
+          <p:cNvPr id="7" name="TextBox 6"/>
+          <p:cNvSpPr txBox="1"/>
+          <p:nvPr/>
+        </p:nvSpPr>
+        <p:spPr>
+          <a:xfrm>
+            <a:off x="822960" y="1280160"/>
+            <a:ext cx="10332720" cy="1280160"/>
+          </a:xfrm>
+          <a:prstGeom prst="rect">
+            <a:avLst/>
+          </a:prstGeom>
+          <a:noFill/>
+        </p:spPr>
+        <p:txBody>
+          <a:bodyPr wrap="square">
+            <a:spAutoFit/>
+          </a:bodyPr>
+          <a:lstStyle/>
+          <a:p>
+            <a:pPr>
+              <a:spcAft>
+                <a:spcPts val="840"/>
+              </a:spcAft>
+              <a:defRPr sz="1400" b="1">
+                <a:solidFill>
+                  <a:srgbClr val="0056A0"/>
+                </a:solidFill>
+                <a:latin typeface="Segoe UI"/>
+              </a:defRPr>
+            </a:pPr>
+            <a:r>
+              <a:t>Relatório real — 7 páginas, 9 disciplinas, 4 anos (2021-2025):</a:t>
+            </a:r>
+          </a:p>
+          <a:p>
+            <a:pPr>
+              <a:spcAft>
+                <a:spcPts val="840"/>
+              </a:spcAft>
+              <a:defRPr sz="1400" b="0">
+                <a:solidFill>
+                  <a:srgbClr val="333333"/>
+                </a:solidFill>
+                <a:latin typeface="Segoe UI"/>
+              </a:defRPr>
+            </a:pPr>
+            <a:r>
+              <a:t>"Otávio demonstra trajetória acadêmica caracterizada por excelência técnica crescente,</a:t>
+            </a:r>
+          </a:p>
+          <a:p>
+            <a:pPr>
+              <a:spcAft>
+                <a:spcPts val="840"/>
+              </a:spcAft>
+              <a:defRPr sz="1400" b="0">
+                <a:solidFill>
+                  <a:srgbClr val="333333"/>
+                </a:solidFill>
+                <a:latin typeface="Segoe UI"/>
+              </a:defRPr>
+            </a:pPr>
+            <a:r>
+              <a:t>com evolução de fundamentos matemáticos para aplicações sofisticadas. Fragilidades</a:t>
+            </a:r>
+          </a:p>
+          <a:p>
+            <a:pPr>
+              <a:spcAft>
+                <a:spcPts val="840"/>
+              </a:spcAft>
+              <a:defRPr sz="1400" b="0">
+                <a:solidFill>
+                  <a:srgbClr val="333333"/>
+                </a:solidFill>
+                <a:latin typeface="Segoe UI"/>
+              </a:defRPr>
+            </a:pPr>
+            <a:r>
+              <a:t>persistentes em rigor teórico representam um teto de vidro corrigível."</a:t>
+            </a:r>
+          </a:p>
+        </p:txBody>
+      </p:sp>
+      <p:sp>
+        <p:nvSpPr>
+          <p:cNvPr id="8" name="TextBox 7"/>
+          <p:cNvSpPr txBox="1"/>
+          <p:nvPr/>
+        </p:nvSpPr>
+        <p:spPr>
+          <a:xfrm>
+            <a:off x="731520" y="2926080"/>
+            <a:ext cx="5303520" cy="3200400"/>
+          </a:xfrm>
+          <a:prstGeom prst="rect">
+            <a:avLst/>
+          </a:prstGeom>
+          <a:noFill/>
+        </p:spPr>
+        <p:txBody>
+          <a:bodyPr wrap="square">
+            <a:spAutoFit/>
+          </a:bodyPr>
+          <a:lstStyle/>
+          <a:p>
+            <a:pPr>
+              <a:spcAft>
+                <a:spcPts val="840"/>
+              </a:spcAft>
+              <a:defRPr sz="1400" b="1">
+                <a:solidFill>
+                  <a:srgbClr val="0056A0"/>
+                </a:solidFill>
+                <a:latin typeface="Segoe UI"/>
+              </a:defRPr>
+            </a:pPr>
+            <a:r>
+              <a:t>O que o relatório longitudinal rastreia:</a:t>
+            </a:r>
+          </a:p>
+          <a:p>
+            <a:pPr>
+              <a:spcAft>
+                <a:spcPts val="840"/>
+              </a:spcAft>
+              <a:defRPr sz="1400" b="0">
+                <a:solidFill>
+                  <a:srgbClr val="333333"/>
+                </a:solidFill>
+                <a:latin typeface="Segoe UI"/>
+              </a:defRPr>
+            </a:pPr>
+          </a:p>
+          <a:p>
+            <a:pPr>
+              <a:spcAft>
+                <a:spcPts val="840"/>
+              </a:spcAft>
+              <a:defRPr sz="1400" b="0">
+                <a:solidFill>
+                  <a:srgbClr val="333333"/>
+                </a:solidFill>
+                <a:latin typeface="Segoe UI"/>
+              </a:defRPr>
+            </a:pPr>
+            <a:r>
+              <a:t>   •  Evolução de competências ao longo dos anos</a:t>
+            </a:r>
+          </a:p>
+          <a:p>
+            <a:pPr>
+              <a:spcAft>
+                <a:spcPts val="840"/>
+              </a:spcAft>
+              <a:defRPr sz="1400" b="0">
+                <a:solidFill>
+                  <a:srgbClr val="333333"/>
+                </a:solidFill>
+                <a:latin typeface="Segoe UI"/>
+              </a:defRPr>
+            </a:pPr>
+            <a:r>
+              <a:t>       Técnica: 7→9  |  Programação: 5→8.5  |  Rigor: 4→5</a:t>
+            </a:r>
+          </a:p>
+          <a:p>
+            <a:pPr>
+              <a:spcAft>
+                <a:spcPts val="840"/>
+              </a:spcAft>
+              <a:defRPr sz="1400" b="0">
+                <a:solidFill>
+                  <a:srgbClr val="333333"/>
+                </a:solidFill>
+                <a:latin typeface="Segoe UI"/>
+              </a:defRPr>
+            </a:pPr>
+            <a:r>
+              <a:t>   •  Padrões persistentes entre disciplinas</a:t>
+            </a:r>
+          </a:p>
+          <a:p>
+            <a:pPr>
+              <a:spcAft>
+                <a:spcPts val="840"/>
+              </a:spcAft>
+              <a:defRPr sz="1400" b="0">
+                <a:solidFill>
+                  <a:srgbClr val="333333"/>
+                </a:solidFill>
+                <a:latin typeface="Segoe UI"/>
+              </a:defRPr>
+            </a:pPr>
+            <a:r>
+              <a:t>       "Executor competente, verificador negligente"</a:t>
+            </a:r>
+          </a:p>
+          <a:p>
+            <a:pPr>
+              <a:spcAft>
+                <a:spcPts val="840"/>
+              </a:spcAft>
+              <a:defRPr sz="1400" b="0">
+                <a:solidFill>
+                  <a:srgbClr val="333333"/>
+                </a:solidFill>
+                <a:latin typeface="Segoe UI"/>
+              </a:defRPr>
+            </a:pPr>
+            <a:r>
+              <a:t>   •  Comparação com perfil típico de aluno da EPGE</a:t>
+            </a:r>
+          </a:p>
+          <a:p>
+            <a:pPr>
+              <a:spcAft>
+                <a:spcPts val="840"/>
+              </a:spcAft>
+              <a:defRPr sz="1400" b="0">
+                <a:solidFill>
+                  <a:srgbClr val="333333"/>
+                </a:solidFill>
+                <a:latin typeface="Segoe UI"/>
+              </a:defRPr>
+            </a:pPr>
+            <a:r>
+              <a:t>   •  Recomendações estratégicas para aluno e orientadores</a:t>
+            </a:r>
+          </a:p>
+          <a:p>
+            <a:pPr>
+              <a:spcAft>
+                <a:spcPts val="840"/>
+              </a:spcAft>
+              <a:defRPr sz="1400" b="0">
+                <a:solidFill>
+                  <a:srgbClr val="333333"/>
+                </a:solidFill>
+                <a:latin typeface="Segoe UI"/>
+              </a:defRPr>
+            </a:pPr>
+          </a:p>
+          <a:p>
+            <a:pPr>
+              <a:spcAft>
+                <a:spcPts val="840"/>
+              </a:spcAft>
+              <a:defRPr sz="1400" b="1">
+                <a:solidFill>
+                  <a:srgbClr val="1B8A4A"/>
+                </a:solidFill>
+                <a:latin typeface="Segoe UI"/>
+              </a:defRPr>
+            </a:pPr>
+            <a:r>
+              <a:t>Visão do aluno: trabalho em progresso.</a:t>
+            </a:r>
+          </a:p>
+          <a:p>
+            <a:pPr>
+              <a:spcAft>
+                <a:spcPts val="840"/>
+              </a:spcAft>
+              <a:defRPr sz="1400" b="0">
+                <a:solidFill>
+                  <a:srgbClr val="666666"/>
+                </a:solidFill>
+                <a:latin typeface="Segoe UI"/>
+              </a:defRPr>
+            </a:pPr>
+            <a:r>
+              <a:t>Criado via chat, usando dados de todas as correções.</a:t>
+            </a:r>
+          </a:p>
+          <a:p>
+            <a:pPr>
+              <a:spcAft>
+                <a:spcPts val="840"/>
+              </a:spcAft>
+              <a:defRPr sz="1400" b="0">
+                <a:solidFill>
+                  <a:srgbClr val="666666"/>
+                </a:solidFill>
+                <a:latin typeface="Segoe UI"/>
+              </a:defRPr>
+            </a:pPr>
+            <a:r>
+              <a:t>Automação completa é o próximo marco.</a:t>
+            </a:r>
+          </a:p>
+        </p:txBody>
+      </p:sp>
+      <p:sp>
+        <p:nvSpPr>
+          <p:cNvPr id="9" name="TextBox 8"/>
+          <p:cNvSpPr txBox="1"/>
+          <p:nvPr/>
+        </p:nvSpPr>
+        <p:spPr>
+          <a:xfrm>
+            <a:off x="731520" y="6217920"/>
+            <a:ext cx="7315200" cy="365760"/>
+          </a:xfrm>
+          <a:prstGeom prst="rect">
+            <a:avLst/>
+          </a:prstGeom>
+          <a:noFill/>
+        </p:spPr>
+        <p:txBody>
+          <a:bodyPr wrap="square">
+            <a:spAutoFit/>
+          </a:bodyPr>
+          <a:lstStyle/>
+          <a:p>
+            <a:r>
+              <a:rPr sz="1400" u="sng">
+                <a:solidFill>
+                  <a:srgbClr val="4A90D9"/>
+                </a:solidFill>
+                <a:latin typeface="Segoe UI"/>
+                <a:hlinkClick r:id="rId2"/>
+              </a:rPr>
+              <a:t>→ Ver relatório completo: Relatório Longitudinal (7 páginas)</a:t>
+            </a:r>
+          </a:p>
+        </p:txBody>
+      </p:sp>
+    </p:spTree>
+  </p:cSld>
+  <p:clrMapOvr>
+    <a:masterClrMapping/>
+  </p:clrMapOvr>
+</p:sld>
+</file>
+
+<file path=ppt/slides/slide27.xml><?xml version="1.0" encoding="utf-8"?>
+<p:sld xmlns:a="http://schemas.openxmlformats.org/drawingml/2006/main" xmlns:p="http://schemas.openxmlformats.org/presentationml/2006/main" xmlns:r="http://schemas.openxmlformats.org/officeDocument/2006/relationships">
+  <p:cSld>
+    <p:bg>
+      <p:bgPr>
+        <a:solidFill>
+          <a:srgbClr val="FFFFFF"/>
+        </a:solidFill>
+        <a:effectLst/>
+      </p:bgPr>
+    </p:bg>
+    <p:spTree>
+      <p:nvGrpSpPr>
+        <p:cNvPr id="1" name=""/>
+        <p:cNvGrpSpPr/>
+        <p:nvPr/>
+      </p:nvGrpSpPr>
+      <p:grpSpPr/>
+      <p:sp>
+        <p:nvSpPr>
+          <p:cNvPr id="2" name="Rectangle 1"/>
+          <p:cNvSpPr/>
+          <p:nvPr/>
+        </p:nvSpPr>
+        <p:spPr>
+          <a:xfrm>
+            <a:off x="0" y="0"/>
+            <a:ext cx="12191695" cy="73152"/>
+          </a:xfrm>
+          <a:prstGeom prst="rect">
+            <a:avLst/>
+          </a:prstGeom>
+          <a:solidFill>
+            <a:srgbClr val="0056A0"/>
+          </a:solidFill>
+          <a:ln>
+            <a:noFill/>
+          </a:ln>
+        </p:spPr>
+        <p:style>
+          <a:lnRef idx="1">
+            <a:schemeClr val="accent1"/>
+          </a:lnRef>
+          <a:fillRef idx="3">
+            <a:schemeClr val="accent1"/>
+          </a:fillRef>
+          <a:effectRef idx="2">
+            <a:schemeClr val="accent1"/>
+          </a:effectRef>
+          <a:fontRef idx="minor">
+            <a:schemeClr val="lt1"/>
+          </a:fontRef>
+        </p:style>
+        <p:txBody>
+          <a:bodyPr rtlCol="0" anchor="ctr"/>
+          <a:lstStyle/>
+          <a:p>
+            <a:pPr algn="ctr"/>
+          </a:p>
+        </p:txBody>
+      </p:sp>
+      <p:sp>
+        <p:nvSpPr>
+          <p:cNvPr id="3" name="TextBox 2"/>
+          <p:cNvSpPr txBox="1"/>
+          <p:nvPr/>
+        </p:nvSpPr>
+        <p:spPr>
+          <a:xfrm>
+            <a:off x="731520" y="274320"/>
+            <a:ext cx="10058400" cy="731520"/>
+          </a:xfrm>
+          <a:prstGeom prst="rect">
+            <a:avLst/>
+          </a:prstGeom>
+          <a:noFill/>
+        </p:spPr>
+        <p:txBody>
+          <a:bodyPr wrap="square">
+            <a:spAutoFit/>
+          </a:bodyPr>
+          <a:lstStyle/>
+          <a:p>
+            <a:pPr algn="l">
+              <a:defRPr sz="3000" b="1">
+                <a:solidFill>
+                  <a:srgbClr val="002B5C"/>
+                </a:solidFill>
+                <a:latin typeface="Segoe UI"/>
+              </a:defRPr>
+            </a:pPr>
+            <a:r>
+              <a:t>Tudo Isso É Real</a:t>
+            </a:r>
+          </a:p>
+        </p:txBody>
+      </p:sp>
+      <p:sp>
+        <p:nvSpPr>
+          <p:cNvPr id="4" name="Rectangle 3"/>
+          <p:cNvSpPr/>
+          <p:nvPr/>
+        </p:nvSpPr>
+        <p:spPr>
+          <a:xfrm>
+            <a:off x="731520" y="960120"/>
+            <a:ext cx="2743200" cy="36576"/>
+          </a:xfrm>
+          <a:prstGeom prst="rect">
+            <a:avLst/>
+          </a:prstGeom>
+          <a:solidFill>
+            <a:srgbClr val="4A90D9"/>
+          </a:solidFill>
+          <a:ln>
+            <a:noFill/>
+          </a:ln>
+        </p:spPr>
+        <p:style>
+          <a:lnRef idx="1">
+            <a:schemeClr val="accent1"/>
+          </a:lnRef>
+          <a:fillRef idx="3">
+            <a:schemeClr val="accent1"/>
+          </a:fillRef>
+          <a:effectRef idx="2">
+            <a:schemeClr val="accent1"/>
+          </a:effectRef>
+          <a:fontRef idx="minor">
+            <a:schemeClr val="lt1"/>
+          </a:fontRef>
+        </p:style>
+        <p:txBody>
+          <a:bodyPr rtlCol="0" anchor="ctr"/>
+          <a:lstStyle/>
+          <a:p>
+            <a:pPr algn="ctr"/>
+          </a:p>
+        </p:txBody>
+      </p:sp>
+      <p:sp>
+        <p:nvSpPr>
+          <p:cNvPr id="5" name="Rectangle 4"/>
+          <p:cNvSpPr/>
+          <p:nvPr/>
+        </p:nvSpPr>
+        <p:spPr>
+          <a:xfrm>
+            <a:off x="731520" y="1280160"/>
+            <a:ext cx="2011680" cy="594360"/>
+          </a:xfrm>
+          <a:prstGeom prst="rect">
+            <a:avLst/>
+          </a:prstGeom>
+          <a:solidFill>
+            <a:srgbClr val="0056A0"/>
+          </a:solidFill>
+          <a:ln>
+            <a:noFill/>
+          </a:ln>
+        </p:spPr>
+        <p:style>
+          <a:lnRef idx="1">
+            <a:schemeClr val="accent1"/>
+          </a:lnRef>
+          <a:fillRef idx="3">
+            <a:schemeClr val="accent1"/>
+          </a:fillRef>
+          <a:effectRef idx="2">
+            <a:schemeClr val="accent1"/>
+          </a:effectRef>
+          <a:fontRef idx="minor">
+            <a:schemeClr val="lt1"/>
+          </a:fontRef>
+        </p:style>
+        <p:txBody>
+          <a:bodyPr rtlCol="0" anchor="ctr"/>
+          <a:lstStyle/>
+          <a:p>
+            <a:pPr algn="ctr"/>
+          </a:p>
+        </p:txBody>
+      </p:sp>
+      <p:sp>
+        <p:nvSpPr>
+          <p:cNvPr id="6" name="TextBox 5"/>
+          <p:cNvSpPr txBox="1"/>
+          <p:nvPr/>
+        </p:nvSpPr>
+        <p:spPr>
+          <a:xfrm>
+            <a:off x="731520" y="1389888"/>
+            <a:ext cx="2011680" cy="411480"/>
+          </a:xfrm>
+          <a:prstGeom prst="rect">
+            <a:avLst/>
+          </a:prstGeom>
+          <a:noFill/>
+        </p:spPr>
+        <p:txBody>
+          <a:bodyPr wrap="square">
+            <a:spAutoFit/>
+          </a:bodyPr>
+          <a:lstStyle/>
+          <a:p>
+            <a:pPr algn="ctr">
+              <a:defRPr sz="1400" b="1">
+                <a:solidFill>
+                  <a:srgbClr val="FFFFFF"/>
+                </a:solidFill>
+                <a:latin typeface="Segoe UI"/>
+              </a:defRPr>
+            </a:pPr>
+            <a:r>
+              <a:t>Questão</a:t>
+            </a:r>
+          </a:p>
+        </p:txBody>
+      </p:sp>
+      <p:sp>
+        <p:nvSpPr>
+          <p:cNvPr id="7" name="TextBox 6"/>
+          <p:cNvSpPr txBox="1"/>
+          <p:nvPr/>
+        </p:nvSpPr>
+        <p:spPr>
+          <a:xfrm>
+            <a:off x="2926080" y="1325880"/>
+            <a:ext cx="3200400" cy="548640"/>
+          </a:xfrm>
+          <a:prstGeom prst="rect">
+            <a:avLst/>
+          </a:prstGeom>
+          <a:noFill/>
+        </p:spPr>
+        <p:txBody>
+          <a:bodyPr wrap="square">
+            <a:spAutoFit/>
+          </a:bodyPr>
+          <a:lstStyle/>
+          <a:p>
+            <a:pPr algn="l">
+              <a:defRPr sz="1600" b="1">
+                <a:solidFill>
+                  <a:srgbClr val="002B5C"/>
+                </a:solidFill>
+                <a:latin typeface="Segoe UI"/>
+              </a:defRPr>
+            </a:pPr>
+            <a:r>
+              <a:t>Correção</a:t>
+            </a:r>
+          </a:p>
+        </p:txBody>
+      </p:sp>
+      <p:sp>
+        <p:nvSpPr>
+          <p:cNvPr id="8" name="TextBox 7"/>
+          <p:cNvSpPr txBox="1"/>
+          <p:nvPr/>
+        </p:nvSpPr>
+        <p:spPr>
+          <a:xfrm>
+            <a:off x="6217920" y="1325880"/>
+            <a:ext cx="3657600" cy="548640"/>
+          </a:xfrm>
+          <a:prstGeom prst="rect">
+            <a:avLst/>
+          </a:prstGeom>
+          <a:noFill/>
+        </p:spPr>
+        <p:txBody>
+          <a:bodyPr wrap="square">
+            <a:spAutoFit/>
+          </a:bodyPr>
+          <a:lstStyle/>
+          <a:p>
+            <a:pPr algn="l">
+              <a:defRPr sz="1400" b="0">
+                <a:solidFill>
+                  <a:srgbClr val="666666"/>
+                </a:solidFill>
+                <a:latin typeface="Segoe UI"/>
+              </a:defRPr>
+            </a:pPr>
+            <a:r>
+              <a:t>Raciocínio, tipo de erro, potencial</a:t>
+            </a:r>
+          </a:p>
+        </p:txBody>
+      </p:sp>
+      <p:sp>
+        <p:nvSpPr>
+          <p:cNvPr id="9" name="TextBox 8"/>
+          <p:cNvSpPr txBox="1"/>
+          <p:nvPr/>
+        </p:nvSpPr>
+        <p:spPr>
+          <a:xfrm>
+            <a:off x="10058400" y="1325880"/>
+            <a:ext cx="1828800" cy="548640"/>
+          </a:xfrm>
+          <a:prstGeom prst="rect">
+            <a:avLst/>
+          </a:prstGeom>
+          <a:noFill/>
+        </p:spPr>
+        <p:txBody>
+          <a:bodyPr wrap="square">
+            <a:spAutoFit/>
+          </a:bodyPr>
+          <a:lstStyle/>
+          <a:p>
+            <a:r>
+              <a:rPr sz="1100" u="sng">
+                <a:solidFill>
+                  <a:srgbClr val="4A90D9"/>
+                </a:solidFill>
+                <a:latin typeface="Segoe UI"/>
+                <a:hlinkClick r:id="rId2"/>
+              </a:rPr>
+              <a:t>📎 Abrir PDF</a:t>
+            </a:r>
+          </a:p>
+        </p:txBody>
+      </p:sp>
+      <p:sp>
+        <p:nvSpPr>
+          <p:cNvPr id="10" name="Rectangle 9"/>
+          <p:cNvSpPr/>
+          <p:nvPr/>
+        </p:nvSpPr>
+        <p:spPr>
+          <a:xfrm>
+            <a:off x="731520" y="2057400"/>
+            <a:ext cx="2011680" cy="594360"/>
+          </a:xfrm>
+          <a:prstGeom prst="rect">
+            <a:avLst/>
+          </a:prstGeom>
+          <a:solidFill>
+            <a:srgbClr val="0056A0"/>
+          </a:solidFill>
+          <a:ln>
+            <a:noFill/>
+          </a:ln>
+        </p:spPr>
+        <p:style>
+          <a:lnRef idx="1">
+            <a:schemeClr val="accent1"/>
+          </a:lnRef>
+          <a:fillRef idx="3">
+            <a:schemeClr val="accent1"/>
+          </a:fillRef>
+          <a:effectRef idx="2">
+            <a:schemeClr val="accent1"/>
+          </a:effectRef>
+          <a:fontRef idx="minor">
+            <a:schemeClr val="lt1"/>
+          </a:fontRef>
+        </p:style>
+        <p:txBody>
+          <a:bodyPr rtlCol="0" anchor="ctr"/>
+          <a:lstStyle/>
+          <a:p>
+            <a:pPr algn="ctr"/>
+          </a:p>
+        </p:txBody>
+      </p:sp>
+      <p:sp>
+        <p:nvSpPr>
+          <p:cNvPr id="11" name="TextBox 10"/>
+          <p:cNvSpPr txBox="1"/>
+          <p:nvPr/>
+        </p:nvSpPr>
+        <p:spPr>
+          <a:xfrm>
+            <a:off x="731520" y="2167128"/>
+            <a:ext cx="2011680" cy="411480"/>
+          </a:xfrm>
+          <a:prstGeom prst="rect">
+            <a:avLst/>
+          </a:prstGeom>
+          <a:noFill/>
+        </p:spPr>
+        <p:txBody>
+          <a:bodyPr wrap="square">
+            <a:spAutoFit/>
+          </a:bodyPr>
+          <a:lstStyle/>
+          <a:p>
+            <a:pPr algn="ctr">
+              <a:defRPr sz="1400" b="1">
+                <a:solidFill>
+                  <a:srgbClr val="FFFFFF"/>
+                </a:solidFill>
+                <a:latin typeface="Segoe UI"/>
+              </a:defRPr>
+            </a:pPr>
+            <a:r>
+              <a:t>Aluno</a:t>
+            </a:r>
+          </a:p>
+        </p:txBody>
+      </p:sp>
+      <p:sp>
+        <p:nvSpPr>
+          <p:cNvPr id="12" name="TextBox 11"/>
+          <p:cNvSpPr txBox="1"/>
+          <p:nvPr/>
+        </p:nvSpPr>
+        <p:spPr>
+          <a:xfrm>
+            <a:off x="2926080" y="2103120"/>
+            <a:ext cx="3200400" cy="548640"/>
+          </a:xfrm>
+          <a:prstGeom prst="rect">
+            <a:avLst/>
+          </a:prstGeom>
+          <a:noFill/>
+        </p:spPr>
+        <p:txBody>
+          <a:bodyPr wrap="square">
+            <a:spAutoFit/>
+          </a:bodyPr>
+          <a:lstStyle/>
+          <a:p>
+            <a:pPr algn="l">
+              <a:defRPr sz="1600" b="1">
+                <a:solidFill>
+                  <a:srgbClr val="002B5C"/>
+                </a:solidFill>
+                <a:latin typeface="Segoe UI"/>
+              </a:defRPr>
+            </a:pPr>
+            <a:r>
+              <a:t>Análise de Habilidades</a:t>
+            </a:r>
+          </a:p>
+        </p:txBody>
+      </p:sp>
+      <p:sp>
+        <p:nvSpPr>
+          <p:cNvPr id="13" name="TextBox 12"/>
+          <p:cNvSpPr txBox="1"/>
+          <p:nvPr/>
+        </p:nvSpPr>
+        <p:spPr>
+          <a:xfrm>
+            <a:off x="6217920" y="2103120"/>
+            <a:ext cx="3657600" cy="548640"/>
+          </a:xfrm>
+          <a:prstGeom prst="rect">
+            <a:avLst/>
+          </a:prstGeom>
+          <a:noFill/>
+        </p:spPr>
+        <p:txBody>
+          <a:bodyPr wrap="square">
+            <a:spAutoFit/>
+          </a:bodyPr>
+          <a:lstStyle/>
+          <a:p>
+            <a:pPr algn="l">
+              <a:defRPr sz="1400" b="0">
+                <a:solidFill>
+                  <a:srgbClr val="666666"/>
+                </a:solidFill>
+                <a:latin typeface="Segoe UI"/>
+              </a:defRPr>
+            </a:pPr>
+            <a:r>
+              <a:t>Perfil cognitivo, padrões, recomendações</a:t>
+            </a:r>
+          </a:p>
+        </p:txBody>
+      </p:sp>
+      <p:sp>
+        <p:nvSpPr>
+          <p:cNvPr id="14" name="TextBox 13"/>
+          <p:cNvSpPr txBox="1"/>
+          <p:nvPr/>
+        </p:nvSpPr>
+        <p:spPr>
+          <a:xfrm>
+            <a:off x="10058400" y="2103120"/>
+            <a:ext cx="1828800" cy="548640"/>
+          </a:xfrm>
+          <a:prstGeom prst="rect">
+            <a:avLst/>
+          </a:prstGeom>
+          <a:noFill/>
+        </p:spPr>
+        <p:txBody>
+          <a:bodyPr wrap="square">
+            <a:spAutoFit/>
+          </a:bodyPr>
+          <a:lstStyle/>
+          <a:p>
+            <a:r>
+              <a:rPr sz="1100" u="sng">
+                <a:solidFill>
+                  <a:srgbClr val="4A90D9"/>
+                </a:solidFill>
+                <a:latin typeface="Segoe UI"/>
+                <a:hlinkClick r:id="rId3"/>
+              </a:rPr>
+              <a:t>📎 Abrir PDF</a:t>
+            </a:r>
+          </a:p>
+        </p:txBody>
+      </p:sp>
+      <p:sp>
+        <p:nvSpPr>
+          <p:cNvPr id="15" name="Rectangle 14"/>
+          <p:cNvSpPr/>
+          <p:nvPr/>
+        </p:nvSpPr>
+        <p:spPr>
+          <a:xfrm>
+            <a:off x="731520" y="2834640"/>
+            <a:ext cx="2011680" cy="594360"/>
+          </a:xfrm>
+          <a:prstGeom prst="rect">
+            <a:avLst/>
+          </a:prstGeom>
+          <a:solidFill>
+            <a:srgbClr val="0056A0"/>
+          </a:solidFill>
+          <a:ln>
+            <a:noFill/>
+          </a:ln>
+        </p:spPr>
+        <p:style>
+          <a:lnRef idx="1">
+            <a:schemeClr val="accent1"/>
+          </a:lnRef>
+          <a:fillRef idx="3">
+            <a:schemeClr val="accent1"/>
+          </a:fillRef>
+          <a:effectRef idx="2">
+            <a:schemeClr val="accent1"/>
+          </a:effectRef>
+          <a:fontRef idx="minor">
+            <a:schemeClr val="lt1"/>
+          </a:fontRef>
+        </p:style>
+        <p:txBody>
+          <a:bodyPr rtlCol="0" anchor="ctr"/>
+          <a:lstStyle/>
+          <a:p>
+            <a:pPr algn="ctr"/>
+          </a:p>
+        </p:txBody>
+      </p:sp>
+      <p:sp>
+        <p:nvSpPr>
+          <p:cNvPr id="16" name="TextBox 15"/>
+          <p:cNvSpPr txBox="1"/>
+          <p:nvPr/>
+        </p:nvSpPr>
+        <p:spPr>
+          <a:xfrm>
+            <a:off x="731520" y="2944368"/>
+            <a:ext cx="2011680" cy="411480"/>
+          </a:xfrm>
+          <a:prstGeom prst="rect">
+            <a:avLst/>
+          </a:prstGeom>
+          <a:noFill/>
+        </p:spPr>
+        <p:txBody>
+          <a:bodyPr wrap="square">
+            <a:spAutoFit/>
+          </a:bodyPr>
+          <a:lstStyle/>
+          <a:p>
+            <a:pPr algn="ctr">
+              <a:defRPr sz="1400" b="1">
+                <a:solidFill>
+                  <a:srgbClr val="FFFFFF"/>
+                </a:solidFill>
+                <a:latin typeface="Segoe UI"/>
+              </a:defRPr>
+            </a:pPr>
+            <a:r>
+              <a:t>Aluno</a:t>
+            </a:r>
+          </a:p>
+        </p:txBody>
+      </p:sp>
+      <p:sp>
+        <p:nvSpPr>
+          <p:cNvPr id="17" name="TextBox 16"/>
+          <p:cNvSpPr txBox="1"/>
+          <p:nvPr/>
+        </p:nvSpPr>
+        <p:spPr>
+          <a:xfrm>
+            <a:off x="2926080" y="2880360"/>
+            <a:ext cx="3200400" cy="548640"/>
+          </a:xfrm>
+          <a:prstGeom prst="rect">
+            <a:avLst/>
+          </a:prstGeom>
+          <a:noFill/>
+        </p:spPr>
+        <p:txBody>
+          <a:bodyPr wrap="square">
+            <a:spAutoFit/>
+          </a:bodyPr>
+          <a:lstStyle/>
+          <a:p>
+            <a:pPr algn="l">
+              <a:defRPr sz="1600" b="1">
+                <a:solidFill>
+                  <a:srgbClr val="002B5C"/>
+                </a:solidFill>
+                <a:latin typeface="Segoe UI"/>
+              </a:defRPr>
+            </a:pPr>
+            <a:r>
+              <a:t>Relatório Final</a:t>
+            </a:r>
+          </a:p>
+        </p:txBody>
+      </p:sp>
+      <p:sp>
+        <p:nvSpPr>
+          <p:cNvPr id="18" name="TextBox 17"/>
+          <p:cNvSpPr txBox="1"/>
+          <p:nvPr/>
+        </p:nvSpPr>
+        <p:spPr>
+          <a:xfrm>
+            <a:off x="6217920" y="2880360"/>
+            <a:ext cx="3657600" cy="548640"/>
+          </a:xfrm>
+          <a:prstGeom prst="rect">
+            <a:avLst/>
+          </a:prstGeom>
+          <a:noFill/>
+        </p:spPr>
+        <p:txBody>
+          <a:bodyPr wrap="square">
+            <a:spAutoFit/>
+          </a:bodyPr>
+          <a:lstStyle/>
+          <a:p>
+            <a:pPr algn="l">
+              <a:defRPr sz="1400" b="0">
+                <a:solidFill>
+                  <a:srgbClr val="666666"/>
+                </a:solidFill>
+                <a:latin typeface="Segoe UI"/>
+              </a:defRPr>
+            </a:pPr>
+            <a:r>
+              <a:t>Narrativa completa para aluno e pais</a:t>
+            </a:r>
+          </a:p>
+        </p:txBody>
+      </p:sp>
+      <p:sp>
+        <p:nvSpPr>
+          <p:cNvPr id="19" name="TextBox 18"/>
+          <p:cNvSpPr txBox="1"/>
+          <p:nvPr/>
+        </p:nvSpPr>
+        <p:spPr>
+          <a:xfrm>
+            <a:off x="10058400" y="2880360"/>
+            <a:ext cx="1828800" cy="548640"/>
+          </a:xfrm>
+          <a:prstGeom prst="rect">
+            <a:avLst/>
+          </a:prstGeom>
+          <a:noFill/>
+        </p:spPr>
+        <p:txBody>
+          <a:bodyPr wrap="square">
+            <a:spAutoFit/>
+          </a:bodyPr>
+          <a:lstStyle/>
+          <a:p>
+            <a:r>
+              <a:rPr sz="1100" u="sng">
+                <a:solidFill>
+                  <a:srgbClr val="4A90D9"/>
+                </a:solidFill>
+                <a:latin typeface="Segoe UI"/>
+                <a:hlinkClick r:id="rId4"/>
+              </a:rPr>
+              <a:t>📎 Abrir PDF</a:t>
+            </a:r>
+          </a:p>
+        </p:txBody>
+      </p:sp>
+      <p:sp>
+        <p:nvSpPr>
+          <p:cNvPr id="20" name="Rectangle 19"/>
+          <p:cNvSpPr/>
+          <p:nvPr/>
+        </p:nvSpPr>
+        <p:spPr>
+          <a:xfrm>
+            <a:off x="731520" y="3611880"/>
+            <a:ext cx="2011680" cy="594360"/>
+          </a:xfrm>
+          <a:prstGeom prst="rect">
+            <a:avLst/>
+          </a:prstGeom>
+          <a:solidFill>
+            <a:srgbClr val="002B5C"/>
+          </a:solidFill>
+          <a:ln>
+            <a:noFill/>
+          </a:ln>
+        </p:spPr>
+        <p:style>
+          <a:lnRef idx="1">
+            <a:schemeClr val="accent1"/>
+          </a:lnRef>
+          <a:fillRef idx="3">
+            <a:schemeClr val="accent1"/>
+          </a:fillRef>
+          <a:effectRef idx="2">
+            <a:schemeClr val="accent1"/>
+          </a:effectRef>
+          <a:fontRef idx="minor">
+            <a:schemeClr val="lt1"/>
+          </a:fontRef>
+        </p:style>
+        <p:txBody>
+          <a:bodyPr rtlCol="0" anchor="ctr"/>
+          <a:lstStyle/>
+          <a:p>
+            <a:pPr algn="ctr"/>
+          </a:p>
+        </p:txBody>
+      </p:sp>
+      <p:sp>
+        <p:nvSpPr>
+          <p:cNvPr id="21" name="TextBox 20"/>
+          <p:cNvSpPr txBox="1"/>
+          <p:nvPr/>
+        </p:nvSpPr>
+        <p:spPr>
+          <a:xfrm>
+            <a:off x="731520" y="3721608"/>
+            <a:ext cx="2011680" cy="411480"/>
+          </a:xfrm>
+          <a:prstGeom prst="rect">
+            <a:avLst/>
+          </a:prstGeom>
+          <a:noFill/>
+        </p:spPr>
+        <p:txBody>
+          <a:bodyPr wrap="square">
+            <a:spAutoFit/>
+          </a:bodyPr>
+          <a:lstStyle/>
+          <a:p>
+            <a:pPr algn="ctr">
+              <a:defRPr sz="1400" b="1">
+                <a:solidFill>
+                  <a:srgbClr val="FFFFFF"/>
+                </a:solidFill>
+                <a:latin typeface="Segoe UI"/>
+              </a:defRPr>
+            </a:pPr>
+            <a:r>
+              <a:t>Turma × Atividade</a:t>
+            </a:r>
+          </a:p>
+        </p:txBody>
+      </p:sp>
+      <p:sp>
+        <p:nvSpPr>
+          <p:cNvPr id="22" name="TextBox 21"/>
+          <p:cNvSpPr txBox="1"/>
+          <p:nvPr/>
+        </p:nvSpPr>
+        <p:spPr>
+          <a:xfrm>
+            <a:off x="2926080" y="3657600"/>
+            <a:ext cx="3200400" cy="548640"/>
+          </a:xfrm>
+          <a:prstGeom prst="rect">
+            <a:avLst/>
+          </a:prstGeom>
+          <a:noFill/>
+        </p:spPr>
+        <p:txBody>
+          <a:bodyPr wrap="square">
+            <a:spAutoFit/>
+          </a:bodyPr>
+          <a:lstStyle/>
+          <a:p>
+            <a:pPr algn="l">
+              <a:defRPr sz="1600" b="1">
+                <a:solidFill>
+                  <a:srgbClr val="002B5C"/>
+                </a:solidFill>
+                <a:latin typeface="Segoe UI"/>
+              </a:defRPr>
+            </a:pPr>
+            <a:r>
+              <a:t>Desempenho Tarefa</a:t>
+            </a:r>
+          </a:p>
+        </p:txBody>
+      </p:sp>
+      <p:sp>
+        <p:nvSpPr>
+          <p:cNvPr id="23" name="TextBox 22"/>
+          <p:cNvSpPr txBox="1"/>
+          <p:nvPr/>
+        </p:nvSpPr>
+        <p:spPr>
+          <a:xfrm>
+            <a:off x="6217920" y="3657600"/>
+            <a:ext cx="3657600" cy="548640"/>
+          </a:xfrm>
+          <a:prstGeom prst="rect">
+            <a:avLst/>
+          </a:prstGeom>
+          <a:noFill/>
+        </p:spPr>
+        <p:txBody>
+          <a:bodyPr wrap="square">
+            <a:spAutoFit/>
+          </a:bodyPr>
+          <a:lstStyle/>
+          <a:p>
+            <a:pPr algn="l">
+              <a:defRPr sz="1400" b="0">
+                <a:solidFill>
+                  <a:srgbClr val="666666"/>
+                </a:solidFill>
+                <a:latin typeface="Segoe UI"/>
+              </a:defRPr>
+            </a:pPr>
+            <a:r>
+              <a:t>Padrões coletivos, exemplos específicos</a:t>
+            </a:r>
+          </a:p>
+        </p:txBody>
+      </p:sp>
+      <p:sp>
+        <p:nvSpPr>
+          <p:cNvPr id="24" name="TextBox 23"/>
+          <p:cNvSpPr txBox="1"/>
+          <p:nvPr/>
+        </p:nvSpPr>
+        <p:spPr>
+          <a:xfrm>
+            <a:off x="10058400" y="3657600"/>
+            <a:ext cx="1828800" cy="548640"/>
+          </a:xfrm>
+          <a:prstGeom prst="rect">
+            <a:avLst/>
+          </a:prstGeom>
+          <a:noFill/>
+        </p:spPr>
+        <p:txBody>
+          <a:bodyPr wrap="square">
+            <a:spAutoFit/>
+          </a:bodyPr>
+          <a:lstStyle/>
+          <a:p>
+            <a:r>
+              <a:rPr sz="1100" u="sng">
+                <a:solidFill>
+                  <a:srgbClr val="4A90D9"/>
+                </a:solidFill>
+                <a:latin typeface="Segoe UI"/>
+                <a:hlinkClick r:id="rId5"/>
+              </a:rPr>
+              <a:t>📎 Abrir PDF</a:t>
+            </a:r>
+          </a:p>
+        </p:txBody>
+      </p:sp>
+      <p:sp>
+        <p:nvSpPr>
+          <p:cNvPr id="25" name="Rectangle 24"/>
+          <p:cNvSpPr/>
+          <p:nvPr/>
+        </p:nvSpPr>
+        <p:spPr>
+          <a:xfrm>
+            <a:off x="731520" y="4389120"/>
+            <a:ext cx="2011680" cy="594360"/>
+          </a:xfrm>
+          <a:prstGeom prst="rect">
+            <a:avLst/>
+          </a:prstGeom>
+          <a:solidFill>
+            <a:srgbClr val="002B5C"/>
+          </a:solidFill>
+          <a:ln>
+            <a:noFill/>
+          </a:ln>
+        </p:spPr>
+        <p:style>
+          <a:lnRef idx="1">
+            <a:schemeClr val="accent1"/>
+          </a:lnRef>
+          <a:fillRef idx="3">
+            <a:schemeClr val="accent1"/>
+          </a:fillRef>
+          <a:effectRef idx="2">
+            <a:schemeClr val="accent1"/>
+          </a:effectRef>
+          <a:fontRef idx="minor">
+            <a:schemeClr val="lt1"/>
+          </a:fontRef>
+        </p:style>
+        <p:txBody>
+          <a:bodyPr rtlCol="0" anchor="ctr"/>
+          <a:lstStyle/>
+          <a:p>
+            <a:pPr algn="ctr"/>
+          </a:p>
+        </p:txBody>
+      </p:sp>
+      <p:sp>
+        <p:nvSpPr>
+          <p:cNvPr id="26" name="TextBox 25"/>
+          <p:cNvSpPr txBox="1"/>
+          <p:nvPr/>
+        </p:nvSpPr>
+        <p:spPr>
+          <a:xfrm>
+            <a:off x="731520" y="4498848"/>
+            <a:ext cx="2011680" cy="411480"/>
+          </a:xfrm>
+          <a:prstGeom prst="rect">
+            <a:avLst/>
+          </a:prstGeom>
+          <a:noFill/>
+        </p:spPr>
+        <p:txBody>
+          <a:bodyPr wrap="square">
+            <a:spAutoFit/>
+          </a:bodyPr>
+          <a:lstStyle/>
+          <a:p>
+            <a:pPr algn="ctr">
+              <a:defRPr sz="1400" b="1">
+                <a:solidFill>
+                  <a:srgbClr val="FFFFFF"/>
+                </a:solidFill>
+                <a:latin typeface="Segoe UI"/>
+              </a:defRPr>
+            </a:pPr>
+            <a:r>
+              <a:t>Turma</a:t>
+            </a:r>
+          </a:p>
+        </p:txBody>
+      </p:sp>
+      <p:sp>
+        <p:nvSpPr>
+          <p:cNvPr id="27" name="TextBox 26"/>
+          <p:cNvSpPr txBox="1"/>
+          <p:nvPr/>
+        </p:nvSpPr>
+        <p:spPr>
+          <a:xfrm>
+            <a:off x="2926080" y="4434840"/>
+            <a:ext cx="3200400" cy="548640"/>
+          </a:xfrm>
+          <a:prstGeom prst="rect">
+            <a:avLst/>
+          </a:prstGeom>
+          <a:noFill/>
+        </p:spPr>
+        <p:txBody>
+          <a:bodyPr wrap="square">
+            <a:spAutoFit/>
+          </a:bodyPr>
+          <a:lstStyle/>
+          <a:p>
+            <a:pPr algn="l">
+              <a:defRPr sz="1600" b="1">
+                <a:solidFill>
+                  <a:srgbClr val="002B5C"/>
+                </a:solidFill>
+                <a:latin typeface="Segoe UI"/>
+              </a:defRPr>
+            </a:pPr>
+            <a:r>
+              <a:t>Desempenho Turma</a:t>
+            </a:r>
+          </a:p>
+        </p:txBody>
+      </p:sp>
+      <p:sp>
+        <p:nvSpPr>
+          <p:cNvPr id="28" name="TextBox 27"/>
+          <p:cNvSpPr txBox="1"/>
+          <p:nvPr/>
+        </p:nvSpPr>
+        <p:spPr>
+          <a:xfrm>
+            <a:off x="6217920" y="4434840"/>
+            <a:ext cx="3657600" cy="548640"/>
+          </a:xfrm>
+          <a:prstGeom prst="rect">
+            <a:avLst/>
+          </a:prstGeom>
+          <a:noFill/>
+        </p:spPr>
+        <p:txBody>
+          <a:bodyPr wrap="square">
+            <a:spAutoFit/>
+          </a:bodyPr>
+          <a:lstStyle/>
+          <a:p>
+            <a:pPr algn="l">
+              <a:defRPr sz="1400" b="0">
+                <a:solidFill>
+                  <a:srgbClr val="666666"/>
+                </a:solidFill>
+                <a:latin typeface="Segoe UI"/>
+              </a:defRPr>
+            </a:pPr>
+            <a:r>
+              <a:t>Evolução ao longo do tempo</a:t>
+            </a:r>
+          </a:p>
+        </p:txBody>
+      </p:sp>
+      <p:sp>
+        <p:nvSpPr>
+          <p:cNvPr id="29" name="TextBox 28"/>
+          <p:cNvSpPr txBox="1"/>
+          <p:nvPr/>
+        </p:nvSpPr>
+        <p:spPr>
+          <a:xfrm>
+            <a:off x="10058400" y="4434840"/>
+            <a:ext cx="1828800" cy="548640"/>
+          </a:xfrm>
+          <a:prstGeom prst="rect">
+            <a:avLst/>
+          </a:prstGeom>
+          <a:noFill/>
+        </p:spPr>
+        <p:txBody>
+          <a:bodyPr wrap="square">
+            <a:spAutoFit/>
+          </a:bodyPr>
+          <a:lstStyle/>
+          <a:p>
+            <a:r>
+              <a:rPr sz="1100" u="sng">
+                <a:solidFill>
+                  <a:srgbClr val="4A90D9"/>
+                </a:solidFill>
+                <a:latin typeface="Segoe UI"/>
+                <a:hlinkClick r:id="rId6"/>
+              </a:rPr>
+              <a:t>📎 Abrir PDF</a:t>
+            </a:r>
+          </a:p>
+        </p:txBody>
+      </p:sp>
+      <p:sp>
+        <p:nvSpPr>
+          <p:cNvPr id="30" name="Rectangle 29"/>
+          <p:cNvSpPr/>
+          <p:nvPr/>
+        </p:nvSpPr>
+        <p:spPr>
+          <a:xfrm>
+            <a:off x="731520" y="5166360"/>
+            <a:ext cx="2011680" cy="594360"/>
+          </a:xfrm>
+          <a:prstGeom prst="rect">
+            <a:avLst/>
+          </a:prstGeom>
+          <a:solidFill>
+            <a:srgbClr val="002B5C"/>
+          </a:solidFill>
+          <a:ln>
+            <a:noFill/>
+          </a:ln>
+        </p:spPr>
+        <p:style>
+          <a:lnRef idx="1">
+            <a:schemeClr val="accent1"/>
+          </a:lnRef>
+          <a:fillRef idx="3">
+            <a:schemeClr val="accent1"/>
+          </a:fillRef>
+          <a:effectRef idx="2">
+            <a:schemeClr val="accent1"/>
+          </a:effectRef>
+          <a:fontRef idx="minor">
+            <a:schemeClr val="lt1"/>
+          </a:fontRef>
+        </p:style>
+        <p:txBody>
+          <a:bodyPr rtlCol="0" anchor="ctr"/>
+          <a:lstStyle/>
+          <a:p>
+            <a:pPr algn="ctr"/>
+          </a:p>
+        </p:txBody>
+      </p:sp>
+      <p:sp>
+        <p:nvSpPr>
+          <p:cNvPr id="31" name="TextBox 30"/>
+          <p:cNvSpPr txBox="1"/>
+          <p:nvPr/>
+        </p:nvSpPr>
+        <p:spPr>
+          <a:xfrm>
+            <a:off x="731520" y="5276088"/>
+            <a:ext cx="2011680" cy="411480"/>
+          </a:xfrm>
+          <a:prstGeom prst="rect">
+            <a:avLst/>
+          </a:prstGeom>
+          <a:noFill/>
+        </p:spPr>
+        <p:txBody>
+          <a:bodyPr wrap="square">
+            <a:spAutoFit/>
+          </a:bodyPr>
+          <a:lstStyle/>
+          <a:p>
+            <a:pPr algn="ctr">
+              <a:defRPr sz="1400" b="1">
+                <a:solidFill>
+                  <a:srgbClr val="FFFFFF"/>
+                </a:solidFill>
+                <a:latin typeface="Segoe UI"/>
+              </a:defRPr>
+            </a:pPr>
+            <a:r>
+              <a:t>Matéria</a:t>
+            </a:r>
+          </a:p>
+        </p:txBody>
+      </p:sp>
+      <p:sp>
+        <p:nvSpPr>
+          <p:cNvPr id="32" name="TextBox 31"/>
+          <p:cNvSpPr txBox="1"/>
+          <p:nvPr/>
+        </p:nvSpPr>
+        <p:spPr>
+          <a:xfrm>
+            <a:off x="2926080" y="5212080"/>
+            <a:ext cx="3200400" cy="548640"/>
+          </a:xfrm>
+          <a:prstGeom prst="rect">
+            <a:avLst/>
+          </a:prstGeom>
+          <a:noFill/>
+        </p:spPr>
+        <p:txBody>
+          <a:bodyPr wrap="square">
+            <a:spAutoFit/>
+          </a:bodyPr>
+          <a:lstStyle/>
+          <a:p>
+            <a:pPr algn="l">
+              <a:defRPr sz="1600" b="1">
+                <a:solidFill>
+                  <a:srgbClr val="002B5C"/>
+                </a:solidFill>
+                <a:latin typeface="Segoe UI"/>
+              </a:defRPr>
+            </a:pPr>
+            <a:r>
+              <a:t>Desempenho Matéria</a:t>
+            </a:r>
+          </a:p>
+        </p:txBody>
+      </p:sp>
+      <p:sp>
+        <p:nvSpPr>
+          <p:cNvPr id="33" name="TextBox 32"/>
+          <p:cNvSpPr txBox="1"/>
+          <p:nvPr/>
+        </p:nvSpPr>
+        <p:spPr>
+          <a:xfrm>
+            <a:off x="6217920" y="5212080"/>
+            <a:ext cx="3657600" cy="548640"/>
+          </a:xfrm>
+          <a:prstGeom prst="rect">
+            <a:avLst/>
+          </a:prstGeom>
+          <a:noFill/>
+        </p:spPr>
+        <p:txBody>
+          <a:bodyPr wrap="square">
+            <a:spAutoFit/>
+          </a:bodyPr>
+          <a:lstStyle/>
+          <a:p>
+            <a:pPr algn="l">
+              <a:defRPr sz="1400" b="0">
+                <a:solidFill>
+                  <a:srgbClr val="666666"/>
+                </a:solidFill>
+                <a:latin typeface="Segoe UI"/>
+              </a:defRPr>
+            </a:pPr>
+            <a:r>
+              <a:t>Eficácia do currículo entre turmas</a:t>
+            </a:r>
+          </a:p>
+        </p:txBody>
+      </p:sp>
+      <p:sp>
+        <p:nvSpPr>
+          <p:cNvPr id="34" name="TextBox 33"/>
+          <p:cNvSpPr txBox="1"/>
+          <p:nvPr/>
+        </p:nvSpPr>
+        <p:spPr>
+          <a:xfrm>
+            <a:off x="10058400" y="5212080"/>
+            <a:ext cx="1828800" cy="548640"/>
+          </a:xfrm>
+          <a:prstGeom prst="rect">
+            <a:avLst/>
+          </a:prstGeom>
+          <a:noFill/>
+        </p:spPr>
+        <p:txBody>
+          <a:bodyPr wrap="square">
+            <a:spAutoFit/>
+          </a:bodyPr>
+          <a:lstStyle/>
+          <a:p>
+            <a:r>
+              <a:rPr sz="1100" u="sng">
+                <a:solidFill>
+                  <a:srgbClr val="4A90D9"/>
+                </a:solidFill>
+                <a:latin typeface="Segoe UI"/>
+                <a:hlinkClick r:id="rId7"/>
+              </a:rPr>
+              <a:t>📎 Abrir PDF</a:t>
+            </a:r>
+          </a:p>
+        </p:txBody>
+      </p:sp>
+      <p:sp>
+        <p:nvSpPr>
+          <p:cNvPr id="35" name="Rectangle 34"/>
+          <p:cNvSpPr/>
+          <p:nvPr/>
+        </p:nvSpPr>
+        <p:spPr>
+          <a:xfrm>
+            <a:off x="731520" y="5943600"/>
+            <a:ext cx="2011680" cy="594360"/>
+          </a:xfrm>
+          <a:prstGeom prst="rect">
+            <a:avLst/>
+          </a:prstGeom>
+          <a:solidFill>
+            <a:srgbClr val="002B5C"/>
+          </a:solidFill>
+          <a:ln>
+            <a:noFill/>
+          </a:ln>
+        </p:spPr>
+        <p:style>
+          <a:lnRef idx="1">
+            <a:schemeClr val="accent1"/>
+          </a:lnRef>
+          <a:fillRef idx="3">
+            <a:schemeClr val="accent1"/>
+          </a:fillRef>
+          <a:effectRef idx="2">
+            <a:schemeClr val="accent1"/>
+          </a:effectRef>
+          <a:fontRef idx="minor">
+            <a:schemeClr val="lt1"/>
+          </a:fontRef>
+        </p:style>
+        <p:txBody>
+          <a:bodyPr rtlCol="0" anchor="ctr"/>
+          <a:lstStyle/>
+          <a:p>
+            <a:pPr algn="ctr"/>
+          </a:p>
+        </p:txBody>
+      </p:sp>
+      <p:sp>
+        <p:nvSpPr>
+          <p:cNvPr id="36" name="TextBox 35"/>
+          <p:cNvSpPr txBox="1"/>
+          <p:nvPr/>
+        </p:nvSpPr>
+        <p:spPr>
+          <a:xfrm>
+            <a:off x="731520" y="6053328"/>
+            <a:ext cx="2011680" cy="411480"/>
+          </a:xfrm>
+          <a:prstGeom prst="rect">
+            <a:avLst/>
+          </a:prstGeom>
+          <a:noFill/>
+        </p:spPr>
+        <p:txBody>
+          <a:bodyPr wrap="square">
+            <a:spAutoFit/>
+          </a:bodyPr>
+          <a:lstStyle/>
+          <a:p>
+            <a:pPr algn="ctr">
+              <a:defRPr sz="1400" b="1">
+                <a:solidFill>
+                  <a:srgbClr val="FFFFFF"/>
+                </a:solidFill>
+                <a:latin typeface="Segoe UI"/>
+              </a:defRPr>
+            </a:pPr>
+            <a:r>
+              <a:t>Longitudinal</a:t>
+            </a:r>
+          </a:p>
+        </p:txBody>
+      </p:sp>
+      <p:sp>
+        <p:nvSpPr>
+          <p:cNvPr id="37" name="TextBox 36"/>
+          <p:cNvSpPr txBox="1"/>
+          <p:nvPr/>
+        </p:nvSpPr>
+        <p:spPr>
+          <a:xfrm>
+            <a:off x="2926080" y="5989320"/>
+            <a:ext cx="3200400" cy="548640"/>
+          </a:xfrm>
+          <a:prstGeom prst="rect">
+            <a:avLst/>
+          </a:prstGeom>
+          <a:noFill/>
+        </p:spPr>
+        <p:txBody>
+          <a:bodyPr wrap="square">
+            <a:spAutoFit/>
+          </a:bodyPr>
+          <a:lstStyle/>
+          <a:p>
+            <a:pPr algn="l">
+              <a:defRPr sz="1600" b="1">
+                <a:solidFill>
+                  <a:srgbClr val="002B5C"/>
+                </a:solidFill>
+                <a:latin typeface="Segoe UI"/>
+              </a:defRPr>
+            </a:pPr>
+            <a:r>
+              <a:t>Relatório Longitudinal</a:t>
+            </a:r>
+          </a:p>
+        </p:txBody>
+      </p:sp>
+      <p:sp>
+        <p:nvSpPr>
+          <p:cNvPr id="38" name="TextBox 37"/>
+          <p:cNvSpPr txBox="1"/>
+          <p:nvPr/>
+        </p:nvSpPr>
+        <p:spPr>
+          <a:xfrm>
+            <a:off x="6217920" y="5989320"/>
+            <a:ext cx="3657600" cy="548640"/>
+          </a:xfrm>
+          <a:prstGeom prst="rect">
+            <a:avLst/>
+          </a:prstGeom>
+          <a:noFill/>
+        </p:spPr>
+        <p:txBody>
+          <a:bodyPr wrap="square">
+            <a:spAutoFit/>
+          </a:bodyPr>
+          <a:lstStyle/>
+          <a:p>
+            <a:pPr algn="l">
+              <a:defRPr sz="1400" b="0">
+                <a:solidFill>
+                  <a:srgbClr val="666666"/>
+                </a:solidFill>
+                <a:latin typeface="Segoe UI"/>
+              </a:defRPr>
+            </a:pPr>
+            <a:r>
+              <a:t>Jornada do aluno ao longo dos anos</a:t>
+            </a:r>
+          </a:p>
+        </p:txBody>
+      </p:sp>
+      <p:sp>
+        <p:nvSpPr>
+          <p:cNvPr id="39" name="TextBox 38"/>
+          <p:cNvSpPr txBox="1"/>
+          <p:nvPr/>
+        </p:nvSpPr>
+        <p:spPr>
+          <a:xfrm>
+            <a:off x="10058400" y="5989320"/>
+            <a:ext cx="1828800" cy="548640"/>
+          </a:xfrm>
+          <a:prstGeom prst="rect">
+            <a:avLst/>
+          </a:prstGeom>
+          <a:noFill/>
+        </p:spPr>
+        <p:txBody>
+          <a:bodyPr wrap="square">
+            <a:spAutoFit/>
+          </a:bodyPr>
+          <a:lstStyle/>
+          <a:p>
+            <a:r>
+              <a:rPr sz="1100" u="sng">
+                <a:solidFill>
+                  <a:srgbClr val="4A90D9"/>
+                </a:solidFill>
+                <a:latin typeface="Segoe UI"/>
+                <a:hlinkClick r:id="rId8"/>
+              </a:rPr>
+              <a:t>📎 Abrir PDF</a:t>
+            </a:r>
+          </a:p>
+        </p:txBody>
+      </p:sp>
+      <p:sp>
+        <p:nvSpPr>
+          <p:cNvPr id="40" name="TextBox 39"/>
+          <p:cNvSpPr txBox="1"/>
+          <p:nvPr/>
+        </p:nvSpPr>
+        <p:spPr>
+          <a:xfrm>
+            <a:off x="731520" y="6035040"/>
+            <a:ext cx="10058400" cy="457200"/>
+          </a:xfrm>
+          <a:prstGeom prst="rect">
+            <a:avLst/>
+          </a:prstGeom>
+          <a:noFill/>
+        </p:spPr>
+        <p:txBody>
+          <a:bodyPr wrap="square">
+            <a:spAutoFit/>
+          </a:bodyPr>
+          <a:lstStyle/>
+          <a:p>
+            <a:pPr algn="ctr">
+              <a:defRPr sz="1600" b="1">
+                <a:solidFill>
+                  <a:srgbClr val="0056A0"/>
+                </a:solidFill>
+                <a:latin typeface="Segoe UI"/>
+              </a:defRPr>
+            </a:pPr>
+            <a:r>
+              <a:t>Tudo gerado automaticamente. O professor clica um botão e recebe narrativas pedagógicas reais.</a:t>
+            </a:r>
+          </a:p>
+        </p:txBody>
+      </p:sp>
+    </p:spTree>
+  </p:cSld>
+  <p:clrMapOvr>
+    <a:masterClrMapping/>
+  </p:clrMapOvr>
+</p:sld>
+</file>
+
+<file path=ppt/slides/slide28.xml><?xml version="1.0" encoding="utf-8"?>
 <p:sld xmlns:a="http://schemas.openxmlformats.org/drawingml/2006/main" xmlns:p="http://schemas.openxmlformats.org/presentationml/2006/main" xmlns:r="http://schemas.openxmlformats.org/officeDocument/2006/relationships">
   <p:cSld>
     <p:bg>
@@ -9559,7 +11437,7 @@
 </p:sld>
 </file>
 
-<file path=ppt/slides/slide25.xml><?xml version="1.0" encoding="utf-8"?>
+<file path=ppt/slides/slide29.xml><?xml version="1.0" encoding="utf-8"?>
 <p:sld xmlns:a="http://schemas.openxmlformats.org/drawingml/2006/main" xmlns:p="http://schemas.openxmlformats.org/presentationml/2006/main" xmlns:r="http://schemas.openxmlformats.org/officeDocument/2006/relationships">
   <p:cSld>
     <p:bg>
